--- a/OUR/Final/Symposium Poster 48x36 - Cuenco.pptx
+++ b/OUR/Final/Symposium Poster 48x36 - Cuenco.pptx
@@ -119,7 +119,7 @@
           <a:lstStyle/>
           <a:p>
             <a:pPr algn="l">
-              <a:defRPr sz="2200" b="0" i="0" u="none" strike="noStrike">
+              <a:defRPr sz="2100" b="0" i="0" u="none" strike="noStrike">
                 <a:solidFill>
                   <a:srgbClr val="22252B"/>
                 </a:solidFill>
@@ -127,13 +127,13 @@
               </a:defRPr>
             </a:pPr>
             <a:r>
-              <a:rPr sz="2200" b="0" i="0" u="none" strike="noStrike">
+              <a:rPr sz="2100" b="0" i="0" u="none" strike="noStrike">
                 <a:solidFill>
                   <a:srgbClr val="22252B"/>
                 </a:solidFill>
                 <a:latin typeface="Arial"/>
               </a:rPr>
-              <a:t>Build time of real CS 218 assignments (seconds, lower is better)</a:t>
+              <a:t>Seconds until the editor is ready (a course VM takes minutes)</a:t>
             </a:r>
           </a:p>
         </c:rich>
@@ -145,7 +145,7 @@
     <c:plotArea>
       <c:layout/>
       <c:barChart>
-        <c:barDir val="col"/>
+        <c:barDir val="bar"/>
         <c:grouping val="clustered"/>
         <c:varyColors val="0"/>
         <c:ser>
@@ -157,7 +157,7 @@
               <c:strCache>
                 <c:ptCount val="1"/>
                 <c:pt idx="0">
-                  <c:v>Linux amd64, native (cell 1)</c:v>
+                  <c:v>Seconds until the editor is ready</c:v>
                 </c:pt>
               </c:strCache>
             </c:strRef>
@@ -176,7 +176,7 @@
               <a:lstStyle/>
               <a:p>
                 <a:pPr>
-                  <a:defRPr b="0" i="0" strike="noStrike" sz="1400" u="none">
+                  <a:defRPr b="0" i="0" strike="noStrike" sz="1600" u="none">
                     <a:solidFill>
                       <a:srgbClr val="22252B"/>
                     </a:solidFill>
@@ -200,16 +200,16 @@
                 <c:ptCount val="4"/>
                 <c:lvl>
                   <c:pt idx="0">
-                    <c:v>ast3</c:v>
+                    <c:v>Linux on ARM</c:v>
                   </c:pt>
                   <c:pt idx="1">
-                    <c:v>ast04</c:v>
+                    <c:v>Apple Silicon Mac</c:v>
                   </c:pt>
                   <c:pt idx="2">
-                    <c:v>ast06</c:v>
+                    <c:v>Linux PC</c:v>
                   </c:pt>
                   <c:pt idx="3">
-                    <c:v>ast12</c:v>
+                    <c:v>Windows 11 PC</c:v>
                   </c:pt>
                 </c:lvl>
               </c:multiLvlStrCache>
@@ -222,283 +222,16 @@
                 <c:formatCode>General</c:formatCode>
                 <c:ptCount val="4"/>
                 <c:pt idx="0">
-                  <c:v>0</c:v>
+                  <c:v>6.7</c:v>
                 </c:pt>
                 <c:pt idx="1">
-                  <c:v>0</c:v>
-                </c:pt>
-                <c:pt idx="2">
-                  <c:v>0.2</c:v>
-                </c:pt>
-                <c:pt idx="3">
-                  <c:v>0.3</c:v>
-                </c:pt>
-              </c:numCache>
-            </c:numRef>
-          </c:val>
-        </c:ser>
-        <c:ser>
-          <c:idx val="1"/>
-          <c:order val="1"/>
-          <c:tx>
-            <c:strRef>
-              <c:f>Sheet1!$C$1</c:f>
-              <c:strCache>
-                <c:ptCount val="1"/>
-                <c:pt idx="0">
-                  <c:v>Windows 11, native (cell 3)</c:v>
-                </c:pt>
-              </c:strCache>
-            </c:strRef>
-          </c:tx>
-          <c:spPr>
-            <a:solidFill>
-              <a:srgbClr val="6FA8E8"/>
-            </a:solidFill>
-            <a:effectLst/>
-          </c:spPr>
-          <c:invertIfNegative val="0"/>
-          <c:dLbls>
-            <c:numFmt formatCode="0.0" sourceLinked="0"/>
-            <c:txPr>
-              <a:bodyPr/>
-              <a:lstStyle/>
-              <a:p>
-                <a:pPr>
-                  <a:defRPr b="0" i="0" strike="noStrike" sz="1400" u="none">
-                    <a:solidFill>
-                      <a:srgbClr val="22252B"/>
-                    </a:solidFill>
-                    <a:latin typeface="Arial"/>
-                  </a:defRPr>
-                </a:pPr>
-              </a:p>
-            </c:txPr>
-            <c:showLegendKey val="0"/>
-            <c:showVal val="1"/>
-            <c:showCatName val="0"/>
-            <c:showSerName val="0"/>
-            <c:showPercent val="0"/>
-            <c:showBubbleSize val="0"/>
-            <c:showLeaderLines val="0"/>
-          </c:dLbls>
-          <c:cat>
-            <c:multiLvlStrRef>
-              <c:f>Sheet1!$A$2:$A$5</c:f>
-              <c:multiLvlStrCache>
-                <c:ptCount val="4"/>
-                <c:lvl>
-                  <c:pt idx="0">
-                    <c:v>ast3</c:v>
-                  </c:pt>
-                  <c:pt idx="1">
-                    <c:v>ast04</c:v>
-                  </c:pt>
-                  <c:pt idx="2">
-                    <c:v>ast06</c:v>
-                  </c:pt>
-                  <c:pt idx="3">
-                    <c:v>ast12</c:v>
-                  </c:pt>
-                </c:lvl>
-              </c:multiLvlStrCache>
-            </c:multiLvlStrRef>
-          </c:cat>
-          <c:val>
-            <c:numRef>
-              <c:f>Sheet1!$C$2:$C$5</c:f>
-              <c:numCache>
-                <c:formatCode>General</c:formatCode>
-                <c:ptCount val="4"/>
-                <c:pt idx="0">
-                  <c:v>0.2</c:v>
-                </c:pt>
-                <c:pt idx="1">
-                  <c:v>0.2</c:v>
+                  <c:v>4.8</c:v>
                 </c:pt>
                 <c:pt idx="2">
                   <c:v>0.5</c:v>
                 </c:pt>
                 <c:pt idx="3">
                   <c:v>0.6</c:v>
-                </c:pt>
-              </c:numCache>
-            </c:numRef>
-          </c:val>
-        </c:ser>
-        <c:ser>
-          <c:idx val="2"/>
-          <c:order val="2"/>
-          <c:tx>
-            <c:strRef>
-              <c:f>Sheet1!$D$1</c:f>
-              <c:strCache>
-                <c:ptCount val="1"/>
-                <c:pt idx="0">
-                  <c:v>Linux arm64, QEMU emulated (cell 2)</c:v>
-                </c:pt>
-              </c:strCache>
-            </c:strRef>
-          </c:tx>
-          <c:spPr>
-            <a:solidFill>
-              <a:srgbClr val="B10202"/>
-            </a:solidFill>
-            <a:effectLst/>
-          </c:spPr>
-          <c:invertIfNegative val="0"/>
-          <c:dLbls>
-            <c:numFmt formatCode="0.0" sourceLinked="0"/>
-            <c:txPr>
-              <a:bodyPr/>
-              <a:lstStyle/>
-              <a:p>
-                <a:pPr>
-                  <a:defRPr b="0" i="0" strike="noStrike" sz="1400" u="none">
-                    <a:solidFill>
-                      <a:srgbClr val="22252B"/>
-                    </a:solidFill>
-                    <a:latin typeface="Arial"/>
-                  </a:defRPr>
-                </a:pPr>
-              </a:p>
-            </c:txPr>
-            <c:showLegendKey val="0"/>
-            <c:showVal val="1"/>
-            <c:showCatName val="0"/>
-            <c:showSerName val="0"/>
-            <c:showPercent val="0"/>
-            <c:showBubbleSize val="0"/>
-            <c:showLeaderLines val="0"/>
-          </c:dLbls>
-          <c:cat>
-            <c:multiLvlStrRef>
-              <c:f>Sheet1!$A$2:$A$5</c:f>
-              <c:multiLvlStrCache>
-                <c:ptCount val="4"/>
-                <c:lvl>
-                  <c:pt idx="0">
-                    <c:v>ast3</c:v>
-                  </c:pt>
-                  <c:pt idx="1">
-                    <c:v>ast04</c:v>
-                  </c:pt>
-                  <c:pt idx="2">
-                    <c:v>ast06</c:v>
-                  </c:pt>
-                  <c:pt idx="3">
-                    <c:v>ast12</c:v>
-                  </c:pt>
-                </c:lvl>
-              </c:multiLvlStrCache>
-            </c:multiLvlStrRef>
-          </c:cat>
-          <c:val>
-            <c:numRef>
-              <c:f>Sheet1!$D$2:$D$5</c:f>
-              <c:numCache>
-                <c:formatCode>General</c:formatCode>
-                <c:ptCount val="4"/>
-                <c:pt idx="0">
-                  <c:v>0.3</c:v>
-                </c:pt>
-                <c:pt idx="1">
-                  <c:v>0.3</c:v>
-                </c:pt>
-                <c:pt idx="2">
-                  <c:v>2.8</c:v>
-                </c:pt>
-                <c:pt idx="3">
-                  <c:v>3.6</c:v>
-                </c:pt>
-              </c:numCache>
-            </c:numRef>
-          </c:val>
-        </c:ser>
-        <c:ser>
-          <c:idx val="3"/>
-          <c:order val="3"/>
-          <c:tx>
-            <c:strRef>
-              <c:f>Sheet1!$E$1</c:f>
-              <c:strCache>
-                <c:ptCount val="1"/>
-                <c:pt idx="0">
-                  <c:v>macOS M1 Pro, emulated (cell 4)</c:v>
-                </c:pt>
-              </c:strCache>
-            </c:strRef>
-          </c:tx>
-          <c:spPr>
-            <a:solidFill>
-              <a:srgbClr val="E8776F"/>
-            </a:solidFill>
-            <a:effectLst/>
-          </c:spPr>
-          <c:invertIfNegative val="0"/>
-          <c:dLbls>
-            <c:numFmt formatCode="0.0" sourceLinked="0"/>
-            <c:txPr>
-              <a:bodyPr/>
-              <a:lstStyle/>
-              <a:p>
-                <a:pPr>
-                  <a:defRPr b="0" i="0" strike="noStrike" sz="1400" u="none">
-                    <a:solidFill>
-                      <a:srgbClr val="22252B"/>
-                    </a:solidFill>
-                    <a:latin typeface="Arial"/>
-                  </a:defRPr>
-                </a:pPr>
-              </a:p>
-            </c:txPr>
-            <c:showLegendKey val="0"/>
-            <c:showVal val="1"/>
-            <c:showCatName val="0"/>
-            <c:showSerName val="0"/>
-            <c:showPercent val="0"/>
-            <c:showBubbleSize val="0"/>
-            <c:showLeaderLines val="0"/>
-          </c:dLbls>
-          <c:cat>
-            <c:multiLvlStrRef>
-              <c:f>Sheet1!$A$2:$A$5</c:f>
-              <c:multiLvlStrCache>
-                <c:ptCount val="4"/>
-                <c:lvl>
-                  <c:pt idx="0">
-                    <c:v>ast3</c:v>
-                  </c:pt>
-                  <c:pt idx="1">
-                    <c:v>ast04</c:v>
-                  </c:pt>
-                  <c:pt idx="2">
-                    <c:v>ast06</c:v>
-                  </c:pt>
-                  <c:pt idx="3">
-                    <c:v>ast12</c:v>
-                  </c:pt>
-                </c:lvl>
-              </c:multiLvlStrCache>
-            </c:multiLvlStrRef>
-          </c:cat>
-          <c:val>
-            <c:numRef>
-              <c:f>Sheet1!$E$2:$E$5</c:f>
-              <c:numCache>
-                <c:formatCode>General</c:formatCode>
-                <c:ptCount val="4"/>
-                <c:pt idx="0">
-                  <c:v>0.4</c:v>
-                </c:pt>
-                <c:pt idx="1">
-                  <c:v>0.4</c:v>
-                </c:pt>
-                <c:pt idx="2">
-                  <c:v>2.5</c:v>
-                </c:pt>
-                <c:pt idx="3">
-                  <c:v>3.1</c:v>
                 </c:pt>
               </c:numCache>
             </c:numRef>
@@ -511,7 +244,7 @@
             <a:lstStyle/>
             <a:p>
               <a:pPr>
-                <a:defRPr b="0" i="0" strike="noStrike" sz="1400" u="none">
+                <a:defRPr b="0" i="0" strike="noStrike" sz="1600" u="none">
                   <a:solidFill>
                     <a:srgbClr val="22252B"/>
                   </a:solidFill>
@@ -528,7 +261,7 @@
           <c:showBubbleSize val="0"/>
           <c:showLeaderLines val="0"/>
         </c:dLbls>
-        <c:gapWidth val="60"/>
+        <c:gapWidth val="45"/>
         <c:overlap val="0"/>
         <c:axId val="2094734554"/>
         <c:axId val="2094734552"/>
@@ -540,11 +273,11 @@
           <c:orientation val="minMax"/>
         </c:scaling>
         <c:delete val="0"/>
-        <c:axPos val="b"/>
+        <c:axPos val="l"/>
         <c:numFmt formatCode="General" sourceLinked="1"/>
         <c:majorTickMark val="out"/>
         <c:minorTickMark val="none"/>
-        <c:tickLblPos val="low"/>
+        <c:tickLblPos val="nextTo"/>
         <c:spPr>
           <a:ln w="12700" cap="flat">
             <a:noFill/>
@@ -557,7 +290,7 @@
           <a:lstStyle/>
           <a:p>
             <a:pPr>
-              <a:defRPr sz="1800" b="0" i="0" u="none" strike="noStrike">
+              <a:defRPr sz="1700" b="0" i="0" u="none" strike="noStrike">
                 <a:solidFill>
                   <a:srgbClr val="22252B"/>
                 </a:solidFill>
@@ -577,11 +310,11 @@
         <c:axId val="2094734552"/>
         <c:scaling>
           <c:orientation val="minMax"/>
-          <c:max val="4"/>
+          <c:max val="8"/>
           <c:min val="0"/>
         </c:scaling>
         <c:delete val="0"/>
-        <c:axPos val="l"/>
+        <c:axPos val="b"/>
         <c:majorGridlines>
           <c:spPr>
             <a:ln w="12700" cap="flat">
@@ -596,7 +329,7 @@
         <c:numFmt formatCode="General" sourceLinked="0"/>
         <c:majorTickMark val="out"/>
         <c:minorTickMark val="none"/>
-        <c:tickLblPos val="nextTo"/>
+        <c:tickLblPos val="low"/>
         <c:spPr>
           <a:ln w="12700" cap="flat">
             <a:noFill/>
@@ -622,7 +355,7 @@
         <c:crossAx val="2094734554"/>
         <c:crosses val="autoZero"/>
         <c:crossBetween val="between"/>
-        <c:majorUnit val="1"/>
+        <c:majorUnit val="2"/>
       </c:valAx>
       <c:spPr>
         <a:solidFill>
@@ -634,26 +367,6 @@
         <a:effectLst/>
       </c:spPr>
     </c:plotArea>
-    <c:legend>
-      <c:legendPos val="b"/>
-      <c:overlay val="0"/>
-      <c:txPr>
-        <a:bodyPr/>
-        <a:lstStyle/>
-        <a:p>
-          <a:pPr>
-            <a:defRPr sz="1600">
-              <a:solidFill>
-                <a:srgbClr val="22252B"/>
-              </a:solidFill>
-              <a:latin typeface="Arial"/>
-              <a:cs typeface="Arial"/>
-            </a:defRPr>
-          </a:pPr>
-          <a:endParaRPr lang="en-US"/>
-        </a:p>
-      </c:txPr>
-    </c:legend>
     <c:plotVisOnly val="1"/>
     <c:dispBlanksAs val="span"/>
   </c:chart>
@@ -1513,7 +1226,7 @@
         <p:spPr>
           <a:xfrm>
             <a:off x="1097280" y="1965960"/>
-            <a:ext cx="31089600" cy="1188720"/>
+            <a:ext cx="32918400" cy="1188720"/>
           </a:xfrm>
           <a:prstGeom prst="rect">
             <a:avLst/>
@@ -1529,7 +1242,7 @@
               <a:buNone/>
             </a:pPr>
             <a:r>
-              <a:rPr lang="en-US" sz="3600" dirty="0">
+              <a:rPr lang="en-US" sz="3200" dirty="0">
                 <a:solidFill>
                   <a:srgbClr val="FFFFFF"/>
                 </a:solidFill>
@@ -1537,9 +1250,9 @@
                 <a:ea typeface="Arial" pitchFamily="34" charset="-122"/>
                 <a:cs typeface="Arial" pitchFamily="34" charset="-120"/>
               </a:rPr>
-              <a:t>Decentralized, browser-based Docker IDEs for C++ and x86-64 assembly at UNLV, measured on the machines students actually own</a:t>
-            </a:r>
-            <a:endParaRPr lang="en-US" sz="3600" dirty="0"/>
+              <a:t>Does the same programming environment run on every student’s laptop? Browser-based Docker IDEs for UNLV’s C++ and x86-64 assembly courses, tested on the operating systems and processors students own</a:t>
+            </a:r>
+            <a:endParaRPr lang="en-US" sz="3200" dirty="0"/>
           </a:p>
         </p:txBody>
       </p:sp>
@@ -1685,7 +1398,7 @@
                 <a:ea typeface="Arial" pitchFamily="34" charset="-122"/>
                 <a:cs typeface="Arial" pitchFamily="34" charset="-120"/>
               </a:rPr>
-              <a:t>The problem</a:t>
+              <a:t>The problem: week one is lost to setup</a:t>
             </a:r>
             <a:endParaRPr lang="en-US" sz="4000" dirty="0"/>
           </a:p>
@@ -1700,7 +1413,7 @@
         <p:spPr>
           <a:xfrm>
             <a:off x="914400" y="6355080"/>
-            <a:ext cx="13350240" cy="2468880"/>
+            <a:ext cx="13350240" cy="3566160"/>
           </a:xfrm>
           <a:prstGeom prst="rect">
             <a:avLst/>
@@ -1714,10 +1427,10 @@
           <a:p>
             <a:pPr indent="0" marL="0">
               <a:lnSpc>
-                <a:spcPct val="105000"/>
+                <a:spcPct val="104000"/>
               </a:lnSpc>
               <a:spcAft>
-                <a:spcPts val="800"/>
+                <a:spcPts val="600"/>
               </a:spcAft>
               <a:buNone/>
             </a:pPr>
@@ -1730,7 +1443,7 @@
                 <a:ea typeface="Arial" pitchFamily="34" charset="-122"/>
                 <a:cs typeface="Arial" pitchFamily="34" charset="-120"/>
               </a:rPr>
-              <a:t>Every systems course loses its first week to installing a compiler, an assembler, a debugger, and an editor on dozens of different laptops. Prior work measured 75–100 min of class time and 65–90 min of instructor time per semester lost to installation [6], and support traffic dominated by environment mismatch rather than course content [3]. Students with M1/M2 Macs often cannot run the x86 virtual machines their courses assume at all [4].</a:t>
+              <a:t>Every systems course starts the same way: a compiler, an assembler, a debugger, and an editor have to work on dozens of different laptops before anyone learns anything. Prior studies measured 75–100 minutes of class time per semester lost to installs [6], support traffic dominated by “it works on my machine” [3], and students with Apple Silicon Macs unable to run the course’s virtual machine at all [4]. At UNLV this touches several hundred CS 135 and CS 218 students every year.</a:t>
             </a:r>
             <a:endParaRPr lang="en-US" sz="2400" dirty="0"/>
           </a:p>
@@ -1744,7 +1457,7 @@
         </p:nvSpPr>
         <p:spPr>
           <a:xfrm>
-            <a:off x="914400" y="9006840"/>
+            <a:off x="914400" y="10012680"/>
             <a:ext cx="13350240" cy="822960"/>
           </a:xfrm>
           <a:prstGeom prst="rect">
@@ -1769,7 +1482,7 @@
                 <a:ea typeface="Arial" pitchFamily="34" charset="-122"/>
                 <a:cs typeface="Arial" pitchFamily="34" charset="-120"/>
               </a:rPr>
-              <a:t>UNLV followed the same arc, one stage behind</a:t>
+              <a:t>UNLV followed the same path as everyone else, one step behind</a:t>
             </a:r>
             <a:endParaRPr lang="en-US" sz="4000" dirty="0"/>
           </a:p>
@@ -1783,7 +1496,7 @@
         </p:nvSpPr>
         <p:spPr>
           <a:xfrm>
-            <a:off x="914400" y="10131552"/>
+            <a:off x="914400" y="11119104"/>
             <a:ext cx="502920" cy="502920"/>
           </a:xfrm>
           <a:prstGeom prst="ellipse">
@@ -1808,8 +1521,8 @@
         </p:nvSpPr>
         <p:spPr>
           <a:xfrm>
-            <a:off x="1161288" y="10652760"/>
-            <a:ext cx="0" cy="1188720"/>
+            <a:off x="1161288" y="11658600"/>
+            <a:ext cx="0" cy="1234440"/>
           </a:xfrm>
           <a:prstGeom prst="line">
             <a:avLst/>
@@ -1831,8 +1544,8 @@
         </p:nvSpPr>
         <p:spPr>
           <a:xfrm>
-            <a:off x="1691640" y="9966960"/>
-            <a:ext cx="12573000" cy="777240"/>
+            <a:off x="1691640" y="10972800"/>
+            <a:ext cx="12573000" cy="731520"/>
           </a:xfrm>
           <a:prstGeom prst="rect">
             <a:avLst/>
@@ -1848,7 +1561,7 @@
               <a:buNone/>
             </a:pPr>
             <a:r>
-              <a:rPr lang="en-US" sz="2600" b="1" dirty="0">
+              <a:rPr lang="en-US" sz="2500" b="1" dirty="0">
                 <a:solidFill>
                   <a:srgbClr val="22252B"/>
                 </a:solidFill>
@@ -1856,9 +1569,9 @@
                 <a:ea typeface="Arial" pitchFamily="34" charset="-122"/>
                 <a:cs typeface="Arial" pitchFamily="34" charset="-120"/>
               </a:rPr>
-              <a:t>Shared login servers (SSH / PuTTY)</a:t>
-            </a:r>
-            <a:endParaRPr lang="en-US" sz="2600" dirty="0"/>
+              <a:t>1. Shared login servers (SSH, PuTTY)</a:t>
+            </a:r>
+            <a:endParaRPr lang="en-US" sz="2500" dirty="0"/>
           </a:p>
         </p:txBody>
       </p:sp>
@@ -1870,8 +1583,8 @@
         </p:nvSpPr>
         <p:spPr>
           <a:xfrm>
-            <a:off x="1691640" y="10680192"/>
-            <a:ext cx="12573000" cy="1097280"/>
+            <a:off x="1691640" y="11686032"/>
+            <a:ext cx="12573000" cy="1143000"/>
           </a:xfrm>
           <a:prstGeom prst="rect">
             <a:avLst/>
@@ -1898,7 +1611,7 @@
                 <a:ea typeface="Arial" pitchFamily="34" charset="-122"/>
                 <a:cs typeface="Arial" pitchFamily="34" charset="-120"/>
               </a:rPr>
-              <a:t>bobby · sally · cardiac, a submit script that required logging in even from lab machines. Decommissioned; the wiki that documented them was deleted in 2025.</a:t>
+              <a:t>bobby · sally · cardiac. Now decommissioned, and the wiki that documented them was deleted in 2025.</a:t>
             </a:r>
             <a:endParaRPr lang="en-US" sz="2000" dirty="0"/>
           </a:p>
@@ -1912,7 +1625,7 @@
         </p:nvSpPr>
         <p:spPr>
           <a:xfrm>
-            <a:off x="914400" y="11960352"/>
+            <a:off x="914400" y="12993624"/>
             <a:ext cx="502920" cy="502920"/>
           </a:xfrm>
           <a:prstGeom prst="ellipse">
@@ -1937,8 +1650,8 @@
         </p:nvSpPr>
         <p:spPr>
           <a:xfrm>
-            <a:off x="1161288" y="12481560"/>
-            <a:ext cx="0" cy="1188720"/>
+            <a:off x="1161288" y="13533120"/>
+            <a:ext cx="0" cy="1234440"/>
           </a:xfrm>
           <a:prstGeom prst="line">
             <a:avLst/>
@@ -1960,8 +1673,8 @@
         </p:nvSpPr>
         <p:spPr>
           <a:xfrm>
-            <a:off x="1691640" y="11795760"/>
-            <a:ext cx="12573000" cy="777240"/>
+            <a:off x="1691640" y="12847320"/>
+            <a:ext cx="12573000" cy="731520"/>
           </a:xfrm>
           <a:prstGeom prst="rect">
             <a:avLst/>
@@ -1977,7 +1690,7 @@
               <a:buNone/>
             </a:pPr>
             <a:r>
-              <a:rPr lang="en-US" sz="2600" b="1" dirty="0">
+              <a:rPr lang="en-US" sz="2500" b="1" dirty="0">
                 <a:solidFill>
                   <a:srgbClr val="22252B"/>
                 </a:solidFill>
@@ -1985,9 +1698,9 @@
                 <a:ea typeface="Arial" pitchFamily="34" charset="-122"/>
                 <a:cs typeface="Arial" pitchFamily="34" charset="-120"/>
               </a:rPr>
-              <a:t>Virtual machines, per course</a:t>
-            </a:r>
-            <a:endParaRPr lang="en-US" sz="2600" dirty="0"/>
+              <a:t>2. Virtual machines, one per course</a:t>
+            </a:r>
+            <a:endParaRPr lang="en-US" sz="2500" dirty="0"/>
           </a:p>
         </p:txBody>
       </p:sp>
@@ -1999,8 +1712,8 @@
         </p:nvSpPr>
         <p:spPr>
           <a:xfrm>
-            <a:off x="1691640" y="12508992"/>
-            <a:ext cx="12573000" cy="1097280"/>
+            <a:off x="1691640" y="13560552"/>
+            <a:ext cx="12573000" cy="1143000"/>
           </a:xfrm>
           <a:prstGeom prst="rect">
             <a:avLst/>
@@ -2027,7 +1740,7 @@
                 <a:ea typeface="Arial" pitchFamily="34" charset="-122"/>
                 <a:cs typeface="Arial" pitchFamily="34" charset="-120"/>
               </a:rPr>
-              <a:t>CS 218 today: a VirtualBox .ova for Intel and an experimental Fall-2023 UTM image for Apple Silicon so slow the course warns VS Code “may not be usable.” Primary M1/M2 advice: go to the TBE-A311 lab with a USB drive.</a:t>
+              <a:t>CS 218 today: a 19 GB VirtualBox image for Intel and an experimental 2023 image for Apple Silicon so slow the course warns the editor “may not be usable.” Official advice for M1/M2 owners: go to the lab with a USB drive.</a:t>
             </a:r>
             <a:endParaRPr lang="en-US" sz="2000" dirty="0"/>
           </a:p>
@@ -2041,7 +1754,7 @@
         </p:nvSpPr>
         <p:spPr>
           <a:xfrm>
-            <a:off x="914400" y="13789152"/>
+            <a:off x="914400" y="14868144"/>
             <a:ext cx="502920" cy="502920"/>
           </a:xfrm>
           <a:prstGeom prst="ellipse">
@@ -2066,8 +1779,8 @@
         </p:nvSpPr>
         <p:spPr>
           <a:xfrm>
-            <a:off x="1691640" y="13624560"/>
-            <a:ext cx="12573000" cy="777240"/>
+            <a:off x="1691640" y="14721840"/>
+            <a:ext cx="12573000" cy="731520"/>
           </a:xfrm>
           <a:prstGeom prst="rect">
             <a:avLst/>
@@ -2083,7 +1796,7 @@
               <a:buNone/>
             </a:pPr>
             <a:r>
-              <a:rPr lang="en-US" sz="2600" b="1" dirty="0">
+              <a:rPr lang="en-US" sz="2500" b="1" dirty="0">
                 <a:solidFill>
                   <a:srgbClr val="B10202"/>
                 </a:solidFill>
@@ -2091,9 +1804,9 @@
                 <a:ea typeface="Arial" pitchFamily="34" charset="-122"/>
                 <a:cs typeface="Arial" pitchFamily="34" charset="-120"/>
               </a:rPr>
-              <a:t>Local containers (this project)</a:t>
-            </a:r>
-            <a:endParaRPr lang="en-US" sz="2600" dirty="0"/>
+              <a:t>3. A container on the student’s own laptop (this project)</a:t>
+            </a:r>
+            <a:endParaRPr lang="en-US" sz="2500" dirty="0"/>
           </a:p>
         </p:txBody>
       </p:sp>
@@ -2105,8 +1818,8 @@
         </p:nvSpPr>
         <p:spPr>
           <a:xfrm>
-            <a:off x="1691640" y="14337792"/>
-            <a:ext cx="12573000" cy="1097280"/>
+            <a:off x="1691640" y="15435072"/>
+            <a:ext cx="12573000" cy="1143000"/>
           </a:xfrm>
           <a:prstGeom prst="rect">
             <a:avLst/>
@@ -2133,7 +1846,7 @@
                 <a:ea typeface="Arial" pitchFamily="34" charset="-122"/>
                 <a:cs typeface="Arial" pitchFamily="34" charset="-120"/>
               </a:rPr>
-              <a:t>One 552 MB image, one command, VS Code in a browser tab. Files stay in a normal folder on the student’s disk. No server, no account, no VPN, offline after the first pull.</a:t>
+              <a:t>One 552 MB download, one command, VS Code in a browser tab. Files stay in a normal folder on the laptop. No server, no account, no VPN, works offline.</a:t>
             </a:r>
             <a:endParaRPr lang="en-US" sz="2000" dirty="0"/>
           </a:p>
@@ -2147,7 +1860,7 @@
         </p:nvSpPr>
         <p:spPr>
           <a:xfrm>
-            <a:off x="914400" y="15636240"/>
+            <a:off x="914400" y="16824960"/>
             <a:ext cx="13350240" cy="822960"/>
           </a:xfrm>
           <a:prstGeom prst="rect">
@@ -2172,672 +1885,9 @@
                 <a:ea typeface="Arial" pitchFamily="34" charset="-122"/>
                 <a:cs typeface="Arial" pitchFamily="34" charset="-120"/>
               </a:rPr>
-              <a:t>Where this sits in the design space</a:t>
+              <a:t>Every approach hands the setup burden to someone</a:t>
             </a:r>
             <a:endParaRPr lang="en-US" sz="4000" dirty="0"/>
-          </a:p>
-        </p:txBody>
-      </p:sp>
-      <p:sp>
-        <p:nvSpPr>
-          <p:cNvPr id="22" name="Text 20"/>
-          <p:cNvSpPr txBox="1"/>
-          <p:nvPr/>
-        </p:nvSpPr>
-        <p:spPr>
-          <a:xfrm>
-            <a:off x="914400" y="16596360"/>
-            <a:ext cx="13350240" cy="548640"/>
-          </a:xfrm>
-          <a:prstGeom prst="rect">
-            <a:avLst/>
-          </a:prstGeom>
-          <a:noFill/>
-          <a:ln/>
-        </p:spPr>
-        <p:txBody>
-          <a:bodyPr wrap="square" lIns="0" tIns="0" rIns="0" bIns="0" rtlCol="0" anchor="ctr"/>
-          <a:lstStyle/>
-          <a:p>
-            <a:pPr indent="0" marL="0">
-              <a:buNone/>
-            </a:pPr>
-            <a:r>
-              <a:rPr lang="en-US" sz="2400" b="1" dirty="0">
-                <a:solidFill>
-                  <a:srgbClr val="22252B"/>
-                </a:solidFill>
-                <a:latin typeface="Arial" pitchFamily="34" charset="0"/>
-                <a:ea typeface="Arial" pitchFamily="34" charset="-122"/>
-                <a:cs typeface="Arial" pitchFamily="34" charset="-120"/>
-              </a:rPr>
-              <a:t>Harvard CS50 [1, 2]</a:t>
-            </a:r>
-            <a:endParaRPr lang="en-US" sz="2400" dirty="0"/>
-          </a:p>
-        </p:txBody>
-      </p:sp>
-      <p:sp>
-        <p:nvSpPr>
-          <p:cNvPr id="23" name="Text 21"/>
-          <p:cNvSpPr txBox="1"/>
-          <p:nvPr/>
-        </p:nvSpPr>
-        <p:spPr>
-          <a:xfrm>
-            <a:off x="914400" y="17126712"/>
-            <a:ext cx="13350240" cy="1298448"/>
-          </a:xfrm>
-          <a:prstGeom prst="rect">
-            <a:avLst/>
-          </a:prstGeom>
-          <a:noFill/>
-          <a:ln/>
-        </p:spPr>
-        <p:txBody>
-          <a:bodyPr wrap="square" lIns="0" tIns="0" rIns="0" bIns="0" rtlCol="0" anchor="t"/>
-          <a:lstStyle/>
-          <a:p>
-            <a:pPr indent="0" marL="0">
-              <a:lnSpc>
-                <a:spcPct val="100000"/>
-              </a:lnSpc>
-              <a:buNone/>
-            </a:pPr>
-            <a:r>
-              <a:rPr lang="en-US" sz="1900" dirty="0">
-                <a:solidFill>
-                  <a:srgbClr val="22252B"/>
-                </a:solidFill>
-                <a:latin typeface="Arial" pitchFamily="34" charset="0"/>
-                <a:ea typeface="Arial" pitchFamily="34" charset="-122"/>
-                <a:cs typeface="Arial" pitchFamily="34" charset="-120"/>
-              </a:rPr>
-              <a:t>Cluster → cloud VMs → client-side appliance VM → Docker on GitHub Codespaces (700,000+ users). Browser VS Code, but the container runs on GitHub: account, network, provider dependence; students leave “not sure how to set up an IDE on my computer.”</a:t>
-            </a:r>
-            <a:endParaRPr lang="en-US" sz="1900" dirty="0"/>
-          </a:p>
-        </p:txBody>
-      </p:sp>
-      <p:sp>
-        <p:nvSpPr>
-          <p:cNvPr id="24" name="Text 22"/>
-          <p:cNvSpPr txBox="1"/>
-          <p:nvPr/>
-        </p:nvSpPr>
-        <p:spPr>
-          <a:xfrm>
-            <a:off x="914400" y="18470880"/>
-            <a:ext cx="13350240" cy="548640"/>
-          </a:xfrm>
-          <a:prstGeom prst="rect">
-            <a:avLst/>
-          </a:prstGeom>
-          <a:noFill/>
-          <a:ln/>
-        </p:spPr>
-        <p:txBody>
-          <a:bodyPr wrap="square" lIns="0" tIns="0" rIns="0" bIns="0" rtlCol="0" anchor="ctr"/>
-          <a:lstStyle/>
-          <a:p>
-            <a:pPr indent="0" marL="0">
-              <a:buNone/>
-            </a:pPr>
-            <a:r>
-              <a:rPr lang="en-US" sz="2400" b="1" dirty="0">
-                <a:solidFill>
-                  <a:srgbClr val="22252B"/>
-                </a:solidFill>
-                <a:latin typeface="Arial" pitchFamily="34" charset="0"/>
-                <a:ea typeface="Arial" pitchFamily="34" charset="-122"/>
-                <a:cs typeface="Arial" pitchFamily="34" charset="-120"/>
-              </a:rPr>
-              <a:t>CodeDive, South Korea [8]</a:t>
-            </a:r>
-            <a:endParaRPr lang="en-US" sz="2400" dirty="0"/>
-          </a:p>
-        </p:txBody>
-      </p:sp>
-      <p:sp>
-        <p:nvSpPr>
-          <p:cNvPr id="25" name="Text 23"/>
-          <p:cNvSpPr txBox="1"/>
-          <p:nvPr/>
-        </p:nvSpPr>
-        <p:spPr>
-          <a:xfrm>
-            <a:off x="914400" y="19001232"/>
-            <a:ext cx="13350240" cy="1298448"/>
-          </a:xfrm>
-          <a:prstGeom prst="rect">
-            <a:avLst/>
-          </a:prstGeom>
-          <a:noFill/>
-          <a:ln/>
-        </p:spPr>
-        <p:txBody>
-          <a:bodyPr wrap="square" lIns="0" tIns="0" rIns="0" bIns="0" rtlCol="0" anchor="t"/>
-          <a:lstStyle/>
-          <a:p>
-            <a:pPr indent="0" marL="0">
-              <a:lnSpc>
-                <a:spcPct val="100000"/>
-              </a:lnSpc>
-              <a:buNone/>
-            </a:pPr>
-            <a:r>
-              <a:rPr lang="en-US" sz="1900" dirty="0">
-                <a:solidFill>
-                  <a:srgbClr val="22252B"/>
-                </a:solidFill>
-                <a:latin typeface="Arial" pitchFamily="34" charset="0"/>
-                <a:ea typeface="Arial" pitchFamily="34" charset="-122"/>
-                <a:cs typeface="Arial" pitchFamily="34" charset="-120"/>
-              </a:rPr>
-              <a:t>Browser VS Code in per-student containers on a Kubernetes cluster, with kernel-level process tracing and a code snapshot after every 1 s typing pause (24,845 snapshots from 95 students in two weeks). Visibility for instructors, at the cost of telemetry and a GDPR/FERPA framework the authors have not yet built.</a:t>
-            </a:r>
-            <a:endParaRPr lang="en-US" sz="1900" dirty="0"/>
-          </a:p>
-        </p:txBody>
-      </p:sp>
-      <p:sp>
-        <p:nvSpPr>
-          <p:cNvPr id="26" name="Text 24"/>
-          <p:cNvSpPr txBox="1"/>
-          <p:nvPr/>
-        </p:nvSpPr>
-        <p:spPr>
-          <a:xfrm>
-            <a:off x="914400" y="20345400"/>
-            <a:ext cx="13350240" cy="548640"/>
-          </a:xfrm>
-          <a:prstGeom prst="rect">
-            <a:avLst/>
-          </a:prstGeom>
-          <a:noFill/>
-          <a:ln/>
-        </p:spPr>
-        <p:txBody>
-          <a:bodyPr wrap="square" lIns="0" tIns="0" rIns="0" bIns="0" rtlCol="0" anchor="ctr"/>
-          <a:lstStyle/>
-          <a:p>
-            <a:pPr indent="0" marL="0">
-              <a:buNone/>
-            </a:pPr>
-            <a:r>
-              <a:rPr lang="en-US" sz="2400" b="1" dirty="0">
-                <a:solidFill>
-                  <a:srgbClr val="22252B"/>
-                </a:solidFill>
-                <a:latin typeface="Arial" pitchFamily="34" charset="0"/>
-                <a:ea typeface="Arial" pitchFamily="34" charset="-122"/>
-                <a:cs typeface="Arial" pitchFamily="34" charset="-120"/>
-              </a:rPr>
-              <a:t>Virtual machines [5, 6, 7]</a:t>
-            </a:r>
-            <a:endParaRPr lang="en-US" sz="2400" dirty="0"/>
-          </a:p>
-        </p:txBody>
-      </p:sp>
-      <p:sp>
-        <p:nvSpPr>
-          <p:cNvPr id="27" name="Text 25"/>
-          <p:cNvSpPr txBox="1"/>
-          <p:nvPr/>
-        </p:nvSpPr>
-        <p:spPr>
-          <a:xfrm>
-            <a:off x="914400" y="20875752"/>
-            <a:ext cx="13350240" cy="1298448"/>
-          </a:xfrm>
-          <a:prstGeom prst="rect">
-            <a:avLst/>
-          </a:prstGeom>
-          <a:noFill/>
-          <a:ln/>
-        </p:spPr>
-        <p:txBody>
-          <a:bodyPr wrap="square" lIns="0" tIns="0" rIns="0" bIns="0" rtlCol="0" anchor="t"/>
-          <a:lstStyle/>
-          <a:p>
-            <a:pPr indent="0" marL="0">
-              <a:lnSpc>
-                <a:spcPct val="100000"/>
-              </a:lnSpc>
-              <a:buNone/>
-            </a:pPr>
-            <a:r>
-              <a:rPr lang="en-US" sz="1900" dirty="0">
-                <a:solidFill>
-                  <a:srgbClr val="22252B"/>
-                </a:solidFill>
-                <a:latin typeface="Arial" pitchFamily="34" charset="0"/>
-                <a:ea typeface="Arial" pitchFamily="34" charset="-122"/>
-                <a:cs typeface="Arial" pitchFamily="34" charset="-120"/>
-              </a:rPr>
-              <a:t>Reading’s QEMU ARM emulator raised lab marks over six cohorts, but changed the course’s instruction set to keep gdb working. West Point’s server-hosted VMs halved class time lost to installs, but faculty ran the server fleet.</a:t>
-            </a:r>
-            <a:endParaRPr lang="en-US" sz="1900" dirty="0"/>
-          </a:p>
-        </p:txBody>
-      </p:sp>
-      <p:sp>
-        <p:nvSpPr>
-          <p:cNvPr id="28" name="Text 26"/>
-          <p:cNvSpPr txBox="1"/>
-          <p:nvPr/>
-        </p:nvSpPr>
-        <p:spPr>
-          <a:xfrm>
-            <a:off x="914400" y="22219920"/>
-            <a:ext cx="13350240" cy="548640"/>
-          </a:xfrm>
-          <a:prstGeom prst="rect">
-            <a:avLst/>
-          </a:prstGeom>
-          <a:noFill/>
-          <a:ln/>
-        </p:spPr>
-        <p:txBody>
-          <a:bodyPr wrap="square" lIns="0" tIns="0" rIns="0" bIns="0" rtlCol="0" anchor="ctr"/>
-          <a:lstStyle/>
-          <a:p>
-            <a:pPr indent="0" marL="0">
-              <a:buNone/>
-            </a:pPr>
-            <a:r>
-              <a:rPr lang="en-US" sz="2400" b="1" dirty="0">
-                <a:solidFill>
-                  <a:srgbClr val="22252B"/>
-                </a:solidFill>
-                <a:latin typeface="Arial" pitchFamily="34" charset="0"/>
-                <a:ea typeface="Arial" pitchFamily="34" charset="-122"/>
-                <a:cs typeface="Arial" pitchFamily="34" charset="-120"/>
-              </a:rPr>
-              <a:t>Local containers [3, 4]</a:t>
-            </a:r>
-            <a:endParaRPr lang="en-US" sz="2400" dirty="0"/>
-          </a:p>
-        </p:txBody>
-      </p:sp>
-      <p:sp>
-        <p:nvSpPr>
-          <p:cNvPr id="29" name="Text 27"/>
-          <p:cNvSpPr txBox="1"/>
-          <p:nvPr/>
-        </p:nvSpPr>
-        <p:spPr>
-          <a:xfrm>
-            <a:off x="914400" y="22750272"/>
-            <a:ext cx="13350240" cy="1298448"/>
-          </a:xfrm>
-          <a:prstGeom prst="rect">
-            <a:avLst/>
-          </a:prstGeom>
-          <a:noFill/>
-          <a:ln/>
-        </p:spPr>
-        <p:txBody>
-          <a:bodyPr wrap="square" lIns="0" tIns="0" rIns="0" bIns="0" rtlCol="0" anchor="t"/>
-          <a:lstStyle/>
-          <a:p>
-            <a:pPr indent="0" marL="0">
-              <a:lnSpc>
-                <a:spcPct val="100000"/>
-              </a:lnSpc>
-              <a:buNone/>
-            </a:pPr>
-            <a:r>
-              <a:rPr lang="en-US" sz="1900" dirty="0">
-                <a:solidFill>
-                  <a:srgbClr val="22252B"/>
-                </a:solidFill>
-                <a:latin typeface="Arial" pitchFamily="34" charset="0"/>
-                <a:ea typeface="Arial" pitchFamily="34" charset="-122"/>
-                <a:cs typeface="Arial" pitchFamily="34" charset="-120"/>
-              </a:rPr>
-              <a:t>UCSD DevContainers (71% chose them over the campus server) and Florida Tech (84% adoption, 69% less anxious). Both found the hardest step is installing Docker itself, and novices struggle most.</a:t>
-            </a:r>
-            <a:endParaRPr lang="en-US" sz="1900" dirty="0"/>
-          </a:p>
-        </p:txBody>
-      </p:sp>
-      <p:sp>
-        <p:nvSpPr>
-          <p:cNvPr id="30" name="Shape 28"/>
-          <p:cNvSpPr/>
-          <p:nvPr/>
-        </p:nvSpPr>
-        <p:spPr>
-          <a:xfrm>
-            <a:off x="731520" y="23984712"/>
-            <a:ext cx="13716000" cy="1828800"/>
-          </a:xfrm>
-          <a:prstGeom prst="roundRect">
-            <a:avLst>
-              <a:gd name="adj" fmla="val 7500"/>
-            </a:avLst>
-          </a:prstGeom>
-          <a:solidFill>
-            <a:srgbClr val="F5F4F0"/>
-          </a:solidFill>
-          <a:ln w="12700">
-            <a:solidFill>
-              <a:srgbClr val="F5F4F0"/>
-            </a:solidFill>
-            <a:prstDash val="solid"/>
-          </a:ln>
-        </p:spPr>
-      </p:sp>
-      <p:sp>
-        <p:nvSpPr>
-          <p:cNvPr id="31" name="Text 29"/>
-          <p:cNvSpPr txBox="1"/>
-          <p:nvPr/>
-        </p:nvSpPr>
-        <p:spPr>
-          <a:xfrm>
-            <a:off x="914400" y="24094440"/>
-            <a:ext cx="13350240" cy="548640"/>
-          </a:xfrm>
-          <a:prstGeom prst="rect">
-            <a:avLst/>
-          </a:prstGeom>
-          <a:noFill/>
-          <a:ln/>
-        </p:spPr>
-        <p:txBody>
-          <a:bodyPr wrap="square" lIns="0" tIns="0" rIns="0" bIns="0" rtlCol="0" anchor="ctr"/>
-          <a:lstStyle/>
-          <a:p>
-            <a:pPr indent="0" marL="0">
-              <a:buNone/>
-            </a:pPr>
-            <a:r>
-              <a:rPr lang="en-US" sz="2400" b="1" dirty="0">
-                <a:solidFill>
-                  <a:srgbClr val="B10202"/>
-                </a:solidFill>
-                <a:latin typeface="Arial" pitchFamily="34" charset="0"/>
-                <a:ea typeface="Arial" pitchFamily="34" charset="-122"/>
-                <a:cs typeface="Arial" pitchFamily="34" charset="-120"/>
-              </a:rPr>
-              <a:t>UNLV Docker IDEs</a:t>
-            </a:r>
-            <a:endParaRPr lang="en-US" sz="2400" dirty="0"/>
-          </a:p>
-        </p:txBody>
-      </p:sp>
-      <p:sp>
-        <p:nvSpPr>
-          <p:cNvPr id="32" name="Text 30"/>
-          <p:cNvSpPr txBox="1"/>
-          <p:nvPr/>
-        </p:nvSpPr>
-        <p:spPr>
-          <a:xfrm>
-            <a:off x="914400" y="24624792"/>
-            <a:ext cx="13350240" cy="1298448"/>
-          </a:xfrm>
-          <a:prstGeom prst="rect">
-            <a:avLst/>
-          </a:prstGeom>
-          <a:noFill/>
-          <a:ln/>
-        </p:spPr>
-        <p:txBody>
-          <a:bodyPr wrap="square" lIns="0" tIns="0" rIns="0" bIns="0" rtlCol="0" anchor="t"/>
-          <a:lstStyle/>
-          <a:p>
-            <a:pPr indent="0" marL="0">
-              <a:lnSpc>
-                <a:spcPct val="100000"/>
-              </a:lnSpc>
-              <a:buNone/>
-            </a:pPr>
-            <a:r>
-              <a:rPr lang="en-US" sz="1900" dirty="0">
-                <a:solidFill>
-                  <a:srgbClr val="22252B"/>
-                </a:solidFill>
-                <a:latin typeface="Arial" pitchFamily="34" charset="0"/>
-                <a:ea typeface="Arial" pitchFamily="34" charset="-122"/>
-                <a:cs typeface="Arial" pitchFamily="34" charset="-120"/>
-              </a:rPr>
-              <a:t>Local container + browser VS Code + host-owned files + no telemetry + AI surfaces disabled + real x86-64 ISA preserved, with the emulation boundary measured instead of ignored.</a:t>
-            </a:r>
-            <a:endParaRPr lang="en-US" sz="1900" dirty="0"/>
-          </a:p>
-        </p:txBody>
-      </p:sp>
-      <p:sp>
-        <p:nvSpPr>
-          <p:cNvPr id="33" name="Text 31"/>
-          <p:cNvSpPr txBox="1"/>
-          <p:nvPr/>
-        </p:nvSpPr>
-        <p:spPr>
-          <a:xfrm>
-            <a:off x="14813280" y="5394960"/>
-            <a:ext cx="14081760" cy="822960"/>
-          </a:xfrm>
-          <a:prstGeom prst="rect">
-            <a:avLst/>
-          </a:prstGeom>
-          <a:noFill/>
-          <a:ln/>
-        </p:spPr>
-        <p:txBody>
-          <a:bodyPr wrap="square" lIns="0" tIns="0" rIns="0" bIns="0" rtlCol="0" anchor="ctr"/>
-          <a:lstStyle/>
-          <a:p>
-            <a:pPr indent="0" marL="0">
-              <a:buNone/>
-            </a:pPr>
-            <a:r>
-              <a:rPr lang="en-US" sz="4000" b="1" dirty="0">
-                <a:solidFill>
-                  <a:srgbClr val="B10202"/>
-                </a:solidFill>
-                <a:latin typeface="Arial" pitchFamily="34" charset="0"/>
-                <a:ea typeface="Arial" pitchFamily="34" charset="-122"/>
-                <a:cs typeface="Arial" pitchFamily="34" charset="-120"/>
-              </a:rPr>
-              <a:t>The system</a:t>
-            </a:r>
-            <a:endParaRPr lang="en-US" sz="4000" dirty="0"/>
-          </a:p>
-        </p:txBody>
-      </p:sp>
-      <p:sp>
-        <p:nvSpPr>
-          <p:cNvPr id="34" name="Text 32"/>
-          <p:cNvSpPr txBox="1"/>
-          <p:nvPr/>
-        </p:nvSpPr>
-        <p:spPr>
-          <a:xfrm>
-            <a:off x="14813280" y="6355080"/>
-            <a:ext cx="14081760" cy="2377440"/>
-          </a:xfrm>
-          <a:prstGeom prst="rect">
-            <a:avLst/>
-          </a:prstGeom>
-          <a:noFill/>
-          <a:ln/>
-        </p:spPr>
-        <p:txBody>
-          <a:bodyPr wrap="square" lIns="0" tIns="0" rIns="0" bIns="0" rtlCol="0" anchor="t"/>
-          <a:lstStyle/>
-          <a:p>
-            <a:pPr indent="0" marL="0">
-              <a:lnSpc>
-                <a:spcPct val="105000"/>
-              </a:lnSpc>
-              <a:spcAft>
-                <a:spcPts val="800"/>
-              </a:spcAft>
-              <a:buNone/>
-            </a:pPr>
-            <a:r>
-              <a:rPr lang="en-US" sz="2400" dirty="0">
-                <a:solidFill>
-                  <a:srgbClr val="22252B"/>
-                </a:solidFill>
-                <a:latin typeface="Arial" pitchFamily="34" charset="0"/>
-                <a:ea typeface="Arial" pitchFamily="34" charset="-122"/>
-                <a:cs typeface="Arial" pitchFamily="34" charset="-120"/>
-              </a:rPr>
-              <a:t>Two Docker images built from Ubuntu 22.04 with code-server 4.126.0 (VS Code served to a browser on 127.0.0.1). CS 135: g++ 11.4, multi-arch, native on Intel and ARM. CS 218: yasm, nasm, ld, gdb 12.1, deliberately amd64-only so .asm files assemble and run as real x86-64 Linux binaries; ARM hosts run it under translation. Autosave, starter files seeded once, no restart policy, every AI feature disabled.</a:t>
-            </a:r>
-            <a:endParaRPr lang="en-US" sz="2400" dirty="0"/>
-          </a:p>
-        </p:txBody>
-      </p:sp>
-      <p:pic>
-        <p:nvPicPr>
-          <p:cNvPr id="35" name="Image 0" descr="/private/tmp/claude-501/-Users-seancuenco-Documents-UNLVDockerIDEs/cb525298-55fd-43a6-807a-d35debab5bc5/scratchpad/fig1-architecture.png">    </p:cNvPr>
-          <p:cNvPicPr>
-            <a:picLocks noChangeAspect="1"/>
-          </p:cNvPicPr>
-          <p:nvPr/>
-        </p:nvPicPr>
-        <p:blipFill>
-          <a:blip r:embed="rId1"/>
-          <a:stretch>
-            <a:fillRect/>
-          </a:stretch>
-        </p:blipFill>
-        <p:spPr>
-          <a:xfrm>
-            <a:off x="17007840" y="8823960"/>
-            <a:ext cx="9692640" cy="9219828"/>
-          </a:xfrm>
-          <a:prstGeom prst="rect">
-            <a:avLst/>
-          </a:prstGeom>
-        </p:spPr>
-      </p:pic>
-      <p:sp>
-        <p:nvSpPr>
-          <p:cNvPr id="36" name="Text 33"/>
-          <p:cNvSpPr txBox="1"/>
-          <p:nvPr/>
-        </p:nvSpPr>
-        <p:spPr>
-          <a:xfrm>
-            <a:off x="14813280" y="18180948"/>
-            <a:ext cx="14081760" cy="731520"/>
-          </a:xfrm>
-          <a:prstGeom prst="rect">
-            <a:avLst/>
-          </a:prstGeom>
-          <a:noFill/>
-          <a:ln/>
-        </p:spPr>
-        <p:txBody>
-          <a:bodyPr wrap="square" lIns="0" tIns="0" rIns="0" bIns="0" rtlCol="0" anchor="t"/>
-          <a:lstStyle/>
-          <a:p>
-            <a:pPr indent="0" marL="0">
-              <a:buNone/>
-            </a:pPr>
-            <a:r>
-              <a:rPr lang="en-US" sz="2000" i="1" dirty="0">
-                <a:solidFill>
-                  <a:srgbClr val="5E5B55"/>
-                </a:solidFill>
-                <a:latin typeface="Arial" pitchFamily="34" charset="0"/>
-                <a:ea typeface="Arial" pitchFamily="34" charset="-122"/>
-                <a:cs typeface="Arial" pitchFamily="34" charset="-120"/>
-              </a:rPr>
-              <a:t>Figure 1. One course IDE. Everything runs on the student’s machine; the bind-mounted folder survives container and image replacement.</a:t>
-            </a:r>
-            <a:endParaRPr lang="en-US" sz="2000" dirty="0"/>
-          </a:p>
-        </p:txBody>
-      </p:sp>
-      <p:sp>
-        <p:nvSpPr>
-          <p:cNvPr id="37" name="Text 34"/>
-          <p:cNvSpPr txBox="1"/>
-          <p:nvPr/>
-        </p:nvSpPr>
-        <p:spPr>
-          <a:xfrm>
-            <a:off x="14813280" y="19186788"/>
-            <a:ext cx="14081760" cy="822960"/>
-          </a:xfrm>
-          <a:prstGeom prst="rect">
-            <a:avLst/>
-          </a:prstGeom>
-          <a:noFill/>
-          <a:ln/>
-        </p:spPr>
-        <p:txBody>
-          <a:bodyPr wrap="square" lIns="0" tIns="0" rIns="0" bIns="0" rtlCol="0" anchor="ctr"/>
-          <a:lstStyle/>
-          <a:p>
-            <a:pPr indent="0" marL="0">
-              <a:buNone/>
-            </a:pPr>
-            <a:r>
-              <a:rPr lang="en-US" sz="4000" b="1" dirty="0">
-                <a:solidFill>
-                  <a:srgbClr val="B10202"/>
-                </a:solidFill>
-                <a:latin typeface="Arial" pitchFamily="34" charset="0"/>
-                <a:ea typeface="Arial" pitchFamily="34" charset="-122"/>
-                <a:cs typeface="Arial" pitchFamily="34" charset="-120"/>
-              </a:rPr>
-              <a:t>Method: one script, four machines</a:t>
-            </a:r>
-            <a:endParaRPr lang="en-US" sz="4000" dirty="0"/>
-          </a:p>
-        </p:txBody>
-      </p:sp>
-      <p:sp>
-        <p:nvSpPr>
-          <p:cNvPr id="38" name="Text 35"/>
-          <p:cNvSpPr txBox="1"/>
-          <p:nvPr/>
-        </p:nvSpPr>
-        <p:spPr>
-          <a:xfrm>
-            <a:off x="14813280" y="20146908"/>
-            <a:ext cx="14081760" cy="2468880"/>
-          </a:xfrm>
-          <a:prstGeom prst="rect">
-            <a:avLst/>
-          </a:prstGeom>
-          <a:noFill/>
-          <a:ln/>
-        </p:spPr>
-        <p:txBody>
-          <a:bodyPr wrap="square" lIns="0" tIns="0" rIns="0" bIns="0" rtlCol="0" anchor="t"/>
-          <a:lstStyle/>
-          <a:p>
-            <a:pPr indent="0" marL="0">
-              <a:lnSpc>
-                <a:spcPct val="105000"/>
-              </a:lnSpc>
-              <a:spcAft>
-                <a:spcPts val="800"/>
-              </a:spcAft>
-              <a:buNone/>
-            </a:pPr>
-            <a:r>
-              <a:rPr lang="en-US" sz="2400" dirty="0">
-                <a:solidFill>
-                  <a:srgbClr val="22252B"/>
-                </a:solidFill>
-                <a:latin typeface="Arial" pitchFamily="34" charset="0"/>
-                <a:ea typeface="Arial" pitchFamily="34" charset="-122"/>
-                <a:cs typeface="Arial" pitchFamily="34" charset="-120"/>
-              </a:rPr>
-              <a:t>One published script (ci-test.sh) runs unmodified on every host and emits a JSON row; every number here comes from those files. Nine stages: timed pull and digest · cold start to healthy · starter seeding · 3× assemble-link-run · scripted gdb probe · idle memory · tool versions · build + run of four real CS 218 assignments (ast3, ast04, ast06, ast12: pure assembly through multithreaded pthread + assembly with a checkable answer) with peak memory · destroy-and-recreate to test persistence and warm start.</a:t>
-            </a:r>
-            <a:endParaRPr lang="en-US" sz="2400" dirty="0"/>
           </a:p>
         </p:txBody>
       </p:sp>
@@ -2856,19 +1906,19 @@
           </p:nvPr>
         </p:nvGraphicFramePr>
         <p:xfrm>
-          <a:off x="14813280" y="22707228"/>
-          <a:ext cx="14081760" cy="914400"/>
+          <a:off x="914400" y="17830800"/>
+          <a:ext cx="13350240" cy="914400"/>
         </p:xfrm>
         <a:graphic>
           <a:graphicData uri="http://schemas.openxmlformats.org/drawingml/2006/table">
             <a:tbl>
               <a:tblPr/>
               <a:tblGrid>
-                <a:gridCol w="2834640"/>
-                <a:gridCol w="7863840"/>
-                <a:gridCol w="3383280"/>
+                <a:gridCol w="4206240"/>
+                <a:gridCol w="3657600"/>
+                <a:gridCol w="5486400"/>
               </a:tblGrid>
-              <a:tr h="566928">
+              <a:tr h="868680">
                 <a:tc>
                   <a:txBody>
                     <a:bodyPr/>
@@ -2878,7 +1928,7 @@
                         <a:buNone/>
                       </a:pPr>
                       <a:r>
-                        <a:rPr lang="en-US" sz="1800" b="1" dirty="0">
+                        <a:rPr lang="en-US" sz="1700" b="1" dirty="0">
                           <a:solidFill>
                             <a:srgbClr val="FFFFFF"/>
                           </a:solidFill>
@@ -2886,9 +1936,9 @@
                           <a:ea typeface="Arial" pitchFamily="34" charset="-122"/>
                           <a:cs typeface="Arial" pitchFamily="34" charset="-120"/>
                         </a:rPr>
-                        <a:t>Cell</a:t>
+                        <a:t>Approach</a:t>
                       </a:r>
-                      <a:endParaRPr lang="en-US" sz="1800" dirty="0">
+                      <a:endParaRPr lang="en-US" sz="1700" dirty="0">
                         <a:latin typeface="Arial" charset="0"/>
                         <a:ea typeface="Arial" charset="0"/>
                         <a:cs typeface="Arial" charset="0"/>
@@ -2946,7 +1996,7 @@
                         <a:buNone/>
                       </a:pPr>
                       <a:r>
-                        <a:rPr lang="en-US" sz="1800" b="1" dirty="0">
+                        <a:rPr lang="en-US" sz="1700" b="1" dirty="0">
                           <a:solidFill>
                             <a:srgbClr val="FFFFFF"/>
                           </a:solidFill>
@@ -2954,9 +2004,9 @@
                           <a:ea typeface="Arial" pitchFamily="34" charset="-122"/>
                           <a:cs typeface="Arial" pitchFamily="34" charset="-120"/>
                         </a:rPr>
-                        <a:t>Host</a:t>
+                        <a:t>Who carries it</a:t>
                       </a:r>
-                      <a:endParaRPr lang="en-US" sz="1800" dirty="0">
+                      <a:endParaRPr lang="en-US" sz="1700" dirty="0">
                         <a:latin typeface="Arial" charset="0"/>
                         <a:ea typeface="Arial" charset="0"/>
                         <a:cs typeface="Arial" charset="0"/>
@@ -3014,7 +2064,7 @@
                         <a:buNone/>
                       </a:pPr>
                       <a:r>
-                        <a:rPr lang="en-US" sz="1800" b="1" dirty="0">
+                        <a:rPr lang="en-US" sz="1700" b="1" dirty="0">
                           <a:solidFill>
                             <a:srgbClr val="FFFFFF"/>
                           </a:solidFill>
@@ -3022,9 +2072,9 @@
                           <a:ea typeface="Arial" pitchFamily="34" charset="-122"/>
                           <a:cs typeface="Arial" pitchFamily="34" charset="-120"/>
                         </a:rPr>
-                        <a:t>x86 image</a:t>
+                        <a:t>What the student pays</a:t>
                       </a:r>
-                      <a:endParaRPr lang="en-US" sz="1800" dirty="0">
+                      <a:endParaRPr lang="en-US" sz="1700" dirty="0">
                         <a:latin typeface="Arial" charset="0"/>
                         <a:ea typeface="Arial" charset="0"/>
                         <a:cs typeface="Arial" charset="0"/>
@@ -3074,7 +2124,7 @@
                   </a:tcPr>
                 </a:tc>
               </a:tr>
-              <a:tr h="566928">
+              <a:tr h="868680">
                 <a:tc>
                   <a:txBody>
                     <a:bodyPr/>
@@ -3084,7 +2134,7 @@
                         <a:buNone/>
                       </a:pPr>
                       <a:r>
-                        <a:rPr lang="en-US" sz="1800" b="1" dirty="0">
+                        <a:rPr lang="en-US" sz="1700" b="1" dirty="0">
                           <a:solidFill>
                             <a:srgbClr val="22252B"/>
                           </a:solidFill>
@@ -3092,9 +2142,9 @@
                           <a:ea typeface="Arial" pitchFamily="34" charset="-122"/>
                           <a:cs typeface="Arial" pitchFamily="34" charset="-120"/>
                         </a:rPr>
-                        <a:t>1  Linux amd64</a:t>
+                        <a:t>Shared servers (UNLV, CSN)</a:t>
                       </a:r>
-                      <a:endParaRPr lang="en-US" sz="1800" dirty="0">
+                      <a:endParaRPr lang="en-US" sz="1700" dirty="0">
                         <a:latin typeface="Arial" charset="0"/>
                         <a:ea typeface="Arial" charset="0"/>
                         <a:cs typeface="Arial" charset="0"/>
@@ -3152,7 +2202,7 @@
                         <a:buNone/>
                       </a:pPr>
                       <a:r>
-                        <a:rPr lang="en-US" sz="1800" dirty="0">
+                        <a:rPr lang="en-US" sz="1700" dirty="0">
                           <a:solidFill>
                             <a:srgbClr val="22252B"/>
                           </a:solidFill>
@@ -3160,9 +2210,9 @@
                           <a:ea typeface="Arial" pitchFamily="34" charset="-122"/>
                           <a:cs typeface="Arial" pitchFamily="34" charset="-120"/>
                         </a:rPr>
-                        <a:t>AWS m8i.large · Ubuntu 24.04 · Intel Xeon 6975P-C · 2 vCPU / 8 GB</a:t>
+                        <a:t>The department</a:t>
                       </a:r>
-                      <a:endParaRPr lang="en-US" sz="1800" dirty="0">
+                      <a:endParaRPr lang="en-US" sz="1700" dirty="0">
                         <a:latin typeface="Arial" charset="0"/>
                         <a:ea typeface="Arial" charset="0"/>
                         <a:cs typeface="Arial" charset="0"/>
@@ -3220,7 +2270,7 @@
                         <a:buNone/>
                       </a:pPr>
                       <a:r>
-                        <a:rPr lang="en-US" sz="1800" dirty="0">
+                        <a:rPr lang="en-US" sz="1700" dirty="0">
                           <a:solidFill>
                             <a:srgbClr val="22252B"/>
                           </a:solidFill>
@@ -3228,9 +2278,9 @@
                           <a:ea typeface="Arial" pitchFamily="34" charset="-122"/>
                           <a:cs typeface="Arial" pitchFamily="34" charset="-120"/>
                         </a:rPr>
-                        <a:t>native</a:t>
+                        <a:t>Needs network + VPN; everything vanishes when the server is retired</a:t>
                       </a:r>
-                      <a:endParaRPr lang="en-US" sz="1800" dirty="0">
+                      <a:endParaRPr lang="en-US" sz="1700" dirty="0">
                         <a:latin typeface="Arial" charset="0"/>
                         <a:ea typeface="Arial" charset="0"/>
                         <a:cs typeface="Arial" charset="0"/>
@@ -3280,7 +2330,7 @@
                   </a:tcPr>
                 </a:tc>
               </a:tr>
-              <a:tr h="566928">
+              <a:tr h="868680">
                 <a:tc>
                   <a:txBody>
                     <a:bodyPr/>
@@ -3290,7 +2340,7 @@
                         <a:buNone/>
                       </a:pPr>
                       <a:r>
-                        <a:rPr lang="en-US" sz="1800" b="1" dirty="0">
+                        <a:rPr lang="en-US" sz="1700" b="1" dirty="0">
                           <a:solidFill>
                             <a:srgbClr val="22252B"/>
                           </a:solidFill>
@@ -3298,9 +2348,9 @@
                           <a:ea typeface="Arial" pitchFamily="34" charset="-122"/>
                           <a:cs typeface="Arial" pitchFamily="34" charset="-120"/>
                         </a:rPr>
-                        <a:t>2  Linux arm64</a:t>
+                        <a:t>Course virtual machines (UNLV, Harvard 2011 [2], Reading [5])</a:t>
                       </a:r>
-                      <a:endParaRPr lang="en-US" sz="1800" dirty="0">
+                      <a:endParaRPr lang="en-US" sz="1700" dirty="0">
                         <a:latin typeface="Arial" charset="0"/>
                         <a:ea typeface="Arial" charset="0"/>
                         <a:cs typeface="Arial" charset="0"/>
@@ -3358,7 +2408,7 @@
                         <a:buNone/>
                       </a:pPr>
                       <a:r>
-                        <a:rPr lang="en-US" sz="1800" dirty="0">
+                        <a:rPr lang="en-US" sz="1700" dirty="0">
                           <a:solidFill>
                             <a:srgbClr val="22252B"/>
                           </a:solidFill>
@@ -3366,9 +2416,9 @@
                           <a:ea typeface="Arial" pitchFamily="34" charset="-122"/>
                           <a:cs typeface="Arial" pitchFamily="34" charset="-120"/>
                         </a:rPr>
-                        <a:t>AWS m8g.large (Graviton) · Ubuntu 24.04 · Neoverse-V2 · 2 vCPU / 8 GB</a:t>
+                        <a:t>The student’s hardware</a:t>
                       </a:r>
-                      <a:endParaRPr lang="en-US" sz="1800" dirty="0">
+                      <a:endParaRPr lang="en-US" sz="1700" dirty="0">
                         <a:latin typeface="Arial" charset="0"/>
                         <a:ea typeface="Arial" charset="0"/>
                         <a:cs typeface="Arial" charset="0"/>
@@ -3426,7 +2476,7 @@
                         <a:buNone/>
                       </a:pPr>
                       <a:r>
-                        <a:rPr lang="en-US" sz="1800" dirty="0">
+                        <a:rPr lang="en-US" sz="1700" dirty="0">
                           <a:solidFill>
                             <a:srgbClr val="22252B"/>
                           </a:solidFill>
@@ -3434,9 +2484,9 @@
                           <a:ea typeface="Arial" pitchFamily="34" charset="-122"/>
                           <a:cs typeface="Arial" pitchFamily="34" charset="-120"/>
                         </a:rPr>
-                        <a:t>emulated (QEMU user-mode)</a:t>
+                        <a:t>Multi-GB images, slow boots, disk corruption; broken on Apple Silicon</a:t>
                       </a:r>
-                      <a:endParaRPr lang="en-US" sz="1800" dirty="0">
+                      <a:endParaRPr lang="en-US" sz="1700" dirty="0">
                         <a:latin typeface="Arial" charset="0"/>
                         <a:ea typeface="Arial" charset="0"/>
                         <a:cs typeface="Arial" charset="0"/>
@@ -3486,7 +2536,7 @@
                   </a:tcPr>
                 </a:tc>
               </a:tr>
-              <a:tr h="566928">
+              <a:tr h="868680">
                 <a:tc>
                   <a:txBody>
                     <a:bodyPr/>
@@ -3496,7 +2546,7 @@
                         <a:buNone/>
                       </a:pPr>
                       <a:r>
-                        <a:rPr lang="en-US" sz="1800" b="1" dirty="0">
+                        <a:rPr lang="en-US" sz="1700" b="1" dirty="0">
                           <a:solidFill>
                             <a:srgbClr val="22252B"/>
                           </a:solidFill>
@@ -3504,9 +2554,9 @@
                           <a:ea typeface="Arial" pitchFamily="34" charset="-122"/>
                           <a:cs typeface="Arial" pitchFamily="34" charset="-120"/>
                         </a:rPr>
-                        <a:t>3  Windows amd64</a:t>
+                        <a:t>Cloud editor (Harvard CS50 on GitHub Codespaces [1])</a:t>
                       </a:r>
-                      <a:endParaRPr lang="en-US" sz="1800" dirty="0">
+                      <a:endParaRPr lang="en-US" sz="1700" dirty="0">
                         <a:latin typeface="Arial" charset="0"/>
                         <a:ea typeface="Arial" charset="0"/>
                         <a:cs typeface="Arial" charset="0"/>
@@ -3564,7 +2614,7 @@
                         <a:buNone/>
                       </a:pPr>
                       <a:r>
-                        <a:rPr lang="en-US" sz="1800" dirty="0">
+                        <a:rPr lang="en-US" sz="1700" dirty="0">
                           <a:solidFill>
                             <a:srgbClr val="22252B"/>
                           </a:solidFill>
@@ -3572,9 +2622,9 @@
                           <a:ea typeface="Arial" pitchFamily="34" charset="-122"/>
                           <a:cs typeface="Arial" pitchFamily="34" charset="-120"/>
                         </a:rPr>
-                        <a:t>Azure D4s_v5 · Windows 11 Pro 24H2 · Docker Desktop + WSL2 · 4 vCPU / 16 GB</a:t>
+                        <a:t>A vendor, a grant, an account</a:t>
                       </a:r>
-                      <a:endParaRPr lang="en-US" sz="1800" dirty="0">
+                      <a:endParaRPr lang="en-US" sz="1700" dirty="0">
                         <a:latin typeface="Arial" charset="0"/>
                         <a:ea typeface="Arial" charset="0"/>
                         <a:cs typeface="Arial" charset="0"/>
@@ -3632,7 +2682,7 @@
                         <a:buNone/>
                       </a:pPr>
                       <a:r>
-                        <a:rPr lang="en-US" sz="1800" dirty="0">
+                        <a:rPr lang="en-US" sz="1700" dirty="0">
                           <a:solidFill>
                             <a:srgbClr val="22252B"/>
                           </a:solidFill>
@@ -3640,9 +2690,9 @@
                           <a:ea typeface="Arial" pitchFamily="34" charset="-122"/>
                           <a:cs typeface="Arial" pitchFamily="34" charset="-120"/>
                         </a:rPr>
-                        <a:t>native</a:t>
+                        <a:t>Internet required; students leave “not sure how to set up an IDE on my computer”</a:t>
                       </a:r>
-                      <a:endParaRPr lang="en-US" sz="1800" dirty="0">
+                      <a:endParaRPr lang="en-US" sz="1700" dirty="0">
                         <a:latin typeface="Arial" charset="0"/>
                         <a:ea typeface="Arial" charset="0"/>
                         <a:cs typeface="Arial" charset="0"/>
@@ -3692,7 +2742,7 @@
                   </a:tcPr>
                 </a:tc>
               </a:tr>
-              <a:tr h="566928">
+              <a:tr h="868680">
                 <a:tc>
                   <a:txBody>
                     <a:bodyPr/>
@@ -3702,7 +2752,7 @@
                         <a:buNone/>
                       </a:pPr>
                       <a:r>
-                        <a:rPr lang="en-US" sz="1800" b="1" dirty="0">
+                        <a:rPr lang="en-US" sz="1700" b="1" dirty="0">
                           <a:solidFill>
                             <a:srgbClr val="22252B"/>
                           </a:solidFill>
@@ -3710,9 +2760,9 @@
                           <a:ea typeface="Arial" pitchFamily="34" charset="-122"/>
                           <a:cs typeface="Arial" pitchFamily="34" charset="-120"/>
                         </a:rPr>
-                        <a:t>4  macOS arm64</a:t>
+                        <a:t>Monitored platform (CodeDive, South Korea [8])</a:t>
                       </a:r>
-                      <a:endParaRPr lang="en-US" sz="1800" dirty="0">
+                      <a:endParaRPr lang="en-US" sz="1700" dirty="0">
                         <a:latin typeface="Arial" charset="0"/>
                         <a:ea typeface="Arial" charset="0"/>
                         <a:cs typeface="Arial" charset="0"/>
@@ -3770,7 +2820,7 @@
                         <a:buNone/>
                       </a:pPr>
                       <a:r>
-                        <a:rPr lang="en-US" sz="1800" dirty="0">
+                        <a:rPr lang="en-US" sz="1700" dirty="0">
                           <a:solidFill>
                             <a:srgbClr val="22252B"/>
                           </a:solidFill>
@@ -3778,9 +2828,9 @@
                           <a:ea typeface="Arial" pitchFamily="34" charset="-122"/>
                           <a:cs typeface="Arial" pitchFamily="34" charset="-120"/>
                         </a:rPr>
-                        <a:t>MacBook Pro 14″ (2021), owned · M1 Pro · 16 GB · Docker Desktop</a:t>
+                        <a:t>The university’s cluster, and the student’s privacy</a:t>
                       </a:r>
-                      <a:endParaRPr lang="en-US" sz="1800" dirty="0">
+                      <a:endParaRPr lang="en-US" sz="1700" dirty="0">
                         <a:latin typeface="Arial" charset="0"/>
                         <a:ea typeface="Arial" charset="0"/>
                         <a:cs typeface="Arial" charset="0"/>
@@ -3838,7 +2888,7 @@
                         <a:buNone/>
                       </a:pPr>
                       <a:r>
-                        <a:rPr lang="en-US" sz="1800" dirty="0">
+                        <a:rPr lang="en-US" sz="1700" dirty="0">
                           <a:solidFill>
                             <a:srgbClr val="22252B"/>
                           </a:solidFill>
@@ -3846,9 +2896,9 @@
                           <a:ea typeface="Arial" pitchFamily="34" charset="-122"/>
                           <a:cs typeface="Arial" pitchFamily="34" charset="-120"/>
                         </a:rPr>
-                        <a:t>emulated (Rosetta)</a:t>
+                        <a:t>Every command and every 1-second typing pause is recorded</a:t>
                       </a:r>
-                      <a:endParaRPr lang="en-US" sz="1800" dirty="0">
+                      <a:endParaRPr lang="en-US" sz="1700" dirty="0">
                         <a:latin typeface="Arial" charset="0"/>
                         <a:ea typeface="Arial" charset="0"/>
                         <a:cs typeface="Arial" charset="0"/>
@@ -3898,541 +2948,7 @@
                   </a:tcPr>
                 </a:tc>
               </a:tr>
-            </a:tbl>
-          </a:graphicData>
-        </a:graphic>
-      </p:graphicFrame>
-      <p:sp>
-        <p:nvSpPr>
-          <p:cNvPr id="40" name="Text 36"/>
-          <p:cNvSpPr txBox="1"/>
-          <p:nvPr/>
-        </p:nvSpPr>
-        <p:spPr>
-          <a:xfrm>
-            <a:off x="14813280" y="25953348"/>
-            <a:ext cx="14081760" cy="2194560"/>
-          </a:xfrm>
-          <a:prstGeom prst="rect">
-            <a:avLst/>
-          </a:prstGeom>
-          <a:noFill/>
-          <a:ln/>
-        </p:spPr>
-        <p:txBody>
-          <a:bodyPr wrap="square" lIns="0" tIns="0" rIns="0" bIns="0" rtlCol="0" anchor="t"/>
-          <a:lstStyle/>
-          <a:p>
-            <a:pPr indent="0" marL="0">
-              <a:lnSpc>
-                <a:spcPct val="102000"/>
-              </a:lnSpc>
-              <a:buNone/>
-            </a:pPr>
-            <a:r>
-              <a:rPr lang="en-US" sz="2000" dirty="0">
-                <a:solidFill>
-                  <a:srgbClr val="22252B"/>
-                </a:solidFill>
-                <a:latin typeface="Arial" pitchFamily="34" charset="0"/>
-                <a:ea typeface="Arial" pitchFamily="34" charset="-122"/>
-                <a:cs typeface="Arial" pitchFamily="34" charset="-120"/>
-              </a:rPr>
-              <a:t>Cloud machines were provisioned by hand from written runbooks and destroyed after each run: three of the four student environments summoned for cents to about a dollar each. Cells 1 and 2 are same-size Intel/Graviton siblings, so their ratio isolates the emulation layer. Cell 4 is the base-spec M1 Pro, not the 64 GB development machine, because that is what a budget-conscious student buys.</a:t>
-            </a:r>
-            <a:endParaRPr lang="en-US" sz="2000" dirty="0"/>
-          </a:p>
-        </p:txBody>
-      </p:sp>
-      <p:sp>
-        <p:nvSpPr>
-          <p:cNvPr id="41" name="Text 37"/>
-          <p:cNvSpPr txBox="1"/>
-          <p:nvPr/>
-        </p:nvSpPr>
-        <p:spPr>
-          <a:xfrm>
-            <a:off x="29443680" y="5394960"/>
-            <a:ext cx="14081760" cy="822960"/>
-          </a:xfrm>
-          <a:prstGeom prst="rect">
-            <a:avLst/>
-          </a:prstGeom>
-          <a:noFill/>
-          <a:ln/>
-        </p:spPr>
-        <p:txBody>
-          <a:bodyPr wrap="square" lIns="0" tIns="0" rIns="0" bIns="0" rtlCol="0" anchor="ctr"/>
-          <a:lstStyle/>
-          <a:p>
-            <a:pPr indent="0" marL="0">
-              <a:buNone/>
-            </a:pPr>
-            <a:r>
-              <a:rPr lang="en-US" sz="4000" b="1" dirty="0">
-                <a:solidFill>
-                  <a:srgbClr val="B10202"/>
-                </a:solidFill>
-                <a:latin typeface="Arial" pitchFamily="34" charset="0"/>
-                <a:ea typeface="Arial" pitchFamily="34" charset="-122"/>
-                <a:cs typeface="Arial" pitchFamily="34" charset="-120"/>
-              </a:rPr>
-              <a:t>Results</a:t>
-            </a:r>
-            <a:endParaRPr lang="en-US" sz="4000" dirty="0"/>
-          </a:p>
-        </p:txBody>
-      </p:sp>
-      <p:sp>
-        <p:nvSpPr>
-          <p:cNvPr id="42" name="Shape 38"/>
-          <p:cNvSpPr/>
-          <p:nvPr/>
-        </p:nvSpPr>
-        <p:spPr>
-          <a:xfrm>
-            <a:off x="29443680" y="6355080"/>
-            <a:ext cx="4480560" cy="2743200"/>
-          </a:xfrm>
-          <a:prstGeom prst="roundRect">
-            <a:avLst>
-              <a:gd name="adj" fmla="val 5000"/>
-            </a:avLst>
-          </a:prstGeom>
-          <a:solidFill>
-            <a:srgbClr val="F5F4F0"/>
-          </a:solidFill>
-          <a:ln w="12700">
-            <a:solidFill>
-              <a:srgbClr val="F5F4F0"/>
-            </a:solidFill>
-            <a:prstDash val="solid"/>
-          </a:ln>
-        </p:spPr>
-      </p:sp>
-      <p:sp>
-        <p:nvSpPr>
-          <p:cNvPr id="43" name="Text 39"/>
-          <p:cNvSpPr txBox="1"/>
-          <p:nvPr/>
-        </p:nvSpPr>
-        <p:spPr>
-          <a:xfrm>
-            <a:off x="29672280" y="6492240"/>
-            <a:ext cx="4023360" cy="1143000"/>
-          </a:xfrm>
-          <a:prstGeom prst="rect">
-            <a:avLst/>
-          </a:prstGeom>
-          <a:noFill/>
-          <a:ln/>
-        </p:spPr>
-        <p:txBody>
-          <a:bodyPr wrap="square" lIns="0" tIns="0" rIns="0" bIns="0" rtlCol="0" anchor="ctr"/>
-          <a:lstStyle/>
-          <a:p>
-            <a:pPr indent="0" marL="0">
-              <a:buNone/>
-            </a:pPr>
-            <a:r>
-              <a:rPr lang="en-US" sz="6000" b="1" dirty="0">
-                <a:solidFill>
-                  <a:srgbClr val="B10202"/>
-                </a:solidFill>
-                <a:latin typeface="Arial" pitchFamily="34" charset="0"/>
-                <a:ea typeface="Arial" pitchFamily="34" charset="-122"/>
-                <a:cs typeface="Arial" pitchFamily="34" charset="-120"/>
-              </a:rPr>
-              <a:t>4 / 4</a:t>
-            </a:r>
-            <a:endParaRPr lang="en-US" sz="6000" dirty="0"/>
-          </a:p>
-        </p:txBody>
-      </p:sp>
-      <p:sp>
-        <p:nvSpPr>
-          <p:cNvPr id="44" name="Text 40"/>
-          <p:cNvSpPr txBox="1"/>
-          <p:nvPr/>
-        </p:nvSpPr>
-        <p:spPr>
-          <a:xfrm>
-            <a:off x="29672280" y="7635240"/>
-            <a:ext cx="4023360" cy="1371600"/>
-          </a:xfrm>
-          <a:prstGeom prst="rect">
-            <a:avLst/>
-          </a:prstGeom>
-          <a:noFill/>
-          <a:ln/>
-        </p:spPr>
-        <p:txBody>
-          <a:bodyPr wrap="square" lIns="0" tIns="0" rIns="0" bIns="0" rtlCol="0" anchor="t"/>
-          <a:lstStyle/>
-          <a:p>
-            <a:pPr indent="0" marL="0">
-              <a:lnSpc>
-                <a:spcPct val="100000"/>
-              </a:lnSpc>
-              <a:buNone/>
-            </a:pPr>
-            <a:r>
-              <a:rPr lang="en-US" sz="1800" dirty="0">
-                <a:solidFill>
-                  <a:srgbClr val="22252B"/>
-                </a:solidFill>
-                <a:latin typeface="Arial" pitchFamily="34" charset="0"/>
-                <a:ea typeface="Arial" pitchFamily="34" charset="-122"/>
-                <a:cs typeface="Arial" pitchFamily="34" charset="-120"/>
-              </a:rPr>
-              <a:t>hosts ran every CS 218 assignment correctly, incl. multithreaded ast12 under emulation</a:t>
-            </a:r>
-            <a:endParaRPr lang="en-US" sz="1800" dirty="0"/>
-          </a:p>
-        </p:txBody>
-      </p:sp>
-      <p:sp>
-        <p:nvSpPr>
-          <p:cNvPr id="45" name="Shape 41"/>
-          <p:cNvSpPr/>
-          <p:nvPr/>
-        </p:nvSpPr>
-        <p:spPr>
-          <a:xfrm>
-            <a:off x="34244280" y="6355080"/>
-            <a:ext cx="4480560" cy="2743200"/>
-          </a:xfrm>
-          <a:prstGeom prst="roundRect">
-            <a:avLst>
-              <a:gd name="adj" fmla="val 5000"/>
-            </a:avLst>
-          </a:prstGeom>
-          <a:solidFill>
-            <a:srgbClr val="F5F4F0"/>
-          </a:solidFill>
-          <a:ln w="12700">
-            <a:solidFill>
-              <a:srgbClr val="F5F4F0"/>
-            </a:solidFill>
-            <a:prstDash val="solid"/>
-          </a:ln>
-        </p:spPr>
-      </p:sp>
-      <p:sp>
-        <p:nvSpPr>
-          <p:cNvPr id="46" name="Text 42"/>
-          <p:cNvSpPr txBox="1"/>
-          <p:nvPr/>
-        </p:nvSpPr>
-        <p:spPr>
-          <a:xfrm>
-            <a:off x="34472880" y="6492240"/>
-            <a:ext cx="4023360" cy="1143000"/>
-          </a:xfrm>
-          <a:prstGeom prst="rect">
-            <a:avLst/>
-          </a:prstGeom>
-          <a:noFill/>
-          <a:ln/>
-        </p:spPr>
-        <p:txBody>
-          <a:bodyPr wrap="square" lIns="0" tIns="0" rIns="0" bIns="0" rtlCol="0" anchor="ctr"/>
-          <a:lstStyle/>
-          <a:p>
-            <a:pPr indent="0" marL="0">
-              <a:buNone/>
-            </a:pPr>
-            <a:r>
-              <a:rPr lang="en-US" sz="6000" b="1" dirty="0">
-                <a:solidFill>
-                  <a:srgbClr val="B10202"/>
-                </a:solidFill>
-                <a:latin typeface="Arial" pitchFamily="34" charset="0"/>
-                <a:ea typeface="Arial" pitchFamily="34" charset="-122"/>
-                <a:cs typeface="Arial" pitchFamily="34" charset="-120"/>
-              </a:rPr>
-              <a:t>1 digest</a:t>
-            </a:r>
-            <a:endParaRPr lang="en-US" sz="6000" dirty="0"/>
-          </a:p>
-        </p:txBody>
-      </p:sp>
-      <p:sp>
-        <p:nvSpPr>
-          <p:cNvPr id="47" name="Text 43"/>
-          <p:cNvSpPr txBox="1"/>
-          <p:nvPr/>
-        </p:nvSpPr>
-        <p:spPr>
-          <a:xfrm>
-            <a:off x="34472880" y="7635240"/>
-            <a:ext cx="4023360" cy="1371600"/>
-          </a:xfrm>
-          <a:prstGeom prst="rect">
-            <a:avLst/>
-          </a:prstGeom>
-          <a:noFill/>
-          <a:ln/>
-        </p:spPr>
-        <p:txBody>
-          <a:bodyPr wrap="square" lIns="0" tIns="0" rIns="0" bIns="0" rtlCol="0" anchor="t"/>
-          <a:lstStyle/>
-          <a:p>
-            <a:pPr indent="0" marL="0">
-              <a:lnSpc>
-                <a:spcPct val="100000"/>
-              </a:lnSpc>
-              <a:buNone/>
-            </a:pPr>
-            <a:r>
-              <a:rPr lang="en-US" sz="1800" dirty="0">
-                <a:solidFill>
-                  <a:srgbClr val="22252B"/>
-                </a:solidFill>
-                <a:latin typeface="Arial" pitchFamily="34" charset="0"/>
-                <a:ea typeface="Arial" pitchFamily="34" charset="-122"/>
-                <a:cs typeface="Arial" pitchFamily="34" charset="-120"/>
-              </a:rPr>
-              <a:t>same 552 MB image, byte for byte, on Linux, Windows, and macOS</a:t>
-            </a:r>
-            <a:endParaRPr lang="en-US" sz="1800" dirty="0"/>
-          </a:p>
-        </p:txBody>
-      </p:sp>
-      <p:sp>
-        <p:nvSpPr>
-          <p:cNvPr id="48" name="Shape 44"/>
-          <p:cNvSpPr/>
-          <p:nvPr/>
-        </p:nvSpPr>
-        <p:spPr>
-          <a:xfrm>
-            <a:off x="39044880" y="6355080"/>
-            <a:ext cx="4480560" cy="2743200"/>
-          </a:xfrm>
-          <a:prstGeom prst="roundRect">
-            <a:avLst>
-              <a:gd name="adj" fmla="val 5000"/>
-            </a:avLst>
-          </a:prstGeom>
-          <a:solidFill>
-            <a:srgbClr val="F5F4F0"/>
-          </a:solidFill>
-          <a:ln w="12700">
-            <a:solidFill>
-              <a:srgbClr val="F5F4F0"/>
-            </a:solidFill>
-            <a:prstDash val="solid"/>
-          </a:ln>
-        </p:spPr>
-      </p:sp>
-      <p:sp>
-        <p:nvSpPr>
-          <p:cNvPr id="49" name="Text 45"/>
-          <p:cNvSpPr txBox="1"/>
-          <p:nvPr/>
-        </p:nvSpPr>
-        <p:spPr>
-          <a:xfrm>
-            <a:off x="39273480" y="6492240"/>
-            <a:ext cx="4023360" cy="1143000"/>
-          </a:xfrm>
-          <a:prstGeom prst="rect">
-            <a:avLst/>
-          </a:prstGeom>
-          <a:noFill/>
-          <a:ln/>
-        </p:spPr>
-        <p:txBody>
-          <a:bodyPr wrap="square" lIns="0" tIns="0" rIns="0" bIns="0" rtlCol="0" anchor="ctr"/>
-          <a:lstStyle/>
-          <a:p>
-            <a:pPr indent="0" marL="0">
-              <a:buNone/>
-            </a:pPr>
-            <a:r>
-              <a:rPr lang="en-US" sz="6000" b="1" dirty="0">
-                <a:solidFill>
-                  <a:srgbClr val="B10202"/>
-                </a:solidFill>
-                <a:latin typeface="Arial" pitchFamily="34" charset="0"/>
-                <a:ea typeface="Arial" pitchFamily="34" charset="-122"/>
-                <a:cs typeface="Arial" pitchFamily="34" charset="-120"/>
-              </a:rPr>
-              <a:t>0.5 s</a:t>
-            </a:r>
-            <a:endParaRPr lang="en-US" sz="6000" dirty="0"/>
-          </a:p>
-        </p:txBody>
-      </p:sp>
-      <p:sp>
-        <p:nvSpPr>
-          <p:cNvPr id="50" name="Text 46"/>
-          <p:cNvSpPr txBox="1"/>
-          <p:nvPr/>
-        </p:nvSpPr>
-        <p:spPr>
-          <a:xfrm>
-            <a:off x="39273480" y="7635240"/>
-            <a:ext cx="4023360" cy="1371600"/>
-          </a:xfrm>
-          <a:prstGeom prst="rect">
-            <a:avLst/>
-          </a:prstGeom>
-          <a:noFill/>
-          <a:ln/>
-        </p:spPr>
-        <p:txBody>
-          <a:bodyPr wrap="square" lIns="0" tIns="0" rIns="0" bIns="0" rtlCol="0" anchor="t"/>
-          <a:lstStyle/>
-          <a:p>
-            <a:pPr indent="0" marL="0">
-              <a:lnSpc>
-                <a:spcPct val="100000"/>
-              </a:lnSpc>
-              <a:buNone/>
-            </a:pPr>
-            <a:r>
-              <a:rPr lang="en-US" sz="1800" dirty="0">
-                <a:solidFill>
-                  <a:srgbClr val="22252B"/>
-                </a:solidFill>
-                <a:latin typeface="Arial" pitchFamily="34" charset="0"/>
-                <a:ea typeface="Arial" pitchFamily="34" charset="-122"/>
-                <a:cs typeface="Arial" pitchFamily="34" charset="-120"/>
-              </a:rPr>
-              <a:t>editor ready on native hosts; 5–7 s under emulation; 54 MiB idle native</a:t>
-            </a:r>
-            <a:endParaRPr lang="en-US" sz="1800" dirty="0"/>
-          </a:p>
-        </p:txBody>
-      </p:sp>
-      <p:graphicFrame>
-        <p:nvGraphicFramePr>
-          <p:cNvPr id="51" name="Chart 0" descr=""/>
-          <p:cNvGraphicFramePr/>
-          <p:nvPr/>
-        </p:nvGraphicFramePr>
-        <p:xfrm>
-          <a:off x="29443680" y="9372600"/>
-          <a:ext cx="14081760" cy="5669280"/>
-        </p:xfrm>
-        <a:graphic xmlns:a="http://schemas.openxmlformats.org/drawingml/2006/main">
-          <a:graphicData uri="http://schemas.openxmlformats.org/drawingml/2006/chart">
-            <c:chart xmlns:c="http://schemas.openxmlformats.org/drawingml/2006/chart" r:id="rId2"/>
-          </a:graphicData>
-        </a:graphic>
-      </p:graphicFrame>
-      <p:sp>
-        <p:nvSpPr>
-          <p:cNvPr id="52" name="Text 47"/>
-          <p:cNvSpPr txBox="1"/>
-          <p:nvPr/>
-        </p:nvSpPr>
-        <p:spPr>
-          <a:xfrm>
-            <a:off x="29443680" y="15133320"/>
-            <a:ext cx="14081760" cy="1737360"/>
-          </a:xfrm>
-          <a:prstGeom prst="rect">
-            <a:avLst/>
-          </a:prstGeom>
-          <a:noFill/>
-          <a:ln/>
-        </p:spPr>
-        <p:txBody>
-          <a:bodyPr wrap="square" lIns="0" tIns="0" rIns="0" bIns="0" rtlCol="0" anchor="t"/>
-          <a:lstStyle/>
-          <a:p>
-            <a:pPr indent="0" marL="0">
-              <a:lnSpc>
-                <a:spcPct val="102000"/>
-              </a:lnSpc>
-              <a:buNone/>
-            </a:pPr>
-            <a:r>
-              <a:rPr lang="en-US" sz="2000" dirty="0">
-                <a:solidFill>
-                  <a:srgbClr val="22252B"/>
-                </a:solidFill>
-                <a:latin typeface="Arial" pitchFamily="34" charset="0"/>
-                <a:ea typeface="Arial" pitchFamily="34" charset="-122"/>
-                <a:cs typeface="Arial" pitchFamily="34" charset="-120"/>
-              </a:rPr>
-              <a:t>Emulation costs roughly one order of magnitude on compile-heavy steps (ast06: 14× on QEMU, 12.5× on Docker Desktop; ast12: 12× and 10×), yet every emulated build finished in under 4 s. Peak memory during coursework: 90 MiB native, 334–358 MiB emulated, a small slice of an 8 GB laptop.</a:t>
-            </a:r>
-            <a:endParaRPr lang="en-US" sz="2000" dirty="0"/>
-          </a:p>
-        </p:txBody>
-      </p:sp>
-      <p:sp>
-        <p:nvSpPr>
-          <p:cNvPr id="53" name="Text 48"/>
-          <p:cNvSpPr txBox="1"/>
-          <p:nvPr/>
-        </p:nvSpPr>
-        <p:spPr>
-          <a:xfrm>
-            <a:off x="29443680" y="17007840"/>
-            <a:ext cx="14081760" cy="822960"/>
-          </a:xfrm>
-          <a:prstGeom prst="rect">
-            <a:avLst/>
-          </a:prstGeom>
-          <a:noFill/>
-          <a:ln/>
-        </p:spPr>
-        <p:txBody>
-          <a:bodyPr wrap="square" lIns="0" tIns="0" rIns="0" bIns="0" rtlCol="0" anchor="ctr"/>
-          <a:lstStyle/>
-          <a:p>
-            <a:pPr indent="0" marL="0">
-              <a:buNone/>
-            </a:pPr>
-            <a:r>
-              <a:rPr lang="en-US" sz="4000" b="1" dirty="0">
-                <a:solidFill>
-                  <a:srgbClr val="B10202"/>
-                </a:solidFill>
-                <a:latin typeface="Arial" pitchFamily="34" charset="0"/>
-                <a:ea typeface="Arial" pitchFamily="34" charset="-122"/>
-                <a:cs typeface="Arial" pitchFamily="34" charset="-120"/>
-              </a:rPr>
-              <a:t>What it runs on, and where it stops</a:t>
-            </a:r>
-            <a:endParaRPr lang="en-US" sz="4000" dirty="0"/>
-          </a:p>
-        </p:txBody>
-      </p:sp>
-      <p:graphicFrame>
-        <p:nvGraphicFramePr>
-          <p:cNvPr id="3" name="Table 1"/>
-          <p:cNvGraphicFramePr>
-            <a:graphicFrameLocks noGrp="1"/>
-          </p:cNvGraphicFramePr>
-          <p:nvPr>
-            <p:extLst>
-              <p:ext uri="{D42A27DB-BD31-4B8C-83A1-F6EECF244321}">
-                <p14:modId xmlns:p14="http://schemas.microsoft.com/office/powerpoint/2010/main" val="1579011935"/>
-              </p:ext>
-            </p:extLst>
-          </p:nvPr>
-        </p:nvGraphicFramePr>
-        <p:xfrm>
-          <a:off x="29443680" y="18013680"/>
-          <a:ext cx="14081760" cy="914400"/>
-        </p:xfrm>
-        <a:graphic>
-          <a:graphicData uri="http://schemas.openxmlformats.org/drawingml/2006/table">
-            <a:tbl>
-              <a:tblPr/>
-              <a:tblGrid>
-                <a:gridCol w="3291840"/>
-                <a:gridCol w="3108960"/>
-                <a:gridCol w="2011680"/>
-                <a:gridCol w="5669280"/>
-              </a:tblGrid>
-              <a:tr h="566928">
+              <a:tr h="868680">
                 <a:tc>
                   <a:txBody>
                     <a:bodyPr/>
@@ -4442,24 +2958,24 @@
                         <a:buNone/>
                       </a:pPr>
                       <a:r>
-                        <a:rPr lang="en-US" sz="1600" b="1" dirty="0">
+                        <a:rPr lang="en-US" sz="1700" b="1" dirty="0">
                           <a:solidFill>
-                            <a:srgbClr val="FFFFFF"/>
+                            <a:srgbClr val="B10202"/>
                           </a:solidFill>
                           <a:latin typeface="Arial" pitchFamily="34" charset="0"/>
                           <a:ea typeface="Arial" pitchFamily="34" charset="-122"/>
                           <a:cs typeface="Arial" pitchFamily="34" charset="-120"/>
                         </a:rPr>
-                        <a:t>Host</a:t>
+                        <a:t>Local container (this project; cf. UCSD [3], Florida Tech [4])</a:t>
                       </a:r>
-                      <a:endParaRPr lang="en-US" sz="1600" dirty="0">
+                      <a:endParaRPr lang="en-US" sz="1700" dirty="0">
                         <a:latin typeface="Arial" charset="0"/>
                         <a:ea typeface="Arial" charset="0"/>
                         <a:cs typeface="Arial" charset="0"/>
                       </a:endParaRPr>
                     </a:p>
                   </a:txBody>
-                  <a:tcPr marL="64008" marR="64008" marT="64008" marB="64008" anchor="ctr">
+                  <a:tcPr marL="73152" marR="73152" marT="73152" marB="73152" anchor="ctr">
                     <a:lnL w="12700" cap="flat" cmpd="sng" algn="ctr">
                       <a:solidFill>
                         <a:srgbClr val="D9D6CF"/>
@@ -4497,7 +3013,7 @@
                       <a:tailEnd type="none" w="med" len="med"/>
                     </a:lnB>
                     <a:solidFill>
-                      <a:srgbClr val="22252B"/>
+                      <a:srgbClr val="FBEAEA"/>
                     </a:solidFill>
                   </a:tcPr>
                 </a:tc>
@@ -4510,24 +3026,24 @@
                         <a:buNone/>
                       </a:pPr>
                       <a:r>
-                        <a:rPr lang="en-US" sz="1600" b="1" dirty="0">
+                        <a:rPr lang="en-US" sz="1700" dirty="0">
                           <a:solidFill>
-                            <a:srgbClr val="FFFFFF"/>
+                            <a:srgbClr val="B10202"/>
                           </a:solidFill>
                           <a:latin typeface="Arial" pitchFamily="34" charset="0"/>
                           <a:ea typeface="Arial" pitchFamily="34" charset="-122"/>
                           <a:cs typeface="Arial" pitchFamily="34" charset="-120"/>
                         </a:rPr>
-                        <a:t>Assemble / run</a:t>
+                        <a:t>The student, once: install Docker</a:t>
                       </a:r>
-                      <a:endParaRPr lang="en-US" sz="1600" dirty="0">
+                      <a:endParaRPr lang="en-US" sz="1700" dirty="0">
                         <a:latin typeface="Arial" charset="0"/>
                         <a:ea typeface="Arial" charset="0"/>
                         <a:cs typeface="Arial" charset="0"/>
                       </a:endParaRPr>
                     </a:p>
                   </a:txBody>
-                  <a:tcPr marL="64008" marR="64008" marT="64008" marB="64008" anchor="ctr">
+                  <a:tcPr marL="73152" marR="73152" marT="73152" marB="73152" anchor="ctr">
                     <a:lnL w="12700" cap="flat" cmpd="sng" algn="ctr">
                       <a:solidFill>
                         <a:srgbClr val="D9D6CF"/>
@@ -4565,7 +3081,7 @@
                       <a:tailEnd type="none" w="med" len="med"/>
                     </a:lnB>
                     <a:solidFill>
-                      <a:srgbClr val="22252B"/>
+                      <a:srgbClr val="FBEAEA"/>
                     </a:solidFill>
                   </a:tcPr>
                 </a:tc>
@@ -4578,24 +3094,24 @@
                         <a:buNone/>
                       </a:pPr>
                       <a:r>
-                        <a:rPr lang="en-US" sz="1600" b="1" dirty="0">
+                        <a:rPr lang="en-US" sz="1700" dirty="0">
                           <a:solidFill>
-                            <a:srgbClr val="FFFFFF"/>
+                            <a:srgbClr val="B10202"/>
                           </a:solidFill>
                           <a:latin typeface="Arial" pitchFamily="34" charset="0"/>
                           <a:ea typeface="Arial" pitchFamily="34" charset="-122"/>
                           <a:cs typeface="Arial" pitchFamily="34" charset="-120"/>
                         </a:rPr>
-                        <a:t>gdb</a:t>
+                        <a:t>One download, one command, then nothing</a:t>
                       </a:r>
-                      <a:endParaRPr lang="en-US" sz="1600" dirty="0">
+                      <a:endParaRPr lang="en-US" sz="1700" dirty="0">
                         <a:latin typeface="Arial" charset="0"/>
                         <a:ea typeface="Arial" charset="0"/>
                         <a:cs typeface="Arial" charset="0"/>
                       </a:endParaRPr>
                     </a:p>
                   </a:txBody>
-                  <a:tcPr marL="64008" marR="64008" marT="64008" marB="64008" anchor="ctr">
+                  <a:tcPr marL="73152" marR="73152" marT="73152" marB="73152" anchor="ctr">
                     <a:lnL w="12700" cap="flat" cmpd="sng" algn="ctr">
                       <a:solidFill>
                         <a:srgbClr val="D9D6CF"/>
@@ -4633,1445 +3149,7 @@
                       <a:tailEnd type="none" w="med" len="med"/>
                     </a:lnB>
                     <a:solidFill>
-                      <a:srgbClr val="22252B"/>
-                    </a:solidFill>
-                  </a:tcPr>
-                </a:tc>
-                <a:tc>
-                  <a:txBody>
-                    <a:bodyPr/>
-                    <a:lstStyle/>
-                    <a:p>
-                      <a:pPr indent="0" marL="0">
-                        <a:buNone/>
-                      </a:pPr>
-                      <a:r>
-                        <a:rPr lang="en-US" sz="1600" b="1" dirty="0">
-                          <a:solidFill>
-                            <a:srgbClr val="FFFFFF"/>
-                          </a:solidFill>
-                          <a:latin typeface="Arial" pitchFamily="34" charset="0"/>
-                          <a:ea typeface="Arial" pitchFamily="34" charset="-122"/>
-                          <a:cs typeface="Arial" pitchFamily="34" charset="-120"/>
-                        </a:rPr>
-                        <a:t>Evidence</a:t>
-                      </a:r>
-                      <a:endParaRPr lang="en-US" sz="1600" dirty="0">
-                        <a:latin typeface="Arial" charset="0"/>
-                        <a:ea typeface="Arial" charset="0"/>
-                        <a:cs typeface="Arial" charset="0"/>
-                      </a:endParaRPr>
-                    </a:p>
-                  </a:txBody>
-                  <a:tcPr marL="64008" marR="64008" marT="64008" marB="64008" anchor="ctr">
-                    <a:lnL w="12700" cap="flat" cmpd="sng" algn="ctr">
-                      <a:solidFill>
-                        <a:srgbClr val="D9D6CF"/>
-                      </a:solidFill>
-                      <a:prstDash val="solid"/>
-                      <a:round/>
-                      <a:headEnd type="none" w="med" len="med"/>
-                      <a:tailEnd type="none" w="med" len="med"/>
-                    </a:lnL>
-                    <a:lnR w="12700" cap="flat" cmpd="sng" algn="ctr">
-                      <a:solidFill>
-                        <a:srgbClr val="D9D6CF"/>
-                      </a:solidFill>
-                      <a:prstDash val="solid"/>
-                      <a:round/>
-                      <a:headEnd type="none" w="med" len="med"/>
-                      <a:tailEnd type="none" w="med" len="med"/>
-                    </a:lnR>
-                    <a:lnT w="12700" cap="flat" cmpd="sng" algn="ctr">
-                      <a:solidFill>
-                        <a:srgbClr val="D9D6CF"/>
-                      </a:solidFill>
-                      <a:prstDash val="solid"/>
-                      <a:round/>
-                      <a:headEnd type="none" w="med" len="med"/>
-                      <a:tailEnd type="none" w="med" len="med"/>
-                    </a:lnT>
-                    <a:lnB w="12700" cap="flat" cmpd="sng" algn="ctr">
-                      <a:solidFill>
-                        <a:srgbClr val="D9D6CF"/>
-                      </a:solidFill>
-                      <a:prstDash val="solid"/>
-                      <a:round/>
-                      <a:headEnd type="none" w="med" len="med"/>
-                      <a:tailEnd type="none" w="med" len="med"/>
-                    </a:lnB>
-                    <a:solidFill>
-                      <a:srgbClr val="22252B"/>
-                    </a:solidFill>
-                  </a:tcPr>
-                </a:tc>
-              </a:tr>
-              <a:tr h="566928">
-                <a:tc>
-                  <a:txBody>
-                    <a:bodyPr/>
-                    <a:lstStyle/>
-                    <a:p>
-                      <a:pPr indent="0" marL="0">
-                        <a:buNone/>
-                      </a:pPr>
-                      <a:r>
-                        <a:rPr lang="en-US" sz="1600" b="1" dirty="0">
-                          <a:solidFill>
-                            <a:srgbClr val="22252B"/>
-                          </a:solidFill>
-                          <a:latin typeface="Arial" pitchFamily="34" charset="0"/>
-                          <a:ea typeface="Arial" pitchFamily="34" charset="-122"/>
-                          <a:cs typeface="Arial" pitchFamily="34" charset="-120"/>
-                        </a:rPr>
-                        <a:t>Windows or Linux on Intel / AMD</a:t>
-                      </a:r>
-                      <a:endParaRPr lang="en-US" sz="1600" dirty="0">
-                        <a:latin typeface="Arial" charset="0"/>
-                        <a:ea typeface="Arial" charset="0"/>
-                        <a:cs typeface="Arial" charset="0"/>
-                      </a:endParaRPr>
-                    </a:p>
-                  </a:txBody>
-                  <a:tcPr marL="64008" marR="64008" marT="64008" marB="64008" anchor="ctr">
-                    <a:lnL w="12700" cap="flat" cmpd="sng" algn="ctr">
-                      <a:solidFill>
-                        <a:srgbClr val="D9D6CF"/>
-                      </a:solidFill>
-                      <a:prstDash val="solid"/>
-                      <a:round/>
-                      <a:headEnd type="none" w="med" len="med"/>
-                      <a:tailEnd type="none" w="med" len="med"/>
-                    </a:lnL>
-                    <a:lnR w="12700" cap="flat" cmpd="sng" algn="ctr">
-                      <a:solidFill>
-                        <a:srgbClr val="D9D6CF"/>
-                      </a:solidFill>
-                      <a:prstDash val="solid"/>
-                      <a:round/>
-                      <a:headEnd type="none" w="med" len="med"/>
-                      <a:tailEnd type="none" w="med" len="med"/>
-                    </a:lnR>
-                    <a:lnT w="12700" cap="flat" cmpd="sng" algn="ctr">
-                      <a:solidFill>
-                        <a:srgbClr val="D9D6CF"/>
-                      </a:solidFill>
-                      <a:prstDash val="solid"/>
-                      <a:round/>
-                      <a:headEnd type="none" w="med" len="med"/>
-                      <a:tailEnd type="none" w="med" len="med"/>
-                    </a:lnT>
-                    <a:lnB w="12700" cap="flat" cmpd="sng" algn="ctr">
-                      <a:solidFill>
-                        <a:srgbClr val="D9D6CF"/>
-                      </a:solidFill>
-                      <a:prstDash val="solid"/>
-                      <a:round/>
-                      <a:headEnd type="none" w="med" len="med"/>
-                      <a:tailEnd type="none" w="med" len="med"/>
-                    </a:lnB>
-                    <a:solidFill>
-                      <a:srgbClr val="FFFFFF"/>
-                    </a:solidFill>
-                  </a:tcPr>
-                </a:tc>
-                <a:tc>
-                  <a:txBody>
-                    <a:bodyPr/>
-                    <a:lstStyle/>
-                    <a:p>
-                      <a:pPr indent="0" marL="0">
-                        <a:buNone/>
-                      </a:pPr>
-                      <a:r>
-                        <a:rPr lang="en-US" sz="1600" dirty="0">
-                          <a:solidFill>
-                            <a:srgbClr val="22252B"/>
-                          </a:solidFill>
-                          <a:latin typeface="Arial" pitchFamily="34" charset="0"/>
-                          <a:ea typeface="Arial" pitchFamily="34" charset="-122"/>
-                          <a:cs typeface="Arial" pitchFamily="34" charset="-120"/>
-                        </a:rPr>
-                        <a:t>works</a:t>
-                      </a:r>
-                      <a:endParaRPr lang="en-US" sz="1600" dirty="0">
-                        <a:latin typeface="Arial" charset="0"/>
-                        <a:ea typeface="Arial" charset="0"/>
-                        <a:cs typeface="Arial" charset="0"/>
-                      </a:endParaRPr>
-                    </a:p>
-                  </a:txBody>
-                  <a:tcPr marL="64008" marR="64008" marT="64008" marB="64008" anchor="ctr">
-                    <a:lnL w="12700" cap="flat" cmpd="sng" algn="ctr">
-                      <a:solidFill>
-                        <a:srgbClr val="D9D6CF"/>
-                      </a:solidFill>
-                      <a:prstDash val="solid"/>
-                      <a:round/>
-                      <a:headEnd type="none" w="med" len="med"/>
-                      <a:tailEnd type="none" w="med" len="med"/>
-                    </a:lnL>
-                    <a:lnR w="12700" cap="flat" cmpd="sng" algn="ctr">
-                      <a:solidFill>
-                        <a:srgbClr val="D9D6CF"/>
-                      </a:solidFill>
-                      <a:prstDash val="solid"/>
-                      <a:round/>
-                      <a:headEnd type="none" w="med" len="med"/>
-                      <a:tailEnd type="none" w="med" len="med"/>
-                    </a:lnR>
-                    <a:lnT w="12700" cap="flat" cmpd="sng" algn="ctr">
-                      <a:solidFill>
-                        <a:srgbClr val="D9D6CF"/>
-                      </a:solidFill>
-                      <a:prstDash val="solid"/>
-                      <a:round/>
-                      <a:headEnd type="none" w="med" len="med"/>
-                      <a:tailEnd type="none" w="med" len="med"/>
-                    </a:lnT>
-                    <a:lnB w="12700" cap="flat" cmpd="sng" algn="ctr">
-                      <a:solidFill>
-                        <a:srgbClr val="D9D6CF"/>
-                      </a:solidFill>
-                      <a:prstDash val="solid"/>
-                      <a:round/>
-                      <a:headEnd type="none" w="med" len="med"/>
-                      <a:tailEnd type="none" w="med" len="med"/>
-                    </a:lnB>
-                    <a:solidFill>
-                      <a:srgbClr val="FFFFFF"/>
-                    </a:solidFill>
-                  </a:tcPr>
-                </a:tc>
-                <a:tc>
-                  <a:txBody>
-                    <a:bodyPr/>
-                    <a:lstStyle/>
-                    <a:p>
-                      <a:pPr indent="0" marL="0">
-                        <a:buNone/>
-                      </a:pPr>
-                      <a:r>
-                        <a:rPr lang="en-US" sz="1600" dirty="0">
-                          <a:solidFill>
-                            <a:srgbClr val="22252B"/>
-                          </a:solidFill>
-                          <a:latin typeface="Arial" pitchFamily="34" charset="0"/>
-                          <a:ea typeface="Arial" pitchFamily="34" charset="-122"/>
-                          <a:cs typeface="Arial" pitchFamily="34" charset="-120"/>
-                        </a:rPr>
-                        <a:t>works</a:t>
-                      </a:r>
-                      <a:endParaRPr lang="en-US" sz="1600" dirty="0">
-                        <a:latin typeface="Arial" charset="0"/>
-                        <a:ea typeface="Arial" charset="0"/>
-                        <a:cs typeface="Arial" charset="0"/>
-                      </a:endParaRPr>
-                    </a:p>
-                  </a:txBody>
-                  <a:tcPr marL="64008" marR="64008" marT="64008" marB="64008" anchor="ctr">
-                    <a:lnL w="12700" cap="flat" cmpd="sng" algn="ctr">
-                      <a:solidFill>
-                        <a:srgbClr val="D9D6CF"/>
-                      </a:solidFill>
-                      <a:prstDash val="solid"/>
-                      <a:round/>
-                      <a:headEnd type="none" w="med" len="med"/>
-                      <a:tailEnd type="none" w="med" len="med"/>
-                    </a:lnL>
-                    <a:lnR w="12700" cap="flat" cmpd="sng" algn="ctr">
-                      <a:solidFill>
-                        <a:srgbClr val="D9D6CF"/>
-                      </a:solidFill>
-                      <a:prstDash val="solid"/>
-                      <a:round/>
-                      <a:headEnd type="none" w="med" len="med"/>
-                      <a:tailEnd type="none" w="med" len="med"/>
-                    </a:lnR>
-                    <a:lnT w="12700" cap="flat" cmpd="sng" algn="ctr">
-                      <a:solidFill>
-                        <a:srgbClr val="D9D6CF"/>
-                      </a:solidFill>
-                      <a:prstDash val="solid"/>
-                      <a:round/>
-                      <a:headEnd type="none" w="med" len="med"/>
-                      <a:tailEnd type="none" w="med" len="med"/>
-                    </a:lnT>
-                    <a:lnB w="12700" cap="flat" cmpd="sng" algn="ctr">
-                      <a:solidFill>
-                        <a:srgbClr val="D9D6CF"/>
-                      </a:solidFill>
-                      <a:prstDash val="solid"/>
-                      <a:round/>
-                      <a:headEnd type="none" w="med" len="med"/>
-                      <a:tailEnd type="none" w="med" len="med"/>
-                    </a:lnB>
-                    <a:solidFill>
-                      <a:srgbClr val="FFFFFF"/>
-                    </a:solidFill>
-                  </a:tcPr>
-                </a:tc>
-                <a:tc>
-                  <a:txBody>
-                    <a:bodyPr/>
-                    <a:lstStyle/>
-                    <a:p>
-                      <a:pPr indent="0" marL="0">
-                        <a:buNone/>
-                      </a:pPr>
-                      <a:r>
-                        <a:rPr lang="en-US" sz="1600" dirty="0">
-                          <a:solidFill>
-                            <a:srgbClr val="22252B"/>
-                          </a:solidFill>
-                          <a:latin typeface="Arial" pitchFamily="34" charset="0"/>
-                          <a:ea typeface="Arial" pitchFamily="34" charset="-122"/>
-                          <a:cs typeface="Arial" pitchFamily="34" charset="-120"/>
-                        </a:rPr>
-                        <a:t>cells 1, 3: 13/13 checks</a:t>
-                      </a:r>
-                      <a:endParaRPr lang="en-US" sz="1600" dirty="0">
-                        <a:latin typeface="Arial" charset="0"/>
-                        <a:ea typeface="Arial" charset="0"/>
-                        <a:cs typeface="Arial" charset="0"/>
-                      </a:endParaRPr>
-                    </a:p>
-                  </a:txBody>
-                  <a:tcPr marL="64008" marR="64008" marT="64008" marB="64008" anchor="ctr">
-                    <a:lnL w="12700" cap="flat" cmpd="sng" algn="ctr">
-                      <a:solidFill>
-                        <a:srgbClr val="D9D6CF"/>
-                      </a:solidFill>
-                      <a:prstDash val="solid"/>
-                      <a:round/>
-                      <a:headEnd type="none" w="med" len="med"/>
-                      <a:tailEnd type="none" w="med" len="med"/>
-                    </a:lnL>
-                    <a:lnR w="12700" cap="flat" cmpd="sng" algn="ctr">
-                      <a:solidFill>
-                        <a:srgbClr val="D9D6CF"/>
-                      </a:solidFill>
-                      <a:prstDash val="solid"/>
-                      <a:round/>
-                      <a:headEnd type="none" w="med" len="med"/>
-                      <a:tailEnd type="none" w="med" len="med"/>
-                    </a:lnR>
-                    <a:lnT w="12700" cap="flat" cmpd="sng" algn="ctr">
-                      <a:solidFill>
-                        <a:srgbClr val="D9D6CF"/>
-                      </a:solidFill>
-                      <a:prstDash val="solid"/>
-                      <a:round/>
-                      <a:headEnd type="none" w="med" len="med"/>
-                      <a:tailEnd type="none" w="med" len="med"/>
-                    </a:lnT>
-                    <a:lnB w="12700" cap="flat" cmpd="sng" algn="ctr">
-                      <a:solidFill>
-                        <a:srgbClr val="D9D6CF"/>
-                      </a:solidFill>
-                      <a:prstDash val="solid"/>
-                      <a:round/>
-                      <a:headEnd type="none" w="med" len="med"/>
-                      <a:tailEnd type="none" w="med" len="med"/>
-                    </a:lnB>
-                    <a:solidFill>
-                      <a:srgbClr val="FFFFFF"/>
-                    </a:solidFill>
-                  </a:tcPr>
-                </a:tc>
-              </a:tr>
-              <a:tr h="566928">
-                <a:tc>
-                  <a:txBody>
-                    <a:bodyPr/>
-                    <a:lstStyle/>
-                    <a:p>
-                      <a:pPr indent="0" marL="0">
-                        <a:buNone/>
-                      </a:pPr>
-                      <a:r>
-                        <a:rPr lang="en-US" sz="1600" b="1" dirty="0">
-                          <a:solidFill>
-                            <a:srgbClr val="22252B"/>
-                          </a:solidFill>
-                          <a:latin typeface="Arial" pitchFamily="34" charset="0"/>
-                          <a:ea typeface="Arial" pitchFamily="34" charset="-122"/>
-                          <a:cs typeface="Arial" pitchFamily="34" charset="-120"/>
-                        </a:rPr>
-                        <a:t>Apple Silicon Mac</a:t>
-                      </a:r>
-                      <a:endParaRPr lang="en-US" sz="1600" dirty="0">
-                        <a:latin typeface="Arial" charset="0"/>
-                        <a:ea typeface="Arial" charset="0"/>
-                        <a:cs typeface="Arial" charset="0"/>
-                      </a:endParaRPr>
-                    </a:p>
-                  </a:txBody>
-                  <a:tcPr marL="64008" marR="64008" marT="64008" marB="64008" anchor="ctr">
-                    <a:lnL w="12700" cap="flat" cmpd="sng" algn="ctr">
-                      <a:solidFill>
-                        <a:srgbClr val="D9D6CF"/>
-                      </a:solidFill>
-                      <a:prstDash val="solid"/>
-                      <a:round/>
-                      <a:headEnd type="none" w="med" len="med"/>
-                      <a:tailEnd type="none" w="med" len="med"/>
-                    </a:lnL>
-                    <a:lnR w="12700" cap="flat" cmpd="sng" algn="ctr">
-                      <a:solidFill>
-                        <a:srgbClr val="D9D6CF"/>
-                      </a:solidFill>
-                      <a:prstDash val="solid"/>
-                      <a:round/>
-                      <a:headEnd type="none" w="med" len="med"/>
-                      <a:tailEnd type="none" w="med" len="med"/>
-                    </a:lnR>
-                    <a:lnT w="12700" cap="flat" cmpd="sng" algn="ctr">
-                      <a:solidFill>
-                        <a:srgbClr val="D9D6CF"/>
-                      </a:solidFill>
-                      <a:prstDash val="solid"/>
-                      <a:round/>
-                      <a:headEnd type="none" w="med" len="med"/>
-                      <a:tailEnd type="none" w="med" len="med"/>
-                    </a:lnT>
-                    <a:lnB w="12700" cap="flat" cmpd="sng" algn="ctr">
-                      <a:solidFill>
-                        <a:srgbClr val="D9D6CF"/>
-                      </a:solidFill>
-                      <a:prstDash val="solid"/>
-                      <a:round/>
-                      <a:headEnd type="none" w="med" len="med"/>
-                      <a:tailEnd type="none" w="med" len="med"/>
-                    </a:lnB>
-                    <a:solidFill>
-                      <a:srgbClr val="F5F4F0"/>
-                    </a:solidFill>
-                  </a:tcPr>
-                </a:tc>
-                <a:tc>
-                  <a:txBody>
-                    <a:bodyPr/>
-                    <a:lstStyle/>
-                    <a:p>
-                      <a:pPr indent="0" marL="0">
-                        <a:buNone/>
-                      </a:pPr>
-                      <a:r>
-                        <a:rPr lang="en-US" sz="1600" dirty="0">
-                          <a:solidFill>
-                            <a:srgbClr val="22252B"/>
-                          </a:solidFill>
-                          <a:latin typeface="Arial" pitchFamily="34" charset="0"/>
-                          <a:ea typeface="Arial" pitchFamily="34" charset="-122"/>
-                          <a:cs typeface="Arial" pitchFamily="34" charset="-120"/>
-                        </a:rPr>
-                        <a:t>works</a:t>
-                      </a:r>
-                      <a:endParaRPr lang="en-US" sz="1600" dirty="0">
-                        <a:latin typeface="Arial" charset="0"/>
-                        <a:ea typeface="Arial" charset="0"/>
-                        <a:cs typeface="Arial" charset="0"/>
-                      </a:endParaRPr>
-                    </a:p>
-                  </a:txBody>
-                  <a:tcPr marL="64008" marR="64008" marT="64008" marB="64008" anchor="ctr">
-                    <a:lnL w="12700" cap="flat" cmpd="sng" algn="ctr">
-                      <a:solidFill>
-                        <a:srgbClr val="D9D6CF"/>
-                      </a:solidFill>
-                      <a:prstDash val="solid"/>
-                      <a:round/>
-                      <a:headEnd type="none" w="med" len="med"/>
-                      <a:tailEnd type="none" w="med" len="med"/>
-                    </a:lnL>
-                    <a:lnR w="12700" cap="flat" cmpd="sng" algn="ctr">
-                      <a:solidFill>
-                        <a:srgbClr val="D9D6CF"/>
-                      </a:solidFill>
-                      <a:prstDash val="solid"/>
-                      <a:round/>
-                      <a:headEnd type="none" w="med" len="med"/>
-                      <a:tailEnd type="none" w="med" len="med"/>
-                    </a:lnR>
-                    <a:lnT w="12700" cap="flat" cmpd="sng" algn="ctr">
-                      <a:solidFill>
-                        <a:srgbClr val="D9D6CF"/>
-                      </a:solidFill>
-                      <a:prstDash val="solid"/>
-                      <a:round/>
-                      <a:headEnd type="none" w="med" len="med"/>
-                      <a:tailEnd type="none" w="med" len="med"/>
-                    </a:lnT>
-                    <a:lnB w="12700" cap="flat" cmpd="sng" algn="ctr">
-                      <a:solidFill>
-                        <a:srgbClr val="D9D6CF"/>
-                      </a:solidFill>
-                      <a:prstDash val="solid"/>
-                      <a:round/>
-                      <a:headEnd type="none" w="med" len="med"/>
-                      <a:tailEnd type="none" w="med" len="med"/>
-                    </a:lnB>
-                    <a:solidFill>
-                      <a:srgbClr val="F5F4F0"/>
-                    </a:solidFill>
-                  </a:tcPr>
-                </a:tc>
-                <a:tc>
-                  <a:txBody>
-                    <a:bodyPr/>
-                    <a:lstStyle/>
-                    <a:p>
-                      <a:pPr indent="0" marL="0">
-                        <a:buNone/>
-                      </a:pPr>
-                      <a:r>
-                        <a:rPr lang="en-US" sz="1600" dirty="0">
-                          <a:solidFill>
-                            <a:srgbClr val="22252B"/>
-                          </a:solidFill>
-                          <a:latin typeface="Arial" pitchFamily="34" charset="0"/>
-                          <a:ea typeface="Arial" pitchFamily="34" charset="-122"/>
-                          <a:cs typeface="Arial" pitchFamily="34" charset="-120"/>
-                        </a:rPr>
-                        <a:t>broken</a:t>
-                      </a:r>
-                      <a:endParaRPr lang="en-US" sz="1600" dirty="0">
-                        <a:latin typeface="Arial" charset="0"/>
-                        <a:ea typeface="Arial" charset="0"/>
-                        <a:cs typeface="Arial" charset="0"/>
-                      </a:endParaRPr>
-                    </a:p>
-                  </a:txBody>
-                  <a:tcPr marL="64008" marR="64008" marT="64008" marB="64008" anchor="ctr">
-                    <a:lnL w="12700" cap="flat" cmpd="sng" algn="ctr">
-                      <a:solidFill>
-                        <a:srgbClr val="D9D6CF"/>
-                      </a:solidFill>
-                      <a:prstDash val="solid"/>
-                      <a:round/>
-                      <a:headEnd type="none" w="med" len="med"/>
-                      <a:tailEnd type="none" w="med" len="med"/>
-                    </a:lnL>
-                    <a:lnR w="12700" cap="flat" cmpd="sng" algn="ctr">
-                      <a:solidFill>
-                        <a:srgbClr val="D9D6CF"/>
-                      </a:solidFill>
-                      <a:prstDash val="solid"/>
-                      <a:round/>
-                      <a:headEnd type="none" w="med" len="med"/>
-                      <a:tailEnd type="none" w="med" len="med"/>
-                    </a:lnR>
-                    <a:lnT w="12700" cap="flat" cmpd="sng" algn="ctr">
-                      <a:solidFill>
-                        <a:srgbClr val="D9D6CF"/>
-                      </a:solidFill>
-                      <a:prstDash val="solid"/>
-                      <a:round/>
-                      <a:headEnd type="none" w="med" len="med"/>
-                      <a:tailEnd type="none" w="med" len="med"/>
-                    </a:lnT>
-                    <a:lnB w="12700" cap="flat" cmpd="sng" algn="ctr">
-                      <a:solidFill>
-                        <a:srgbClr val="D9D6CF"/>
-                      </a:solidFill>
-                      <a:prstDash val="solid"/>
-                      <a:round/>
-                      <a:headEnd type="none" w="med" len="med"/>
-                      <a:tailEnd type="none" w="med" len="med"/>
-                    </a:lnB>
-                    <a:solidFill>
-                      <a:srgbClr val="F5F4F0"/>
-                    </a:solidFill>
-                  </a:tcPr>
-                </a:tc>
-                <a:tc>
-                  <a:txBody>
-                    <a:bodyPr/>
-                    <a:lstStyle/>
-                    <a:p>
-                      <a:pPr indent="0" marL="0">
-                        <a:buNone/>
-                      </a:pPr>
-                      <a:r>
-                        <a:rPr lang="en-US" sz="1600" dirty="0">
-                          <a:solidFill>
-                            <a:srgbClr val="22252B"/>
-                          </a:solidFill>
-                          <a:latin typeface="Arial" pitchFamily="34" charset="0"/>
-                          <a:ea typeface="Arial" pitchFamily="34" charset="-122"/>
-                          <a:cs typeface="Arial" pitchFamily="34" charset="-120"/>
-                        </a:rPr>
-                        <a:t>cell 4: 12/12, gdb probe silent</a:t>
-                      </a:r>
-                      <a:endParaRPr lang="en-US" sz="1600" dirty="0">
-                        <a:latin typeface="Arial" charset="0"/>
-                        <a:ea typeface="Arial" charset="0"/>
-                        <a:cs typeface="Arial" charset="0"/>
-                      </a:endParaRPr>
-                    </a:p>
-                  </a:txBody>
-                  <a:tcPr marL="64008" marR="64008" marT="64008" marB="64008" anchor="ctr">
-                    <a:lnL w="12700" cap="flat" cmpd="sng" algn="ctr">
-                      <a:solidFill>
-                        <a:srgbClr val="D9D6CF"/>
-                      </a:solidFill>
-                      <a:prstDash val="solid"/>
-                      <a:round/>
-                      <a:headEnd type="none" w="med" len="med"/>
-                      <a:tailEnd type="none" w="med" len="med"/>
-                    </a:lnL>
-                    <a:lnR w="12700" cap="flat" cmpd="sng" algn="ctr">
-                      <a:solidFill>
-                        <a:srgbClr val="D9D6CF"/>
-                      </a:solidFill>
-                      <a:prstDash val="solid"/>
-                      <a:round/>
-                      <a:headEnd type="none" w="med" len="med"/>
-                      <a:tailEnd type="none" w="med" len="med"/>
-                    </a:lnR>
-                    <a:lnT w="12700" cap="flat" cmpd="sng" algn="ctr">
-                      <a:solidFill>
-                        <a:srgbClr val="D9D6CF"/>
-                      </a:solidFill>
-                      <a:prstDash val="solid"/>
-                      <a:round/>
-                      <a:headEnd type="none" w="med" len="med"/>
-                      <a:tailEnd type="none" w="med" len="med"/>
-                    </a:lnT>
-                    <a:lnB w="12700" cap="flat" cmpd="sng" algn="ctr">
-                      <a:solidFill>
-                        <a:srgbClr val="D9D6CF"/>
-                      </a:solidFill>
-                      <a:prstDash val="solid"/>
-                      <a:round/>
-                      <a:headEnd type="none" w="med" len="med"/>
-                      <a:tailEnd type="none" w="med" len="med"/>
-                    </a:lnB>
-                    <a:solidFill>
-                      <a:srgbClr val="F5F4F0"/>
-                    </a:solidFill>
-                  </a:tcPr>
-                </a:tc>
-              </a:tr>
-              <a:tr h="566928">
-                <a:tc>
-                  <a:txBody>
-                    <a:bodyPr/>
-                    <a:lstStyle/>
-                    <a:p>
-                      <a:pPr indent="0" marL="0">
-                        <a:buNone/>
-                      </a:pPr>
-                      <a:r>
-                        <a:rPr lang="en-US" sz="1600" b="1" dirty="0">
-                          <a:solidFill>
-                            <a:srgbClr val="22252B"/>
-                          </a:solidFill>
-                          <a:latin typeface="Arial" pitchFamily="34" charset="0"/>
-                          <a:ea typeface="Arial" pitchFamily="34" charset="-122"/>
-                          <a:cs typeface="Arial" pitchFamily="34" charset="-120"/>
-                        </a:rPr>
-                        <a:t>ARM Linux</a:t>
-                      </a:r>
-                      <a:endParaRPr lang="en-US" sz="1600" dirty="0">
-                        <a:latin typeface="Arial" charset="0"/>
-                        <a:ea typeface="Arial" charset="0"/>
-                        <a:cs typeface="Arial" charset="0"/>
-                      </a:endParaRPr>
-                    </a:p>
-                  </a:txBody>
-                  <a:tcPr marL="64008" marR="64008" marT="64008" marB="64008" anchor="ctr">
-                    <a:lnL w="12700" cap="flat" cmpd="sng" algn="ctr">
-                      <a:solidFill>
-                        <a:srgbClr val="D9D6CF"/>
-                      </a:solidFill>
-                      <a:prstDash val="solid"/>
-                      <a:round/>
-                      <a:headEnd type="none" w="med" len="med"/>
-                      <a:tailEnd type="none" w="med" len="med"/>
-                    </a:lnL>
-                    <a:lnR w="12700" cap="flat" cmpd="sng" algn="ctr">
-                      <a:solidFill>
-                        <a:srgbClr val="D9D6CF"/>
-                      </a:solidFill>
-                      <a:prstDash val="solid"/>
-                      <a:round/>
-                      <a:headEnd type="none" w="med" len="med"/>
-                      <a:tailEnd type="none" w="med" len="med"/>
-                    </a:lnR>
-                    <a:lnT w="12700" cap="flat" cmpd="sng" algn="ctr">
-                      <a:solidFill>
-                        <a:srgbClr val="D9D6CF"/>
-                      </a:solidFill>
-                      <a:prstDash val="solid"/>
-                      <a:round/>
-                      <a:headEnd type="none" w="med" len="med"/>
-                      <a:tailEnd type="none" w="med" len="med"/>
-                    </a:lnT>
-                    <a:lnB w="12700" cap="flat" cmpd="sng" algn="ctr">
-                      <a:solidFill>
-                        <a:srgbClr val="D9D6CF"/>
-                      </a:solidFill>
-                      <a:prstDash val="solid"/>
-                      <a:round/>
-                      <a:headEnd type="none" w="med" len="med"/>
-                      <a:tailEnd type="none" w="med" len="med"/>
-                    </a:lnB>
-                    <a:solidFill>
-                      <a:srgbClr val="FFFFFF"/>
-                    </a:solidFill>
-                  </a:tcPr>
-                </a:tc>
-                <a:tc>
-                  <a:txBody>
-                    <a:bodyPr/>
-                    <a:lstStyle/>
-                    <a:p>
-                      <a:pPr indent="0" marL="0">
-                        <a:buNone/>
-                      </a:pPr>
-                      <a:r>
-                        <a:rPr lang="en-US" sz="1600" dirty="0">
-                          <a:solidFill>
-                            <a:srgbClr val="22252B"/>
-                          </a:solidFill>
-                          <a:latin typeface="Arial" pitchFamily="34" charset="0"/>
-                          <a:ea typeface="Arial" pitchFamily="34" charset="-122"/>
-                          <a:cs typeface="Arial" pitchFamily="34" charset="-120"/>
-                        </a:rPr>
-                        <a:t>works with Docker’s binfmt handler</a:t>
-                      </a:r>
-                      <a:endParaRPr lang="en-US" sz="1600" dirty="0">
-                        <a:latin typeface="Arial" charset="0"/>
-                        <a:ea typeface="Arial" charset="0"/>
-                        <a:cs typeface="Arial" charset="0"/>
-                      </a:endParaRPr>
-                    </a:p>
-                  </a:txBody>
-                  <a:tcPr marL="64008" marR="64008" marT="64008" marB="64008" anchor="ctr">
-                    <a:lnL w="12700" cap="flat" cmpd="sng" algn="ctr">
-                      <a:solidFill>
-                        <a:srgbClr val="D9D6CF"/>
-                      </a:solidFill>
-                      <a:prstDash val="solid"/>
-                      <a:round/>
-                      <a:headEnd type="none" w="med" len="med"/>
-                      <a:tailEnd type="none" w="med" len="med"/>
-                    </a:lnL>
-                    <a:lnR w="12700" cap="flat" cmpd="sng" algn="ctr">
-                      <a:solidFill>
-                        <a:srgbClr val="D9D6CF"/>
-                      </a:solidFill>
-                      <a:prstDash val="solid"/>
-                      <a:round/>
-                      <a:headEnd type="none" w="med" len="med"/>
-                      <a:tailEnd type="none" w="med" len="med"/>
-                    </a:lnR>
-                    <a:lnT w="12700" cap="flat" cmpd="sng" algn="ctr">
-                      <a:solidFill>
-                        <a:srgbClr val="D9D6CF"/>
-                      </a:solidFill>
-                      <a:prstDash val="solid"/>
-                      <a:round/>
-                      <a:headEnd type="none" w="med" len="med"/>
-                      <a:tailEnd type="none" w="med" len="med"/>
-                    </a:lnT>
-                    <a:lnB w="12700" cap="flat" cmpd="sng" algn="ctr">
-                      <a:solidFill>
-                        <a:srgbClr val="D9D6CF"/>
-                      </a:solidFill>
-                      <a:prstDash val="solid"/>
-                      <a:round/>
-                      <a:headEnd type="none" w="med" len="med"/>
-                      <a:tailEnd type="none" w="med" len="med"/>
-                    </a:lnB>
-                    <a:solidFill>
-                      <a:srgbClr val="FFFFFF"/>
-                    </a:solidFill>
-                  </a:tcPr>
-                </a:tc>
-                <a:tc>
-                  <a:txBody>
-                    <a:bodyPr/>
-                    <a:lstStyle/>
-                    <a:p>
-                      <a:pPr indent="0" marL="0">
-                        <a:buNone/>
-                      </a:pPr>
-                      <a:r>
-                        <a:rPr lang="en-US" sz="1600" dirty="0">
-                          <a:solidFill>
-                            <a:srgbClr val="22252B"/>
-                          </a:solidFill>
-                          <a:latin typeface="Arial" pitchFamily="34" charset="0"/>
-                          <a:ea typeface="Arial" pitchFamily="34" charset="-122"/>
-                          <a:cs typeface="Arial" pitchFamily="34" charset="-120"/>
-                        </a:rPr>
-                        <a:t>broken</a:t>
-                      </a:r>
-                      <a:endParaRPr lang="en-US" sz="1600" dirty="0">
-                        <a:latin typeface="Arial" charset="0"/>
-                        <a:ea typeface="Arial" charset="0"/>
-                        <a:cs typeface="Arial" charset="0"/>
-                      </a:endParaRPr>
-                    </a:p>
-                  </a:txBody>
-                  <a:tcPr marL="64008" marR="64008" marT="64008" marB="64008" anchor="ctr">
-                    <a:lnL w="12700" cap="flat" cmpd="sng" algn="ctr">
-                      <a:solidFill>
-                        <a:srgbClr val="D9D6CF"/>
-                      </a:solidFill>
-                      <a:prstDash val="solid"/>
-                      <a:round/>
-                      <a:headEnd type="none" w="med" len="med"/>
-                      <a:tailEnd type="none" w="med" len="med"/>
-                    </a:lnL>
-                    <a:lnR w="12700" cap="flat" cmpd="sng" algn="ctr">
-                      <a:solidFill>
-                        <a:srgbClr val="D9D6CF"/>
-                      </a:solidFill>
-                      <a:prstDash val="solid"/>
-                      <a:round/>
-                      <a:headEnd type="none" w="med" len="med"/>
-                      <a:tailEnd type="none" w="med" len="med"/>
-                    </a:lnR>
-                    <a:lnT w="12700" cap="flat" cmpd="sng" algn="ctr">
-                      <a:solidFill>
-                        <a:srgbClr val="D9D6CF"/>
-                      </a:solidFill>
-                      <a:prstDash val="solid"/>
-                      <a:round/>
-                      <a:headEnd type="none" w="med" len="med"/>
-                      <a:tailEnd type="none" w="med" len="med"/>
-                    </a:lnT>
-                    <a:lnB w="12700" cap="flat" cmpd="sng" algn="ctr">
-                      <a:solidFill>
-                        <a:srgbClr val="D9D6CF"/>
-                      </a:solidFill>
-                      <a:prstDash val="solid"/>
-                      <a:round/>
-                      <a:headEnd type="none" w="med" len="med"/>
-                      <a:tailEnd type="none" w="med" len="med"/>
-                    </a:lnB>
-                    <a:solidFill>
-                      <a:srgbClr val="FFFFFF"/>
-                    </a:solidFill>
-                  </a:tcPr>
-                </a:tc>
-                <a:tc>
-                  <a:txBody>
-                    <a:bodyPr/>
-                    <a:lstStyle/>
-                    <a:p>
-                      <a:pPr indent="0" marL="0">
-                        <a:buNone/>
-                      </a:pPr>
-                      <a:r>
-                        <a:rPr lang="en-US" sz="1600" dirty="0">
-                          <a:solidFill>
-                            <a:srgbClr val="22252B"/>
-                          </a:solidFill>
-                          <a:latin typeface="Arial" pitchFamily="34" charset="0"/>
-                          <a:ea typeface="Arial" pitchFamily="34" charset="-122"/>
-                          <a:cs typeface="Arial" pitchFamily="34" charset="-120"/>
-                        </a:rPr>
-                        <a:t>cell 2: stock QEMU 8.2.2 crashed (SIGSEGV in the editor’s JIT), reproduced; passed 12/12 after switching handler</a:t>
-                      </a:r>
-                      <a:endParaRPr lang="en-US" sz="1600" dirty="0">
-                        <a:latin typeface="Arial" charset="0"/>
-                        <a:ea typeface="Arial" charset="0"/>
-                        <a:cs typeface="Arial" charset="0"/>
-                      </a:endParaRPr>
-                    </a:p>
-                  </a:txBody>
-                  <a:tcPr marL="64008" marR="64008" marT="64008" marB="64008" anchor="ctr">
-                    <a:lnL w="12700" cap="flat" cmpd="sng" algn="ctr">
-                      <a:solidFill>
-                        <a:srgbClr val="D9D6CF"/>
-                      </a:solidFill>
-                      <a:prstDash val="solid"/>
-                      <a:round/>
-                      <a:headEnd type="none" w="med" len="med"/>
-                      <a:tailEnd type="none" w="med" len="med"/>
-                    </a:lnL>
-                    <a:lnR w="12700" cap="flat" cmpd="sng" algn="ctr">
-                      <a:solidFill>
-                        <a:srgbClr val="D9D6CF"/>
-                      </a:solidFill>
-                      <a:prstDash val="solid"/>
-                      <a:round/>
-                      <a:headEnd type="none" w="med" len="med"/>
-                      <a:tailEnd type="none" w="med" len="med"/>
-                    </a:lnR>
-                    <a:lnT w="12700" cap="flat" cmpd="sng" algn="ctr">
-                      <a:solidFill>
-                        <a:srgbClr val="D9D6CF"/>
-                      </a:solidFill>
-                      <a:prstDash val="solid"/>
-                      <a:round/>
-                      <a:headEnd type="none" w="med" len="med"/>
-                      <a:tailEnd type="none" w="med" len="med"/>
-                    </a:lnT>
-                    <a:lnB w="12700" cap="flat" cmpd="sng" algn="ctr">
-                      <a:solidFill>
-                        <a:srgbClr val="D9D6CF"/>
-                      </a:solidFill>
-                      <a:prstDash val="solid"/>
-                      <a:round/>
-                      <a:headEnd type="none" w="med" len="med"/>
-                      <a:tailEnd type="none" w="med" len="med"/>
-                    </a:lnB>
-                    <a:solidFill>
-                      <a:srgbClr val="FFFFFF"/>
-                    </a:solidFill>
-                  </a:tcPr>
-                </a:tc>
-              </a:tr>
-              <a:tr h="566928">
-                <a:tc>
-                  <a:txBody>
-                    <a:bodyPr/>
-                    <a:lstStyle/>
-                    <a:p>
-                      <a:pPr indent="0" marL="0">
-                        <a:buNone/>
-                      </a:pPr>
-                      <a:r>
-                        <a:rPr lang="en-US" sz="1600" b="1" dirty="0">
-                          <a:solidFill>
-                            <a:srgbClr val="5E5B55"/>
-                          </a:solidFill>
-                          <a:latin typeface="Arial" pitchFamily="34" charset="0"/>
-                          <a:ea typeface="Arial" pitchFamily="34" charset="-122"/>
-                          <a:cs typeface="Arial" pitchFamily="34" charset="-120"/>
-                        </a:rPr>
-                        <a:t>Windows on ARM</a:t>
-                      </a:r>
-                      <a:endParaRPr lang="en-US" sz="1600" dirty="0">
-                        <a:latin typeface="Arial" charset="0"/>
-                        <a:ea typeface="Arial" charset="0"/>
-                        <a:cs typeface="Arial" charset="0"/>
-                      </a:endParaRPr>
-                    </a:p>
-                  </a:txBody>
-                  <a:tcPr marL="64008" marR="64008" marT="64008" marB="64008" anchor="ctr">
-                    <a:lnL w="12700" cap="flat" cmpd="sng" algn="ctr">
-                      <a:solidFill>
-                        <a:srgbClr val="D9D6CF"/>
-                      </a:solidFill>
-                      <a:prstDash val="solid"/>
-                      <a:round/>
-                      <a:headEnd type="none" w="med" len="med"/>
-                      <a:tailEnd type="none" w="med" len="med"/>
-                    </a:lnL>
-                    <a:lnR w="12700" cap="flat" cmpd="sng" algn="ctr">
-                      <a:solidFill>
-                        <a:srgbClr val="D9D6CF"/>
-                      </a:solidFill>
-                      <a:prstDash val="solid"/>
-                      <a:round/>
-                      <a:headEnd type="none" w="med" len="med"/>
-                      <a:tailEnd type="none" w="med" len="med"/>
-                    </a:lnR>
-                    <a:lnT w="12700" cap="flat" cmpd="sng" algn="ctr">
-                      <a:solidFill>
-                        <a:srgbClr val="D9D6CF"/>
-                      </a:solidFill>
-                      <a:prstDash val="solid"/>
-                      <a:round/>
-                      <a:headEnd type="none" w="med" len="med"/>
-                      <a:tailEnd type="none" w="med" len="med"/>
-                    </a:lnT>
-                    <a:lnB w="12700" cap="flat" cmpd="sng" algn="ctr">
-                      <a:solidFill>
-                        <a:srgbClr val="D9D6CF"/>
-                      </a:solidFill>
-                      <a:prstDash val="solid"/>
-                      <a:round/>
-                      <a:headEnd type="none" w="med" len="med"/>
-                      <a:tailEnd type="none" w="med" len="med"/>
-                    </a:lnB>
-                    <a:solidFill>
-                      <a:srgbClr val="F5F4F0"/>
-                    </a:solidFill>
-                  </a:tcPr>
-                </a:tc>
-                <a:tc>
-                  <a:txBody>
-                    <a:bodyPr/>
-                    <a:lstStyle/>
-                    <a:p>
-                      <a:pPr indent="0" marL="0">
-                        <a:buNone/>
-                      </a:pPr>
-                      <a:r>
-                        <a:rPr lang="en-US" sz="1600" dirty="0">
-                          <a:solidFill>
-                            <a:srgbClr val="5E5B55"/>
-                          </a:solidFill>
-                          <a:latin typeface="Arial" pitchFamily="34" charset="0"/>
-                          <a:ea typeface="Arial" pitchFamily="34" charset="-122"/>
-                          <a:cs typeface="Arial" pitchFamily="34" charset="-120"/>
-                        </a:rPr>
-                        <a:t>expected like cell 4</a:t>
-                      </a:r>
-                      <a:endParaRPr lang="en-US" sz="1600" dirty="0">
-                        <a:latin typeface="Arial" charset="0"/>
-                        <a:ea typeface="Arial" charset="0"/>
-                        <a:cs typeface="Arial" charset="0"/>
-                      </a:endParaRPr>
-                    </a:p>
-                  </a:txBody>
-                  <a:tcPr marL="64008" marR="64008" marT="64008" marB="64008" anchor="ctr">
-                    <a:lnL w="12700" cap="flat" cmpd="sng" algn="ctr">
-                      <a:solidFill>
-                        <a:srgbClr val="D9D6CF"/>
-                      </a:solidFill>
-                      <a:prstDash val="solid"/>
-                      <a:round/>
-                      <a:headEnd type="none" w="med" len="med"/>
-                      <a:tailEnd type="none" w="med" len="med"/>
-                    </a:lnL>
-                    <a:lnR w="12700" cap="flat" cmpd="sng" algn="ctr">
-                      <a:solidFill>
-                        <a:srgbClr val="D9D6CF"/>
-                      </a:solidFill>
-                      <a:prstDash val="solid"/>
-                      <a:round/>
-                      <a:headEnd type="none" w="med" len="med"/>
-                      <a:tailEnd type="none" w="med" len="med"/>
-                    </a:lnR>
-                    <a:lnT w="12700" cap="flat" cmpd="sng" algn="ctr">
-                      <a:solidFill>
-                        <a:srgbClr val="D9D6CF"/>
-                      </a:solidFill>
-                      <a:prstDash val="solid"/>
-                      <a:round/>
-                      <a:headEnd type="none" w="med" len="med"/>
-                      <a:tailEnd type="none" w="med" len="med"/>
-                    </a:lnT>
-                    <a:lnB w="12700" cap="flat" cmpd="sng" algn="ctr">
-                      <a:solidFill>
-                        <a:srgbClr val="D9D6CF"/>
-                      </a:solidFill>
-                      <a:prstDash val="solid"/>
-                      <a:round/>
-                      <a:headEnd type="none" w="med" len="med"/>
-                      <a:tailEnd type="none" w="med" len="med"/>
-                    </a:lnB>
-                    <a:solidFill>
-                      <a:srgbClr val="F5F4F0"/>
-                    </a:solidFill>
-                  </a:tcPr>
-                </a:tc>
-                <a:tc>
-                  <a:txBody>
-                    <a:bodyPr/>
-                    <a:lstStyle/>
-                    <a:p>
-                      <a:pPr indent="0" marL="0">
-                        <a:buNone/>
-                      </a:pPr>
-                      <a:r>
-                        <a:rPr lang="en-US" sz="1600" dirty="0">
-                          <a:solidFill>
-                            <a:srgbClr val="5E5B55"/>
-                          </a:solidFill>
-                          <a:latin typeface="Arial" pitchFamily="34" charset="0"/>
-                          <a:ea typeface="Arial" pitchFamily="34" charset="-122"/>
-                          <a:cs typeface="Arial" pitchFamily="34" charset="-120"/>
-                        </a:rPr>
-                        <a:t>expected broken</a:t>
-                      </a:r>
-                      <a:endParaRPr lang="en-US" sz="1600" dirty="0">
-                        <a:latin typeface="Arial" charset="0"/>
-                        <a:ea typeface="Arial" charset="0"/>
-                        <a:cs typeface="Arial" charset="0"/>
-                      </a:endParaRPr>
-                    </a:p>
-                  </a:txBody>
-                  <a:tcPr marL="64008" marR="64008" marT="64008" marB="64008" anchor="ctr">
-                    <a:lnL w="12700" cap="flat" cmpd="sng" algn="ctr">
-                      <a:solidFill>
-                        <a:srgbClr val="D9D6CF"/>
-                      </a:solidFill>
-                      <a:prstDash val="solid"/>
-                      <a:round/>
-                      <a:headEnd type="none" w="med" len="med"/>
-                      <a:tailEnd type="none" w="med" len="med"/>
-                    </a:lnL>
-                    <a:lnR w="12700" cap="flat" cmpd="sng" algn="ctr">
-                      <a:solidFill>
-                        <a:srgbClr val="D9D6CF"/>
-                      </a:solidFill>
-                      <a:prstDash val="solid"/>
-                      <a:round/>
-                      <a:headEnd type="none" w="med" len="med"/>
-                      <a:tailEnd type="none" w="med" len="med"/>
-                    </a:lnR>
-                    <a:lnT w="12700" cap="flat" cmpd="sng" algn="ctr">
-                      <a:solidFill>
-                        <a:srgbClr val="D9D6CF"/>
-                      </a:solidFill>
-                      <a:prstDash val="solid"/>
-                      <a:round/>
-                      <a:headEnd type="none" w="med" len="med"/>
-                      <a:tailEnd type="none" w="med" len="med"/>
-                    </a:lnT>
-                    <a:lnB w="12700" cap="flat" cmpd="sng" algn="ctr">
-                      <a:solidFill>
-                        <a:srgbClr val="D9D6CF"/>
-                      </a:solidFill>
-                      <a:prstDash val="solid"/>
-                      <a:round/>
-                      <a:headEnd type="none" w="med" len="med"/>
-                      <a:tailEnd type="none" w="med" len="med"/>
-                    </a:lnB>
-                    <a:solidFill>
-                      <a:srgbClr val="F5F4F0"/>
-                    </a:solidFill>
-                  </a:tcPr>
-                </a:tc>
-                <a:tc>
-                  <a:txBody>
-                    <a:bodyPr/>
-                    <a:lstStyle/>
-                    <a:p>
-                      <a:pPr indent="0" marL="0">
-                        <a:buNone/>
-                      </a:pPr>
-                      <a:r>
-                        <a:rPr lang="en-US" sz="1600" dirty="0">
-                          <a:solidFill>
-                            <a:srgbClr val="5E5B55"/>
-                          </a:solidFill>
-                          <a:latin typeface="Arial" pitchFamily="34" charset="0"/>
-                          <a:ea typeface="Arial" pitchFamily="34" charset="-122"/>
-                          <a:cs typeface="Arial" pitchFamily="34" charset="-120"/>
-                        </a:rPr>
-                        <a:t>untestable in any cloud: no nested virtualization on ARM VMs</a:t>
-                      </a:r>
-                      <a:endParaRPr lang="en-US" sz="1600" dirty="0">
-                        <a:latin typeface="Arial" charset="0"/>
-                        <a:ea typeface="Arial" charset="0"/>
-                        <a:cs typeface="Arial" charset="0"/>
-                      </a:endParaRPr>
-                    </a:p>
-                  </a:txBody>
-                  <a:tcPr marL="64008" marR="64008" marT="64008" marB="64008" anchor="ctr">
-                    <a:lnL w="12700" cap="flat" cmpd="sng" algn="ctr">
-                      <a:solidFill>
-                        <a:srgbClr val="D9D6CF"/>
-                      </a:solidFill>
-                      <a:prstDash val="solid"/>
-                      <a:round/>
-                      <a:headEnd type="none" w="med" len="med"/>
-                      <a:tailEnd type="none" w="med" len="med"/>
-                    </a:lnL>
-                    <a:lnR w="12700" cap="flat" cmpd="sng" algn="ctr">
-                      <a:solidFill>
-                        <a:srgbClr val="D9D6CF"/>
-                      </a:solidFill>
-                      <a:prstDash val="solid"/>
-                      <a:round/>
-                      <a:headEnd type="none" w="med" len="med"/>
-                      <a:tailEnd type="none" w="med" len="med"/>
-                    </a:lnR>
-                    <a:lnT w="12700" cap="flat" cmpd="sng" algn="ctr">
-                      <a:solidFill>
-                        <a:srgbClr val="D9D6CF"/>
-                      </a:solidFill>
-                      <a:prstDash val="solid"/>
-                      <a:round/>
-                      <a:headEnd type="none" w="med" len="med"/>
-                      <a:tailEnd type="none" w="med" len="med"/>
-                    </a:lnT>
-                    <a:lnB w="12700" cap="flat" cmpd="sng" algn="ctr">
-                      <a:solidFill>
-                        <a:srgbClr val="D9D6CF"/>
-                      </a:solidFill>
-                      <a:prstDash val="solid"/>
-                      <a:round/>
-                      <a:headEnd type="none" w="med" len="med"/>
-                      <a:tailEnd type="none" w="med" len="med"/>
-                    </a:lnB>
-                    <a:solidFill>
-                      <a:srgbClr val="F5F4F0"/>
-                    </a:solidFill>
-                  </a:tcPr>
-                </a:tc>
-              </a:tr>
-              <a:tr h="566928">
-                <a:tc>
-                  <a:txBody>
-                    <a:bodyPr/>
-                    <a:lstStyle/>
-                    <a:p>
-                      <a:pPr indent="0" marL="0">
-                        <a:buNone/>
-                      </a:pPr>
-                      <a:r>
-                        <a:rPr lang="en-US" sz="1600" b="1" dirty="0">
-                          <a:solidFill>
-                            <a:srgbClr val="5E5B55"/>
-                          </a:solidFill>
-                          <a:latin typeface="Arial" pitchFamily="34" charset="0"/>
-                          <a:ea typeface="Arial" pitchFamily="34" charset="-122"/>
-                          <a:cs typeface="Arial" pitchFamily="34" charset="-120"/>
-                        </a:rPr>
-                        <a:t>Intel Mac</a:t>
-                      </a:r>
-                      <a:endParaRPr lang="en-US" sz="1600" dirty="0">
-                        <a:latin typeface="Arial" charset="0"/>
-                        <a:ea typeface="Arial" charset="0"/>
-                        <a:cs typeface="Arial" charset="0"/>
-                      </a:endParaRPr>
-                    </a:p>
-                  </a:txBody>
-                  <a:tcPr marL="64008" marR="64008" marT="64008" marB="64008" anchor="ctr">
-                    <a:lnL w="12700" cap="flat" cmpd="sng" algn="ctr">
-                      <a:solidFill>
-                        <a:srgbClr val="D9D6CF"/>
-                      </a:solidFill>
-                      <a:prstDash val="solid"/>
-                      <a:round/>
-                      <a:headEnd type="none" w="med" len="med"/>
-                      <a:tailEnd type="none" w="med" len="med"/>
-                    </a:lnL>
-                    <a:lnR w="12700" cap="flat" cmpd="sng" algn="ctr">
-                      <a:solidFill>
-                        <a:srgbClr val="D9D6CF"/>
-                      </a:solidFill>
-                      <a:prstDash val="solid"/>
-                      <a:round/>
-                      <a:headEnd type="none" w="med" len="med"/>
-                      <a:tailEnd type="none" w="med" len="med"/>
-                    </a:lnR>
-                    <a:lnT w="12700" cap="flat" cmpd="sng" algn="ctr">
-                      <a:solidFill>
-                        <a:srgbClr val="D9D6CF"/>
-                      </a:solidFill>
-                      <a:prstDash val="solid"/>
-                      <a:round/>
-                      <a:headEnd type="none" w="med" len="med"/>
-                      <a:tailEnd type="none" w="med" len="med"/>
-                    </a:lnT>
-                    <a:lnB w="12700" cap="flat" cmpd="sng" algn="ctr">
-                      <a:solidFill>
-                        <a:srgbClr val="D9D6CF"/>
-                      </a:solidFill>
-                      <a:prstDash val="solid"/>
-                      <a:round/>
-                      <a:headEnd type="none" w="med" len="med"/>
-                      <a:tailEnd type="none" w="med" len="med"/>
-                    </a:lnB>
-                    <a:solidFill>
-                      <a:srgbClr val="FFFFFF"/>
-                    </a:solidFill>
-                  </a:tcPr>
-                </a:tc>
-                <a:tc>
-                  <a:txBody>
-                    <a:bodyPr/>
-                    <a:lstStyle/>
-                    <a:p>
-                      <a:pPr indent="0" marL="0">
-                        <a:buNone/>
-                      </a:pPr>
-                      <a:r>
-                        <a:rPr lang="en-US" sz="1600" dirty="0">
-                          <a:solidFill>
-                            <a:srgbClr val="5E5B55"/>
-                          </a:solidFill>
-                          <a:latin typeface="Arial" pitchFamily="34" charset="0"/>
-                          <a:ea typeface="Arial" pitchFamily="34" charset="-122"/>
-                          <a:cs typeface="Arial" pitchFamily="34" charset="-120"/>
-                        </a:rPr>
-                        <a:t>expected native</a:t>
-                      </a:r>
-                      <a:endParaRPr lang="en-US" sz="1600" dirty="0">
-                        <a:latin typeface="Arial" charset="0"/>
-                        <a:ea typeface="Arial" charset="0"/>
-                        <a:cs typeface="Arial" charset="0"/>
-                      </a:endParaRPr>
-                    </a:p>
-                  </a:txBody>
-                  <a:tcPr marL="64008" marR="64008" marT="64008" marB="64008" anchor="ctr">
-                    <a:lnL w="12700" cap="flat" cmpd="sng" algn="ctr">
-                      <a:solidFill>
-                        <a:srgbClr val="D9D6CF"/>
-                      </a:solidFill>
-                      <a:prstDash val="solid"/>
-                      <a:round/>
-                      <a:headEnd type="none" w="med" len="med"/>
-                      <a:tailEnd type="none" w="med" len="med"/>
-                    </a:lnL>
-                    <a:lnR w="12700" cap="flat" cmpd="sng" algn="ctr">
-                      <a:solidFill>
-                        <a:srgbClr val="D9D6CF"/>
-                      </a:solidFill>
-                      <a:prstDash val="solid"/>
-                      <a:round/>
-                      <a:headEnd type="none" w="med" len="med"/>
-                      <a:tailEnd type="none" w="med" len="med"/>
-                    </a:lnR>
-                    <a:lnT w="12700" cap="flat" cmpd="sng" algn="ctr">
-                      <a:solidFill>
-                        <a:srgbClr val="D9D6CF"/>
-                      </a:solidFill>
-                      <a:prstDash val="solid"/>
-                      <a:round/>
-                      <a:headEnd type="none" w="med" len="med"/>
-                      <a:tailEnd type="none" w="med" len="med"/>
-                    </a:lnT>
-                    <a:lnB w="12700" cap="flat" cmpd="sng" algn="ctr">
-                      <a:solidFill>
-                        <a:srgbClr val="D9D6CF"/>
-                      </a:solidFill>
-                      <a:prstDash val="solid"/>
-                      <a:round/>
-                      <a:headEnd type="none" w="med" len="med"/>
-                      <a:tailEnd type="none" w="med" len="med"/>
-                    </a:lnB>
-                    <a:solidFill>
-                      <a:srgbClr val="FFFFFF"/>
-                    </a:solidFill>
-                  </a:tcPr>
-                </a:tc>
-                <a:tc>
-                  <a:txBody>
-                    <a:bodyPr/>
-                    <a:lstStyle/>
-                    <a:p>
-                      <a:pPr indent="0" marL="0">
-                        <a:buNone/>
-                      </a:pPr>
-                      <a:r>
-                        <a:rPr lang="en-US" sz="1600" dirty="0">
-                          <a:solidFill>
-                            <a:srgbClr val="5E5B55"/>
-                          </a:solidFill>
-                          <a:latin typeface="Arial" pitchFamily="34" charset="0"/>
-                          <a:ea typeface="Arial" pitchFamily="34" charset="-122"/>
-                          <a:cs typeface="Arial" pitchFamily="34" charset="-120"/>
-                        </a:rPr>
-                        <a:t>expected works</a:t>
-                      </a:r>
-                      <a:endParaRPr lang="en-US" sz="1600" dirty="0">
-                        <a:latin typeface="Arial" charset="0"/>
-                        <a:ea typeface="Arial" charset="0"/>
-                        <a:cs typeface="Arial" charset="0"/>
-                      </a:endParaRPr>
-                    </a:p>
-                  </a:txBody>
-                  <a:tcPr marL="64008" marR="64008" marT="64008" marB="64008" anchor="ctr">
-                    <a:lnL w="12700" cap="flat" cmpd="sng" algn="ctr">
-                      <a:solidFill>
-                        <a:srgbClr val="D9D6CF"/>
-                      </a:solidFill>
-                      <a:prstDash val="solid"/>
-                      <a:round/>
-                      <a:headEnd type="none" w="med" len="med"/>
-                      <a:tailEnd type="none" w="med" len="med"/>
-                    </a:lnL>
-                    <a:lnR w="12700" cap="flat" cmpd="sng" algn="ctr">
-                      <a:solidFill>
-                        <a:srgbClr val="D9D6CF"/>
-                      </a:solidFill>
-                      <a:prstDash val="solid"/>
-                      <a:round/>
-                      <a:headEnd type="none" w="med" len="med"/>
-                      <a:tailEnd type="none" w="med" len="med"/>
-                    </a:lnR>
-                    <a:lnT w="12700" cap="flat" cmpd="sng" algn="ctr">
-                      <a:solidFill>
-                        <a:srgbClr val="D9D6CF"/>
-                      </a:solidFill>
-                      <a:prstDash val="solid"/>
-                      <a:round/>
-                      <a:headEnd type="none" w="med" len="med"/>
-                      <a:tailEnd type="none" w="med" len="med"/>
-                    </a:lnT>
-                    <a:lnB w="12700" cap="flat" cmpd="sng" algn="ctr">
-                      <a:solidFill>
-                        <a:srgbClr val="D9D6CF"/>
-                      </a:solidFill>
-                      <a:prstDash val="solid"/>
-                      <a:round/>
-                      <a:headEnd type="none" w="med" len="med"/>
-                      <a:tailEnd type="none" w="med" len="med"/>
-                    </a:lnB>
-                    <a:solidFill>
-                      <a:srgbClr val="FFFFFF"/>
-                    </a:solidFill>
-                  </a:tcPr>
-                </a:tc>
-                <a:tc>
-                  <a:txBody>
-                    <a:bodyPr/>
-                    <a:lstStyle/>
-                    <a:p>
-                      <a:pPr indent="0" marL="0">
-                        <a:buNone/>
-                      </a:pPr>
-                      <a:r>
-                        <a:rPr lang="en-US" sz="1600" dirty="0">
-                          <a:solidFill>
-                            <a:srgbClr val="5E5B55"/>
-                          </a:solidFill>
-                          <a:latin typeface="Arial" pitchFamily="34" charset="0"/>
-                          <a:ea typeface="Arial" pitchFamily="34" charset="-122"/>
-                          <a:cs typeface="Arial" pitchFamily="34" charset="-120"/>
-                        </a:rPr>
-                        <a:t>untested; no hardware</a:t>
-                      </a:r>
-                      <a:endParaRPr lang="en-US" sz="1600" dirty="0">
-                        <a:latin typeface="Arial" charset="0"/>
-                        <a:ea typeface="Arial" charset="0"/>
-                        <a:cs typeface="Arial" charset="0"/>
-                      </a:endParaRPr>
-                    </a:p>
-                  </a:txBody>
-                  <a:tcPr marL="64008" marR="64008" marT="64008" marB="64008" anchor="ctr">
-                    <a:lnL w="12700" cap="flat" cmpd="sng" algn="ctr">
-                      <a:solidFill>
-                        <a:srgbClr val="D9D6CF"/>
-                      </a:solidFill>
-                      <a:prstDash val="solid"/>
-                      <a:round/>
-                      <a:headEnd type="none" w="med" len="med"/>
-                      <a:tailEnd type="none" w="med" len="med"/>
-                    </a:lnL>
-                    <a:lnR w="12700" cap="flat" cmpd="sng" algn="ctr">
-                      <a:solidFill>
-                        <a:srgbClr val="D9D6CF"/>
-                      </a:solidFill>
-                      <a:prstDash val="solid"/>
-                      <a:round/>
-                      <a:headEnd type="none" w="med" len="med"/>
-                      <a:tailEnd type="none" w="med" len="med"/>
-                    </a:lnR>
-                    <a:lnT w="12700" cap="flat" cmpd="sng" algn="ctr">
-                      <a:solidFill>
-                        <a:srgbClr val="D9D6CF"/>
-                      </a:solidFill>
-                      <a:prstDash val="solid"/>
-                      <a:round/>
-                      <a:headEnd type="none" w="med" len="med"/>
-                      <a:tailEnd type="none" w="med" len="med"/>
-                    </a:lnT>
-                    <a:lnB w="12700" cap="flat" cmpd="sng" algn="ctr">
-                      <a:solidFill>
-                        <a:srgbClr val="D9D6CF"/>
-                      </a:solidFill>
-                      <a:prstDash val="solid"/>
-                      <a:round/>
-                      <a:headEnd type="none" w="med" len="med"/>
-                      <a:tailEnd type="none" w="med" len="med"/>
-                    </a:lnB>
-                    <a:solidFill>
-                      <a:srgbClr val="FFFFFF"/>
+                      <a:srgbClr val="FBEAEA"/>
                     </a:solidFill>
                   </a:tcPr>
                 </a:tc>
@@ -6082,13 +3160,271 @@
       </p:graphicFrame>
       <p:sp>
         <p:nvSpPr>
-          <p:cNvPr id="55" name="Text 49"/>
+          <p:cNvPr id="23" name="Text 20"/>
           <p:cNvSpPr txBox="1"/>
           <p:nvPr/>
         </p:nvSpPr>
         <p:spPr>
           <a:xfrm>
-            <a:off x="29443680" y="21918168"/>
+            <a:off x="14813280" y="5394960"/>
+            <a:ext cx="14081760" cy="822960"/>
+          </a:xfrm>
+          <a:prstGeom prst="rect">
+            <a:avLst/>
+          </a:prstGeom>
+          <a:noFill/>
+          <a:ln/>
+        </p:spPr>
+        <p:txBody>
+          <a:bodyPr wrap="square" lIns="0" tIns="0" rIns="0" bIns="0" rtlCol="0" anchor="ctr"/>
+          <a:lstStyle/>
+          <a:p>
+            <a:pPr indent="0" marL="0">
+              <a:buNone/>
+            </a:pPr>
+            <a:r>
+              <a:rPr lang="en-US" sz="4000" b="1" dirty="0">
+                <a:solidFill>
+                  <a:srgbClr val="B10202"/>
+                </a:solidFill>
+                <a:latin typeface="Arial" pitchFamily="34" charset="0"/>
+                <a:ea typeface="Arial" pitchFamily="34" charset="-122"/>
+                <a:cs typeface="Arial" pitchFamily="34" charset="-120"/>
+              </a:rPr>
+              <a:t>What we built</a:t>
+            </a:r>
+            <a:endParaRPr lang="en-US" sz="4000" dirty="0"/>
+          </a:p>
+        </p:txBody>
+      </p:sp>
+      <p:sp>
+        <p:nvSpPr>
+          <p:cNvPr id="24" name="Text 21"/>
+          <p:cNvSpPr txBox="1"/>
+          <p:nvPr/>
+        </p:nvSpPr>
+        <p:spPr>
+          <a:xfrm>
+            <a:off x="14813280" y="6355080"/>
+            <a:ext cx="14081760" cy="2331720"/>
+          </a:xfrm>
+          <a:prstGeom prst="rect">
+            <a:avLst/>
+          </a:prstGeom>
+          <a:noFill/>
+          <a:ln/>
+        </p:spPr>
+        <p:txBody>
+          <a:bodyPr wrap="square" lIns="0" tIns="0" rIns="0" bIns="0" rtlCol="0" anchor="t"/>
+          <a:lstStyle/>
+          <a:p>
+            <a:pPr indent="0" marL="0">
+              <a:lnSpc>
+                <a:spcPct val="104000"/>
+              </a:lnSpc>
+              <a:spcAft>
+                <a:spcPts val="600"/>
+              </a:spcAft>
+              <a:buNone/>
+            </a:pPr>
+            <a:r>
+              <a:rPr lang="en-US" sz="2400" dirty="0">
+                <a:solidFill>
+                  <a:srgbClr val="22252B"/>
+                </a:solidFill>
+                <a:latin typeface="Arial" pitchFamily="34" charset="0"/>
+                <a:ea typeface="Arial" pitchFamily="34" charset="-122"/>
+                <a:cs typeface="Arial" pitchFamily="34" charset="-120"/>
+              </a:rPr>
+              <a:t>Two Docker images, one per course, each packing VS Code (served to the browser) with the exact tools the course expects: g++ for CS 135; yasm, nasm, ld, and gdb for CS 218. The instructor pins every version. The student installs Docker Desktop once, runs one command, and opens a browser tab. Every AI feature in the editor is switched off, per course policy.</a:t>
+            </a:r>
+            <a:endParaRPr lang="en-US" sz="2400" dirty="0"/>
+          </a:p>
+        </p:txBody>
+      </p:sp>
+      <p:sp>
+        <p:nvSpPr>
+          <p:cNvPr id="25" name="Shape 22"/>
+          <p:cNvSpPr/>
+          <p:nvPr/>
+        </p:nvSpPr>
+        <p:spPr>
+          <a:xfrm>
+            <a:off x="14813280" y="8686800"/>
+            <a:ext cx="14081760" cy="1051560"/>
+          </a:xfrm>
+          <a:prstGeom prst="roundRect">
+            <a:avLst>
+              <a:gd name="adj" fmla="val 13043"/>
+            </a:avLst>
+          </a:prstGeom>
+          <a:solidFill>
+            <a:srgbClr val="22252B"/>
+          </a:solidFill>
+          <a:ln w="12700">
+            <a:solidFill>
+              <a:srgbClr val="22252B"/>
+            </a:solidFill>
+            <a:prstDash val="solid"/>
+          </a:ln>
+        </p:spPr>
+      </p:sp>
+      <p:sp>
+        <p:nvSpPr>
+          <p:cNvPr id="26" name="Text 23"/>
+          <p:cNvSpPr txBox="1"/>
+          <p:nvPr/>
+        </p:nvSpPr>
+        <p:spPr>
+          <a:xfrm>
+            <a:off x="15087600" y="8686800"/>
+            <a:ext cx="13533120" cy="1051560"/>
+          </a:xfrm>
+          <a:prstGeom prst="rect">
+            <a:avLst/>
+          </a:prstGeom>
+          <a:noFill/>
+          <a:ln/>
+        </p:spPr>
+        <p:txBody>
+          <a:bodyPr wrap="square" lIns="0" tIns="0" rIns="0" bIns="0" rtlCol="0" anchor="ctr"/>
+          <a:lstStyle/>
+          <a:p>
+            <a:pPr indent="0" marL="0">
+              <a:buNone/>
+            </a:pPr>
+            <a:r>
+              <a:rPr lang="en-US" sz="1700" dirty="0">
+                <a:solidFill>
+                  <a:srgbClr val="FFFFFF"/>
+                </a:solidFill>
+                <a:latin typeface="Courier New" pitchFamily="34" charset="0"/>
+                <a:ea typeface="Courier New" pitchFamily="34" charset="-122"/>
+                <a:cs typeface="Courier New" pitchFamily="34" charset="-120"/>
+              </a:rPr>
+              <a:t>docker run -p 127.0.0.1:8218:8080 -v ~/UNLV/x86-workspace:/home/coder/workspace seancnc/unlv-x86-ide</a:t>
+            </a:r>
+            <a:endParaRPr lang="en-US" sz="1700" dirty="0"/>
+          </a:p>
+        </p:txBody>
+      </p:sp>
+      <p:pic>
+        <p:nvPicPr>
+          <p:cNvPr id="27" name="Image 0" descr="/private/tmp/claude-501/-Users-seancuenco-Documents-UNLVDockerIDEs/cb525298-55fd-43a6-807a-d35debab5bc5/scratchpad/fig1-architecture.png">    </p:cNvPr>
+          <p:cNvPicPr>
+            <a:picLocks noChangeAspect="1"/>
+          </p:cNvPicPr>
+          <p:nvPr/>
+        </p:nvPicPr>
+        <p:blipFill>
+          <a:blip r:embed="rId1"/>
+          <a:stretch>
+            <a:fillRect/>
+          </a:stretch>
+        </p:blipFill>
+        <p:spPr>
+          <a:xfrm>
+            <a:off x="17465040" y="9966960"/>
+            <a:ext cx="8778240" cy="8350033"/>
+          </a:xfrm>
+          <a:prstGeom prst="rect">
+            <a:avLst/>
+          </a:prstGeom>
+        </p:spPr>
+      </p:pic>
+      <p:sp>
+        <p:nvSpPr>
+          <p:cNvPr id="28" name="Text 24"/>
+          <p:cNvSpPr txBox="1"/>
+          <p:nvPr/>
+        </p:nvSpPr>
+        <p:spPr>
+          <a:xfrm>
+            <a:off x="14813280" y="18454153"/>
+            <a:ext cx="14081760" cy="731520"/>
+          </a:xfrm>
+          <a:prstGeom prst="rect">
+            <a:avLst/>
+          </a:prstGeom>
+          <a:noFill/>
+          <a:ln/>
+        </p:spPr>
+        <p:txBody>
+          <a:bodyPr wrap="square" lIns="0" tIns="0" rIns="0" bIns="0" rtlCol="0" anchor="t"/>
+          <a:lstStyle/>
+          <a:p>
+            <a:pPr indent="0" marL="0">
+              <a:lnSpc>
+                <a:spcPct val="104000"/>
+              </a:lnSpc>
+              <a:spcAft>
+                <a:spcPts val="600"/>
+              </a:spcAft>
+              <a:buNone/>
+            </a:pPr>
+            <a:r>
+              <a:rPr lang="en-US" sz="2000" dirty="0">
+                <a:solidFill>
+                  <a:srgbClr val="5E5B55"/>
+                </a:solidFill>
+                <a:latin typeface="Arial" pitchFamily="34" charset="0"/>
+                <a:ea typeface="Arial" pitchFamily="34" charset="-122"/>
+                <a:cs typeface="Arial" pitchFamily="34" charset="-120"/>
+              </a:rPr>
+              <a:t>Figure 1. Everything runs on the student’s machine. Coursework lives in an ordinary folder that survives deleting or updating the container.</a:t>
+            </a:r>
+            <a:endParaRPr lang="en-US" sz="2000" dirty="0"/>
+          </a:p>
+        </p:txBody>
+      </p:sp>
+      <p:sp>
+        <p:nvSpPr>
+          <p:cNvPr id="29" name="Text 25"/>
+          <p:cNvSpPr txBox="1"/>
+          <p:nvPr/>
+        </p:nvSpPr>
+        <p:spPr>
+          <a:xfrm>
+            <a:off x="14813280" y="19322833"/>
+            <a:ext cx="14081760" cy="822960"/>
+          </a:xfrm>
+          <a:prstGeom prst="rect">
+            <a:avLst/>
+          </a:prstGeom>
+          <a:noFill/>
+          <a:ln/>
+        </p:spPr>
+        <p:txBody>
+          <a:bodyPr wrap="square" lIns="0" tIns="0" rIns="0" bIns="0" rtlCol="0" anchor="ctr"/>
+          <a:lstStyle/>
+          <a:p>
+            <a:pPr indent="0" marL="0">
+              <a:buNone/>
+            </a:pPr>
+            <a:r>
+              <a:rPr lang="en-US" sz="4000" b="1" dirty="0">
+                <a:solidFill>
+                  <a:srgbClr val="B10202"/>
+                </a:solidFill>
+                <a:latin typeface="Arial" pitchFamily="34" charset="0"/>
+                <a:ea typeface="Arial" pitchFamily="34" charset="-122"/>
+                <a:cs typeface="Arial" pitchFamily="34" charset="-120"/>
+              </a:rPr>
+              <a:t>How we tested it: same exam, four kinds of computer</a:t>
+            </a:r>
+            <a:endParaRPr lang="en-US" sz="4000" dirty="0"/>
+          </a:p>
+        </p:txBody>
+      </p:sp>
+      <p:sp>
+        <p:nvSpPr>
+          <p:cNvPr id="30" name="Text 26"/>
+          <p:cNvSpPr txBox="1"/>
+          <p:nvPr/>
+        </p:nvSpPr>
+        <p:spPr>
+          <a:xfrm>
+            <a:off x="14813280" y="20282953"/>
             <a:ext cx="14081760" cy="2286000"/>
           </a:xfrm>
           <a:prstGeom prst="rect">
@@ -6103,8 +3439,1536 @@
           <a:p>
             <a:pPr indent="0" marL="0">
               <a:lnSpc>
-                <a:spcPct val="102000"/>
+                <a:spcPct val="104000"/>
               </a:lnSpc>
+              <a:spcAft>
+                <a:spcPts val="600"/>
+              </a:spcAft>
+              <a:buNone/>
+            </a:pPr>
+            <a:r>
+              <a:rPr lang="en-US" sz="2400" dirty="0">
+                <a:solidFill>
+                  <a:srgbClr val="22252B"/>
+                </a:solidFill>
+                <a:latin typeface="Arial" pitchFamily="34" charset="0"/>
+                <a:ea typeface="Arial" pitchFamily="34" charset="-122"/>
+                <a:cs typeface="Arial" pitchFamily="34" charset="-120"/>
+              </a:rPr>
+              <a:t>We cannot borrow one of every laptop students own, so we rented them: for a few dollars total, AWS and Azure supplied a fresh Intel Linux machine, an ARM Linux machine, and a Windows 11 machine, and a base-model M1 MacBook Pro stood in for Apple Silicon. On each, one published script performed a student’s first day (download, open the editor, write, assemble, run, debug) and then built and ran four real CS 218 assignments, writing down everything it observed.</a:t>
+            </a:r>
+            <a:endParaRPr lang="en-US" sz="2400" dirty="0"/>
+          </a:p>
+        </p:txBody>
+      </p:sp>
+      <p:sp>
+        <p:nvSpPr>
+          <p:cNvPr id="31" name="Shape 27"/>
+          <p:cNvSpPr/>
+          <p:nvPr/>
+        </p:nvSpPr>
+        <p:spPr>
+          <a:xfrm>
+            <a:off x="14813280" y="22568953"/>
+            <a:ext cx="3314700" cy="3017520"/>
+          </a:xfrm>
+          <a:prstGeom prst="roundRect">
+            <a:avLst>
+              <a:gd name="adj" fmla="val 4545"/>
+            </a:avLst>
+          </a:prstGeom>
+          <a:solidFill>
+            <a:srgbClr val="F5F4F0"/>
+          </a:solidFill>
+          <a:ln w="12700">
+            <a:solidFill>
+              <a:srgbClr val="F5F4F0"/>
+            </a:solidFill>
+            <a:prstDash val="solid"/>
+          </a:ln>
+        </p:spPr>
+      </p:sp>
+      <p:sp>
+        <p:nvSpPr>
+          <p:cNvPr id="32" name="Text 28"/>
+          <p:cNvSpPr txBox="1"/>
+          <p:nvPr/>
+        </p:nvSpPr>
+        <p:spPr>
+          <a:xfrm>
+            <a:off x="14996160" y="22706113"/>
+            <a:ext cx="2948940" cy="640080"/>
+          </a:xfrm>
+          <a:prstGeom prst="rect">
+            <a:avLst/>
+          </a:prstGeom>
+          <a:noFill/>
+          <a:ln/>
+        </p:spPr>
+        <p:txBody>
+          <a:bodyPr wrap="square" lIns="0" tIns="0" rIns="0" bIns="0" rtlCol="0" anchor="ctr"/>
+          <a:lstStyle/>
+          <a:p>
+            <a:pPr indent="0" marL="0">
+              <a:buNone/>
+            </a:pPr>
+            <a:r>
+              <a:rPr lang="en-US" sz="2100" b="1" dirty="0">
+                <a:solidFill>
+                  <a:srgbClr val="22252B"/>
+                </a:solidFill>
+                <a:latin typeface="Arial" pitchFamily="34" charset="0"/>
+                <a:ea typeface="Arial" pitchFamily="34" charset="-122"/>
+                <a:cs typeface="Arial" pitchFamily="34" charset="-120"/>
+              </a:rPr>
+              <a:t>Windows 11 PC</a:t>
+            </a:r>
+            <a:endParaRPr lang="en-US" sz="2100" dirty="0"/>
+          </a:p>
+        </p:txBody>
+      </p:sp>
+      <p:sp>
+        <p:nvSpPr>
+          <p:cNvPr id="33" name="Text 29"/>
+          <p:cNvSpPr txBox="1"/>
+          <p:nvPr/>
+        </p:nvSpPr>
+        <p:spPr>
+          <a:xfrm>
+            <a:off x="14996160" y="23300473"/>
+            <a:ext cx="2948940" cy="457200"/>
+          </a:xfrm>
+          <a:prstGeom prst="rect">
+            <a:avLst/>
+          </a:prstGeom>
+          <a:noFill/>
+          <a:ln/>
+        </p:spPr>
+        <p:txBody>
+          <a:bodyPr wrap="square" lIns="0" tIns="0" rIns="0" bIns="0" rtlCol="0" anchor="ctr"/>
+          <a:lstStyle/>
+          <a:p>
+            <a:pPr indent="0" marL="0">
+              <a:buNone/>
+            </a:pPr>
+            <a:r>
+              <a:rPr lang="en-US" sz="1600" dirty="0">
+                <a:solidFill>
+                  <a:srgbClr val="5E5B55"/>
+                </a:solidFill>
+                <a:latin typeface="Arial" pitchFamily="34" charset="0"/>
+                <a:ea typeface="Arial" pitchFamily="34" charset="-122"/>
+                <a:cs typeface="Arial" pitchFamily="34" charset="-120"/>
+              </a:rPr>
+              <a:t>Intel / AMD</a:t>
+            </a:r>
+            <a:endParaRPr lang="en-US" sz="1600" dirty="0"/>
+          </a:p>
+        </p:txBody>
+      </p:sp>
+      <p:sp>
+        <p:nvSpPr>
+          <p:cNvPr id="34" name="Text 30"/>
+          <p:cNvSpPr txBox="1"/>
+          <p:nvPr/>
+        </p:nvSpPr>
+        <p:spPr>
+          <a:xfrm>
+            <a:off x="14996160" y="23894833"/>
+            <a:ext cx="2948940" cy="685800"/>
+          </a:xfrm>
+          <a:prstGeom prst="rect">
+            <a:avLst/>
+          </a:prstGeom>
+          <a:noFill/>
+          <a:ln/>
+        </p:spPr>
+        <p:txBody>
+          <a:bodyPr wrap="square" lIns="0" tIns="0" rIns="0" bIns="0" rtlCol="0" anchor="ctr"/>
+          <a:lstStyle/>
+          <a:p>
+            <a:pPr indent="0" marL="0">
+              <a:buNone/>
+            </a:pPr>
+            <a:r>
+              <a:rPr lang="en-US" sz="1900" b="1" dirty="0">
+                <a:solidFill>
+                  <a:srgbClr val="1F5FB0"/>
+                </a:solidFill>
+                <a:latin typeface="Arial" pitchFamily="34" charset="0"/>
+                <a:ea typeface="Arial" pitchFamily="34" charset="-122"/>
+                <a:cs typeface="Arial" pitchFamily="34" charset="-120"/>
+              </a:rPr>
+              <a:t>✓ all assignments</a:t>
+            </a:r>
+            <a:endParaRPr lang="en-US" sz="1900" dirty="0"/>
+          </a:p>
+        </p:txBody>
+      </p:sp>
+      <p:sp>
+        <p:nvSpPr>
+          <p:cNvPr id="35" name="Text 31"/>
+          <p:cNvSpPr txBox="1"/>
+          <p:nvPr/>
+        </p:nvSpPr>
+        <p:spPr>
+          <a:xfrm>
+            <a:off x="14996160" y="24580633"/>
+            <a:ext cx="2948940" cy="685800"/>
+          </a:xfrm>
+          <a:prstGeom prst="rect">
+            <a:avLst/>
+          </a:prstGeom>
+          <a:noFill/>
+          <a:ln/>
+        </p:spPr>
+        <p:txBody>
+          <a:bodyPr wrap="square" lIns="0" tIns="0" rIns="0" bIns="0" rtlCol="0" anchor="ctr"/>
+          <a:lstStyle/>
+          <a:p>
+            <a:pPr indent="0" marL="0">
+              <a:buNone/>
+            </a:pPr>
+            <a:r>
+              <a:rPr lang="en-US" sz="1900" b="1" dirty="0">
+                <a:solidFill>
+                  <a:srgbClr val="1F5FB0"/>
+                </a:solidFill>
+                <a:latin typeface="Arial" pitchFamily="34" charset="0"/>
+                <a:ea typeface="Arial" pitchFamily="34" charset="-122"/>
+                <a:cs typeface="Arial" pitchFamily="34" charset="-120"/>
+              </a:rPr>
+              <a:t>✓ debugger</a:t>
+            </a:r>
+            <a:endParaRPr lang="en-US" sz="1900" dirty="0"/>
+          </a:p>
+        </p:txBody>
+      </p:sp>
+      <p:sp>
+        <p:nvSpPr>
+          <p:cNvPr id="36" name="Shape 32"/>
+          <p:cNvSpPr/>
+          <p:nvPr/>
+        </p:nvSpPr>
+        <p:spPr>
+          <a:xfrm>
+            <a:off x="18402300" y="22568953"/>
+            <a:ext cx="3314700" cy="3017520"/>
+          </a:xfrm>
+          <a:prstGeom prst="roundRect">
+            <a:avLst>
+              <a:gd name="adj" fmla="val 4545"/>
+            </a:avLst>
+          </a:prstGeom>
+          <a:solidFill>
+            <a:srgbClr val="F5F4F0"/>
+          </a:solidFill>
+          <a:ln w="12700">
+            <a:solidFill>
+              <a:srgbClr val="F5F4F0"/>
+            </a:solidFill>
+            <a:prstDash val="solid"/>
+          </a:ln>
+        </p:spPr>
+      </p:sp>
+      <p:sp>
+        <p:nvSpPr>
+          <p:cNvPr id="37" name="Text 33"/>
+          <p:cNvSpPr txBox="1"/>
+          <p:nvPr/>
+        </p:nvSpPr>
+        <p:spPr>
+          <a:xfrm>
+            <a:off x="18585180" y="22706113"/>
+            <a:ext cx="2948940" cy="640080"/>
+          </a:xfrm>
+          <a:prstGeom prst="rect">
+            <a:avLst/>
+          </a:prstGeom>
+          <a:noFill/>
+          <a:ln/>
+        </p:spPr>
+        <p:txBody>
+          <a:bodyPr wrap="square" lIns="0" tIns="0" rIns="0" bIns="0" rtlCol="0" anchor="ctr"/>
+          <a:lstStyle/>
+          <a:p>
+            <a:pPr indent="0" marL="0">
+              <a:buNone/>
+            </a:pPr>
+            <a:r>
+              <a:rPr lang="en-US" sz="2100" b="1" dirty="0">
+                <a:solidFill>
+                  <a:srgbClr val="22252B"/>
+                </a:solidFill>
+                <a:latin typeface="Arial" pitchFamily="34" charset="0"/>
+                <a:ea typeface="Arial" pitchFamily="34" charset="-122"/>
+                <a:cs typeface="Arial" pitchFamily="34" charset="-120"/>
+              </a:rPr>
+              <a:t>Linux PC</a:t>
+            </a:r>
+            <a:endParaRPr lang="en-US" sz="2100" dirty="0"/>
+          </a:p>
+        </p:txBody>
+      </p:sp>
+      <p:sp>
+        <p:nvSpPr>
+          <p:cNvPr id="38" name="Text 34"/>
+          <p:cNvSpPr txBox="1"/>
+          <p:nvPr/>
+        </p:nvSpPr>
+        <p:spPr>
+          <a:xfrm>
+            <a:off x="18585180" y="23300473"/>
+            <a:ext cx="2948940" cy="457200"/>
+          </a:xfrm>
+          <a:prstGeom prst="rect">
+            <a:avLst/>
+          </a:prstGeom>
+          <a:noFill/>
+          <a:ln/>
+        </p:spPr>
+        <p:txBody>
+          <a:bodyPr wrap="square" lIns="0" tIns="0" rIns="0" bIns="0" rtlCol="0" anchor="ctr"/>
+          <a:lstStyle/>
+          <a:p>
+            <a:pPr indent="0" marL="0">
+              <a:buNone/>
+            </a:pPr>
+            <a:r>
+              <a:rPr lang="en-US" sz="1600" dirty="0">
+                <a:solidFill>
+                  <a:srgbClr val="5E5B55"/>
+                </a:solidFill>
+                <a:latin typeface="Arial" pitchFamily="34" charset="0"/>
+                <a:ea typeface="Arial" pitchFamily="34" charset="-122"/>
+                <a:cs typeface="Arial" pitchFamily="34" charset="-120"/>
+              </a:rPr>
+              <a:t>Intel / AMD</a:t>
+            </a:r>
+            <a:endParaRPr lang="en-US" sz="1600" dirty="0"/>
+          </a:p>
+        </p:txBody>
+      </p:sp>
+      <p:sp>
+        <p:nvSpPr>
+          <p:cNvPr id="39" name="Text 35"/>
+          <p:cNvSpPr txBox="1"/>
+          <p:nvPr/>
+        </p:nvSpPr>
+        <p:spPr>
+          <a:xfrm>
+            <a:off x="18585180" y="23894833"/>
+            <a:ext cx="2948940" cy="685800"/>
+          </a:xfrm>
+          <a:prstGeom prst="rect">
+            <a:avLst/>
+          </a:prstGeom>
+          <a:noFill/>
+          <a:ln/>
+        </p:spPr>
+        <p:txBody>
+          <a:bodyPr wrap="square" lIns="0" tIns="0" rIns="0" bIns="0" rtlCol="0" anchor="ctr"/>
+          <a:lstStyle/>
+          <a:p>
+            <a:pPr indent="0" marL="0">
+              <a:buNone/>
+            </a:pPr>
+            <a:r>
+              <a:rPr lang="en-US" sz="1900" b="1" dirty="0">
+                <a:solidFill>
+                  <a:srgbClr val="1F5FB0"/>
+                </a:solidFill>
+                <a:latin typeface="Arial" pitchFamily="34" charset="0"/>
+                <a:ea typeface="Arial" pitchFamily="34" charset="-122"/>
+                <a:cs typeface="Arial" pitchFamily="34" charset="-120"/>
+              </a:rPr>
+              <a:t>✓ all assignments</a:t>
+            </a:r>
+            <a:endParaRPr lang="en-US" sz="1900" dirty="0"/>
+          </a:p>
+        </p:txBody>
+      </p:sp>
+      <p:sp>
+        <p:nvSpPr>
+          <p:cNvPr id="40" name="Text 36"/>
+          <p:cNvSpPr txBox="1"/>
+          <p:nvPr/>
+        </p:nvSpPr>
+        <p:spPr>
+          <a:xfrm>
+            <a:off x="18585180" y="24580633"/>
+            <a:ext cx="2948940" cy="685800"/>
+          </a:xfrm>
+          <a:prstGeom prst="rect">
+            <a:avLst/>
+          </a:prstGeom>
+          <a:noFill/>
+          <a:ln/>
+        </p:spPr>
+        <p:txBody>
+          <a:bodyPr wrap="square" lIns="0" tIns="0" rIns="0" bIns="0" rtlCol="0" anchor="ctr"/>
+          <a:lstStyle/>
+          <a:p>
+            <a:pPr indent="0" marL="0">
+              <a:buNone/>
+            </a:pPr>
+            <a:r>
+              <a:rPr lang="en-US" sz="1900" b="1" dirty="0">
+                <a:solidFill>
+                  <a:srgbClr val="1F5FB0"/>
+                </a:solidFill>
+                <a:latin typeface="Arial" pitchFamily="34" charset="0"/>
+                <a:ea typeface="Arial" pitchFamily="34" charset="-122"/>
+                <a:cs typeface="Arial" pitchFamily="34" charset="-120"/>
+              </a:rPr>
+              <a:t>✓ debugger</a:t>
+            </a:r>
+            <a:endParaRPr lang="en-US" sz="1900" dirty="0"/>
+          </a:p>
+        </p:txBody>
+      </p:sp>
+      <p:sp>
+        <p:nvSpPr>
+          <p:cNvPr id="41" name="Shape 37"/>
+          <p:cNvSpPr/>
+          <p:nvPr/>
+        </p:nvSpPr>
+        <p:spPr>
+          <a:xfrm>
+            <a:off x="21991320" y="22568953"/>
+            <a:ext cx="3314700" cy="3017520"/>
+          </a:xfrm>
+          <a:prstGeom prst="roundRect">
+            <a:avLst>
+              <a:gd name="adj" fmla="val 4545"/>
+            </a:avLst>
+          </a:prstGeom>
+          <a:solidFill>
+            <a:srgbClr val="F5F4F0"/>
+          </a:solidFill>
+          <a:ln w="12700">
+            <a:solidFill>
+              <a:srgbClr val="F5F4F0"/>
+            </a:solidFill>
+            <a:prstDash val="solid"/>
+          </a:ln>
+        </p:spPr>
+      </p:sp>
+      <p:sp>
+        <p:nvSpPr>
+          <p:cNvPr id="42" name="Text 38"/>
+          <p:cNvSpPr txBox="1"/>
+          <p:nvPr/>
+        </p:nvSpPr>
+        <p:spPr>
+          <a:xfrm>
+            <a:off x="22174200" y="22706113"/>
+            <a:ext cx="2948940" cy="640080"/>
+          </a:xfrm>
+          <a:prstGeom prst="rect">
+            <a:avLst/>
+          </a:prstGeom>
+          <a:noFill/>
+          <a:ln/>
+        </p:spPr>
+        <p:txBody>
+          <a:bodyPr wrap="square" lIns="0" tIns="0" rIns="0" bIns="0" rtlCol="0" anchor="ctr"/>
+          <a:lstStyle/>
+          <a:p>
+            <a:pPr indent="0" marL="0">
+              <a:buNone/>
+            </a:pPr>
+            <a:r>
+              <a:rPr lang="en-US" sz="2100" b="1" dirty="0">
+                <a:solidFill>
+                  <a:srgbClr val="22252B"/>
+                </a:solidFill>
+                <a:latin typeface="Arial" pitchFamily="34" charset="0"/>
+                <a:ea typeface="Arial" pitchFamily="34" charset="-122"/>
+                <a:cs typeface="Arial" pitchFamily="34" charset="-120"/>
+              </a:rPr>
+              <a:t>Apple Silicon Mac</a:t>
+            </a:r>
+            <a:endParaRPr lang="en-US" sz="2100" dirty="0"/>
+          </a:p>
+        </p:txBody>
+      </p:sp>
+      <p:sp>
+        <p:nvSpPr>
+          <p:cNvPr id="43" name="Text 39"/>
+          <p:cNvSpPr txBox="1"/>
+          <p:nvPr/>
+        </p:nvSpPr>
+        <p:spPr>
+          <a:xfrm>
+            <a:off x="22174200" y="23300473"/>
+            <a:ext cx="2948940" cy="457200"/>
+          </a:xfrm>
+          <a:prstGeom prst="rect">
+            <a:avLst/>
+          </a:prstGeom>
+          <a:noFill/>
+          <a:ln/>
+        </p:spPr>
+        <p:txBody>
+          <a:bodyPr wrap="square" lIns="0" tIns="0" rIns="0" bIns="0" rtlCol="0" anchor="ctr"/>
+          <a:lstStyle/>
+          <a:p>
+            <a:pPr indent="0" marL="0">
+              <a:buNone/>
+            </a:pPr>
+            <a:r>
+              <a:rPr lang="en-US" sz="1600" dirty="0">
+                <a:solidFill>
+                  <a:srgbClr val="5E5B55"/>
+                </a:solidFill>
+                <a:latin typeface="Arial" pitchFamily="34" charset="0"/>
+                <a:ea typeface="Arial" pitchFamily="34" charset="-122"/>
+                <a:cs typeface="Arial" pitchFamily="34" charset="-120"/>
+              </a:rPr>
+              <a:t>M1 Pro, 16 GB</a:t>
+            </a:r>
+            <a:endParaRPr lang="en-US" sz="1600" dirty="0"/>
+          </a:p>
+        </p:txBody>
+      </p:sp>
+      <p:sp>
+        <p:nvSpPr>
+          <p:cNvPr id="44" name="Text 40"/>
+          <p:cNvSpPr txBox="1"/>
+          <p:nvPr/>
+        </p:nvSpPr>
+        <p:spPr>
+          <a:xfrm>
+            <a:off x="22174200" y="23894833"/>
+            <a:ext cx="2948940" cy="685800"/>
+          </a:xfrm>
+          <a:prstGeom prst="rect">
+            <a:avLst/>
+          </a:prstGeom>
+          <a:noFill/>
+          <a:ln/>
+        </p:spPr>
+        <p:txBody>
+          <a:bodyPr wrap="square" lIns="0" tIns="0" rIns="0" bIns="0" rtlCol="0" anchor="ctr"/>
+          <a:lstStyle/>
+          <a:p>
+            <a:pPr indent="0" marL="0">
+              <a:buNone/>
+            </a:pPr>
+            <a:r>
+              <a:rPr lang="en-US" sz="1900" b="1" dirty="0">
+                <a:solidFill>
+                  <a:srgbClr val="1F5FB0"/>
+                </a:solidFill>
+                <a:latin typeface="Arial" pitchFamily="34" charset="0"/>
+                <a:ea typeface="Arial" pitchFamily="34" charset="-122"/>
+                <a:cs typeface="Arial" pitchFamily="34" charset="-120"/>
+              </a:rPr>
+              <a:t>✓ all assignments</a:t>
+            </a:r>
+            <a:endParaRPr lang="en-US" sz="1900" dirty="0"/>
+          </a:p>
+        </p:txBody>
+      </p:sp>
+      <p:sp>
+        <p:nvSpPr>
+          <p:cNvPr id="45" name="Text 41"/>
+          <p:cNvSpPr txBox="1"/>
+          <p:nvPr/>
+        </p:nvSpPr>
+        <p:spPr>
+          <a:xfrm>
+            <a:off x="22174200" y="24580633"/>
+            <a:ext cx="2948940" cy="685800"/>
+          </a:xfrm>
+          <a:prstGeom prst="rect">
+            <a:avLst/>
+          </a:prstGeom>
+          <a:noFill/>
+          <a:ln/>
+        </p:spPr>
+        <p:txBody>
+          <a:bodyPr wrap="square" lIns="0" tIns="0" rIns="0" bIns="0" rtlCol="0" anchor="ctr"/>
+          <a:lstStyle/>
+          <a:p>
+            <a:pPr indent="0" marL="0">
+              <a:buNone/>
+            </a:pPr>
+            <a:r>
+              <a:rPr lang="en-US" sz="1900" b="1" dirty="0">
+                <a:solidFill>
+                  <a:srgbClr val="B10202"/>
+                </a:solidFill>
+                <a:latin typeface="Arial" pitchFamily="34" charset="0"/>
+                <a:ea typeface="Arial" pitchFamily="34" charset="-122"/>
+                <a:cs typeface="Arial" pitchFamily="34" charset="-120"/>
+              </a:rPr>
+              <a:t>✗ debugger silent*</a:t>
+            </a:r>
+            <a:endParaRPr lang="en-US" sz="1900" dirty="0"/>
+          </a:p>
+        </p:txBody>
+      </p:sp>
+      <p:sp>
+        <p:nvSpPr>
+          <p:cNvPr id="46" name="Shape 42"/>
+          <p:cNvSpPr/>
+          <p:nvPr/>
+        </p:nvSpPr>
+        <p:spPr>
+          <a:xfrm>
+            <a:off x="25580340" y="22568953"/>
+            <a:ext cx="3314700" cy="3017520"/>
+          </a:xfrm>
+          <a:prstGeom prst="roundRect">
+            <a:avLst>
+              <a:gd name="adj" fmla="val 4545"/>
+            </a:avLst>
+          </a:prstGeom>
+          <a:solidFill>
+            <a:srgbClr val="F5F4F0"/>
+          </a:solidFill>
+          <a:ln w="12700">
+            <a:solidFill>
+              <a:srgbClr val="F5F4F0"/>
+            </a:solidFill>
+            <a:prstDash val="solid"/>
+          </a:ln>
+        </p:spPr>
+      </p:sp>
+      <p:sp>
+        <p:nvSpPr>
+          <p:cNvPr id="47" name="Text 43"/>
+          <p:cNvSpPr txBox="1"/>
+          <p:nvPr/>
+        </p:nvSpPr>
+        <p:spPr>
+          <a:xfrm>
+            <a:off x="25763220" y="22706113"/>
+            <a:ext cx="2948940" cy="640080"/>
+          </a:xfrm>
+          <a:prstGeom prst="rect">
+            <a:avLst/>
+          </a:prstGeom>
+          <a:noFill/>
+          <a:ln/>
+        </p:spPr>
+        <p:txBody>
+          <a:bodyPr wrap="square" lIns="0" tIns="0" rIns="0" bIns="0" rtlCol="0" anchor="ctr"/>
+          <a:lstStyle/>
+          <a:p>
+            <a:pPr indent="0" marL="0">
+              <a:buNone/>
+            </a:pPr>
+            <a:r>
+              <a:rPr lang="en-US" sz="2100" b="1" dirty="0">
+                <a:solidFill>
+                  <a:srgbClr val="22252B"/>
+                </a:solidFill>
+                <a:latin typeface="Arial" pitchFamily="34" charset="0"/>
+                <a:ea typeface="Arial" pitchFamily="34" charset="-122"/>
+                <a:cs typeface="Arial" pitchFamily="34" charset="-120"/>
+              </a:rPr>
+              <a:t>Linux on ARM</a:t>
+            </a:r>
+            <a:endParaRPr lang="en-US" sz="2100" dirty="0"/>
+          </a:p>
+        </p:txBody>
+      </p:sp>
+      <p:sp>
+        <p:nvSpPr>
+          <p:cNvPr id="48" name="Text 44"/>
+          <p:cNvSpPr txBox="1"/>
+          <p:nvPr/>
+        </p:nvSpPr>
+        <p:spPr>
+          <a:xfrm>
+            <a:off x="25763220" y="23300473"/>
+            <a:ext cx="2948940" cy="457200"/>
+          </a:xfrm>
+          <a:prstGeom prst="rect">
+            <a:avLst/>
+          </a:prstGeom>
+          <a:noFill/>
+          <a:ln/>
+        </p:spPr>
+        <p:txBody>
+          <a:bodyPr wrap="square" lIns="0" tIns="0" rIns="0" bIns="0" rtlCol="0" anchor="ctr"/>
+          <a:lstStyle/>
+          <a:p>
+            <a:pPr indent="0" marL="0">
+              <a:buNone/>
+            </a:pPr>
+            <a:r>
+              <a:rPr lang="en-US" sz="1600" dirty="0">
+                <a:solidFill>
+                  <a:srgbClr val="5E5B55"/>
+                </a:solidFill>
+                <a:latin typeface="Arial" pitchFamily="34" charset="0"/>
+                <a:ea typeface="Arial" pitchFamily="34" charset="-122"/>
+                <a:cs typeface="Arial" pitchFamily="34" charset="-120"/>
+              </a:rPr>
+              <a:t>AWS Graviton</a:t>
+            </a:r>
+            <a:endParaRPr lang="en-US" sz="1600" dirty="0"/>
+          </a:p>
+        </p:txBody>
+      </p:sp>
+      <p:sp>
+        <p:nvSpPr>
+          <p:cNvPr id="49" name="Text 45"/>
+          <p:cNvSpPr txBox="1"/>
+          <p:nvPr/>
+        </p:nvSpPr>
+        <p:spPr>
+          <a:xfrm>
+            <a:off x="25763220" y="23894833"/>
+            <a:ext cx="2948940" cy="685800"/>
+          </a:xfrm>
+          <a:prstGeom prst="rect">
+            <a:avLst/>
+          </a:prstGeom>
+          <a:noFill/>
+          <a:ln/>
+        </p:spPr>
+        <p:txBody>
+          <a:bodyPr wrap="square" lIns="0" tIns="0" rIns="0" bIns="0" rtlCol="0" anchor="ctr"/>
+          <a:lstStyle/>
+          <a:p>
+            <a:pPr indent="0" marL="0">
+              <a:buNone/>
+            </a:pPr>
+            <a:r>
+              <a:rPr lang="en-US" sz="1900" b="1" dirty="0">
+                <a:solidFill>
+                  <a:srgbClr val="1F5FB0"/>
+                </a:solidFill>
+                <a:latin typeface="Arial" pitchFamily="34" charset="0"/>
+                <a:ea typeface="Arial" pitchFamily="34" charset="-122"/>
+                <a:cs typeface="Arial" pitchFamily="34" charset="-120"/>
+              </a:rPr>
+              <a:t>✓ all assignments†</a:t>
+            </a:r>
+            <a:endParaRPr lang="en-US" sz="1900" dirty="0"/>
+          </a:p>
+        </p:txBody>
+      </p:sp>
+      <p:sp>
+        <p:nvSpPr>
+          <p:cNvPr id="50" name="Text 46"/>
+          <p:cNvSpPr txBox="1"/>
+          <p:nvPr/>
+        </p:nvSpPr>
+        <p:spPr>
+          <a:xfrm>
+            <a:off x="25763220" y="24580633"/>
+            <a:ext cx="2948940" cy="685800"/>
+          </a:xfrm>
+          <a:prstGeom prst="rect">
+            <a:avLst/>
+          </a:prstGeom>
+          <a:noFill/>
+          <a:ln/>
+        </p:spPr>
+        <p:txBody>
+          <a:bodyPr wrap="square" lIns="0" tIns="0" rIns="0" bIns="0" rtlCol="0" anchor="ctr"/>
+          <a:lstStyle/>
+          <a:p>
+            <a:pPr indent="0" marL="0">
+              <a:buNone/>
+            </a:pPr>
+            <a:r>
+              <a:rPr lang="en-US" sz="1900" b="1" dirty="0">
+                <a:solidFill>
+                  <a:srgbClr val="B10202"/>
+                </a:solidFill>
+                <a:latin typeface="Arial" pitchFamily="34" charset="0"/>
+                <a:ea typeface="Arial" pitchFamily="34" charset="-122"/>
+                <a:cs typeface="Arial" pitchFamily="34" charset="-120"/>
+              </a:rPr>
+              <a:t>✗ debugger silent*</a:t>
+            </a:r>
+            <a:endParaRPr lang="en-US" sz="1900" dirty="0"/>
+          </a:p>
+        </p:txBody>
+      </p:sp>
+      <p:sp>
+        <p:nvSpPr>
+          <p:cNvPr id="51" name="Text 47"/>
+          <p:cNvSpPr txBox="1"/>
+          <p:nvPr/>
+        </p:nvSpPr>
+        <p:spPr>
+          <a:xfrm>
+            <a:off x="14813280" y="25723633"/>
+            <a:ext cx="14081760" cy="1463040"/>
+          </a:xfrm>
+          <a:prstGeom prst="rect">
+            <a:avLst/>
+          </a:prstGeom>
+          <a:noFill/>
+          <a:ln/>
+        </p:spPr>
+        <p:txBody>
+          <a:bodyPr wrap="square" lIns="0" tIns="0" rIns="0" bIns="0" rtlCol="0" anchor="t"/>
+          <a:lstStyle/>
+          <a:p>
+            <a:pPr indent="0" marL="0">
+              <a:lnSpc>
+                <a:spcPct val="104000"/>
+              </a:lnSpc>
+              <a:spcAft>
+                <a:spcPts val="600"/>
+              </a:spcAft>
+              <a:buNone/>
+            </a:pPr>
+            <a:r>
+              <a:rPr lang="en-US" sz="1600" dirty="0">
+                <a:solidFill>
+                  <a:srgbClr val="5E5B55"/>
+                </a:solidFill>
+                <a:latin typeface="Arial" pitchFamily="34" charset="0"/>
+                <a:ea typeface="Arial" pitchFamily="34" charset="-122"/>
+                <a:cs typeface="Arial" pitchFamily="34" charset="-120"/>
+              </a:rPr>
+              <a:t>* Under translation the debugger appears to finish but writes no values, so debugger assignments need an Intel/AMD machine; the student handout says so.  † Needs Docker’s own translator; the one that ships with Ubuntu 24.04 crashed, which we reproduced and documented.</a:t>
+            </a:r>
+            <a:endParaRPr lang="en-US" sz="1600" dirty="0"/>
+          </a:p>
+        </p:txBody>
+      </p:sp>
+      <p:sp>
+        <p:nvSpPr>
+          <p:cNvPr id="52" name="Text 48"/>
+          <p:cNvSpPr txBox="1"/>
+          <p:nvPr/>
+        </p:nvSpPr>
+        <p:spPr>
+          <a:xfrm>
+            <a:off x="29443680" y="5394960"/>
+            <a:ext cx="14081760" cy="822960"/>
+          </a:xfrm>
+          <a:prstGeom prst="rect">
+            <a:avLst/>
+          </a:prstGeom>
+          <a:noFill/>
+          <a:ln/>
+        </p:spPr>
+        <p:txBody>
+          <a:bodyPr wrap="square" lIns="0" tIns="0" rIns="0" bIns="0" rtlCol="0" anchor="ctr"/>
+          <a:lstStyle/>
+          <a:p>
+            <a:pPr indent="0" marL="0">
+              <a:buNone/>
+            </a:pPr>
+            <a:r>
+              <a:rPr lang="en-US" sz="4000" b="1" dirty="0">
+                <a:solidFill>
+                  <a:srgbClr val="B10202"/>
+                </a:solidFill>
+                <a:latin typeface="Arial" pitchFamily="34" charset="0"/>
+                <a:ea typeface="Arial" pitchFamily="34" charset="-122"/>
+                <a:cs typeface="Arial" pitchFamily="34" charset="-120"/>
+              </a:rPr>
+              <a:t>What we found</a:t>
+            </a:r>
+            <a:endParaRPr lang="en-US" sz="4000" dirty="0"/>
+          </a:p>
+        </p:txBody>
+      </p:sp>
+      <p:sp>
+        <p:nvSpPr>
+          <p:cNvPr id="53" name="Shape 49"/>
+          <p:cNvSpPr/>
+          <p:nvPr/>
+        </p:nvSpPr>
+        <p:spPr>
+          <a:xfrm>
+            <a:off x="29443680" y="6355080"/>
+            <a:ext cx="6880860" cy="2377440"/>
+          </a:xfrm>
+          <a:prstGeom prst="roundRect">
+            <a:avLst>
+              <a:gd name="adj" fmla="val 5769"/>
+            </a:avLst>
+          </a:prstGeom>
+          <a:solidFill>
+            <a:srgbClr val="F5F4F0"/>
+          </a:solidFill>
+          <a:ln w="12700">
+            <a:solidFill>
+              <a:srgbClr val="F5F4F0"/>
+            </a:solidFill>
+            <a:prstDash val="solid"/>
+          </a:ln>
+        </p:spPr>
+      </p:sp>
+      <p:sp>
+        <p:nvSpPr>
+          <p:cNvPr id="54" name="Text 50"/>
+          <p:cNvSpPr txBox="1"/>
+          <p:nvPr/>
+        </p:nvSpPr>
+        <p:spPr>
+          <a:xfrm>
+            <a:off x="29718000" y="6492240"/>
+            <a:ext cx="6332220" cy="1005840"/>
+          </a:xfrm>
+          <a:prstGeom prst="rect">
+            <a:avLst/>
+          </a:prstGeom>
+          <a:noFill/>
+          <a:ln/>
+        </p:spPr>
+        <p:txBody>
+          <a:bodyPr wrap="square" lIns="0" tIns="0" rIns="0" bIns="0" rtlCol="0" anchor="ctr"/>
+          <a:lstStyle/>
+          <a:p>
+            <a:pPr indent="0" marL="0">
+              <a:buNone/>
+            </a:pPr>
+            <a:r>
+              <a:rPr lang="en-US" sz="5400" b="1" dirty="0">
+                <a:solidFill>
+                  <a:srgbClr val="B10202"/>
+                </a:solidFill>
+                <a:latin typeface="Arial" pitchFamily="34" charset="0"/>
+                <a:ea typeface="Arial" pitchFamily="34" charset="-122"/>
+                <a:cs typeface="Arial" pitchFamily="34" charset="-120"/>
+              </a:rPr>
+              <a:t>4 of 4</a:t>
+            </a:r>
+            <a:endParaRPr lang="en-US" sz="5400" dirty="0"/>
+          </a:p>
+        </p:txBody>
+      </p:sp>
+      <p:sp>
+        <p:nvSpPr>
+          <p:cNvPr id="55" name="Text 51"/>
+          <p:cNvSpPr txBox="1"/>
+          <p:nvPr/>
+        </p:nvSpPr>
+        <p:spPr>
+          <a:xfrm>
+            <a:off x="29718000" y="7498080"/>
+            <a:ext cx="6332220" cy="1188720"/>
+          </a:xfrm>
+          <a:prstGeom prst="rect">
+            <a:avLst/>
+          </a:prstGeom>
+          <a:noFill/>
+          <a:ln/>
+        </p:spPr>
+        <p:txBody>
+          <a:bodyPr wrap="square" lIns="0" tIns="0" rIns="0" bIns="0" rtlCol="0" anchor="t"/>
+          <a:lstStyle/>
+          <a:p>
+            <a:pPr indent="0" marL="0">
+              <a:lnSpc>
+                <a:spcPct val="100000"/>
+              </a:lnSpc>
+              <a:buNone/>
+            </a:pPr>
+            <a:r>
+              <a:rPr lang="en-US" sz="1800" dirty="0">
+                <a:solidFill>
+                  <a:srgbClr val="22252B"/>
+                </a:solidFill>
+                <a:latin typeface="Arial" pitchFamily="34" charset="0"/>
+                <a:ea typeface="Arial" pitchFamily="34" charset="-122"/>
+                <a:cs typeface="Arial" pitchFamily="34" charset="-120"/>
+              </a:rPr>
+              <a:t>kinds of computer ran every real CS 218 assignment correctly, including the multithreaded one</a:t>
+            </a:r>
+            <a:endParaRPr lang="en-US" sz="1800" dirty="0"/>
+          </a:p>
+        </p:txBody>
+      </p:sp>
+      <p:sp>
+        <p:nvSpPr>
+          <p:cNvPr id="56" name="Shape 52"/>
+          <p:cNvSpPr/>
+          <p:nvPr/>
+        </p:nvSpPr>
+        <p:spPr>
+          <a:xfrm>
+            <a:off x="36644580" y="6355080"/>
+            <a:ext cx="6880860" cy="2377440"/>
+          </a:xfrm>
+          <a:prstGeom prst="roundRect">
+            <a:avLst>
+              <a:gd name="adj" fmla="val 5769"/>
+            </a:avLst>
+          </a:prstGeom>
+          <a:solidFill>
+            <a:srgbClr val="F5F4F0"/>
+          </a:solidFill>
+          <a:ln w="12700">
+            <a:solidFill>
+              <a:srgbClr val="F5F4F0"/>
+            </a:solidFill>
+            <a:prstDash val="solid"/>
+          </a:ln>
+        </p:spPr>
+      </p:sp>
+      <p:sp>
+        <p:nvSpPr>
+          <p:cNvPr id="57" name="Text 53"/>
+          <p:cNvSpPr txBox="1"/>
+          <p:nvPr/>
+        </p:nvSpPr>
+        <p:spPr>
+          <a:xfrm>
+            <a:off x="36918900" y="6492240"/>
+            <a:ext cx="6332220" cy="1005840"/>
+          </a:xfrm>
+          <a:prstGeom prst="rect">
+            <a:avLst/>
+          </a:prstGeom>
+          <a:noFill/>
+          <a:ln/>
+        </p:spPr>
+        <p:txBody>
+          <a:bodyPr wrap="square" lIns="0" tIns="0" rIns="0" bIns="0" rtlCol="0" anchor="ctr"/>
+          <a:lstStyle/>
+          <a:p>
+            <a:pPr indent="0" marL="0">
+              <a:buNone/>
+            </a:pPr>
+            <a:r>
+              <a:rPr lang="en-US" sz="5400" b="1" dirty="0">
+                <a:solidFill>
+                  <a:srgbClr val="B10202"/>
+                </a:solidFill>
+                <a:latin typeface="Arial" pitchFamily="34" charset="0"/>
+                <a:ea typeface="Arial" pitchFamily="34" charset="-122"/>
+                <a:cs typeface="Arial" pitchFamily="34" charset="-120"/>
+              </a:rPr>
+              <a:t>Identical</a:t>
+            </a:r>
+            <a:endParaRPr lang="en-US" sz="5400" dirty="0"/>
+          </a:p>
+        </p:txBody>
+      </p:sp>
+      <p:sp>
+        <p:nvSpPr>
+          <p:cNvPr id="58" name="Text 54"/>
+          <p:cNvSpPr txBox="1"/>
+          <p:nvPr/>
+        </p:nvSpPr>
+        <p:spPr>
+          <a:xfrm>
+            <a:off x="36918900" y="7498080"/>
+            <a:ext cx="6332220" cy="1188720"/>
+          </a:xfrm>
+          <a:prstGeom prst="rect">
+            <a:avLst/>
+          </a:prstGeom>
+          <a:noFill/>
+          <a:ln/>
+        </p:spPr>
+        <p:txBody>
+          <a:bodyPr wrap="square" lIns="0" tIns="0" rIns="0" bIns="0" rtlCol="0" anchor="t"/>
+          <a:lstStyle/>
+          <a:p>
+            <a:pPr indent="0" marL="0">
+              <a:lnSpc>
+                <a:spcPct val="100000"/>
+              </a:lnSpc>
+              <a:buNone/>
+            </a:pPr>
+            <a:r>
+              <a:rPr lang="en-US" sz="1800" dirty="0">
+                <a:solidFill>
+                  <a:srgbClr val="22252B"/>
+                </a:solidFill>
+                <a:latin typeface="Arial" pitchFamily="34" charset="0"/>
+                <a:ea typeface="Arial" pitchFamily="34" charset="-122"/>
+                <a:cs typeface="Arial" pitchFamily="34" charset="-120"/>
+              </a:rPr>
+              <a:t>the same 552 MB file, byte for byte, on Windows, macOS, and Linux: the promise a VM could never make</a:t>
+            </a:r>
+            <a:endParaRPr lang="en-US" sz="1800" dirty="0"/>
+          </a:p>
+        </p:txBody>
+      </p:sp>
+      <p:sp>
+        <p:nvSpPr>
+          <p:cNvPr id="59" name="Shape 55"/>
+          <p:cNvSpPr/>
+          <p:nvPr/>
+        </p:nvSpPr>
+        <p:spPr>
+          <a:xfrm>
+            <a:off x="29443680" y="9006840"/>
+            <a:ext cx="6880860" cy="2377440"/>
+          </a:xfrm>
+          <a:prstGeom prst="roundRect">
+            <a:avLst>
+              <a:gd name="adj" fmla="val 5769"/>
+            </a:avLst>
+          </a:prstGeom>
+          <a:solidFill>
+            <a:srgbClr val="F5F4F0"/>
+          </a:solidFill>
+          <a:ln w="12700">
+            <a:solidFill>
+              <a:srgbClr val="F5F4F0"/>
+            </a:solidFill>
+            <a:prstDash val="solid"/>
+          </a:ln>
+        </p:spPr>
+      </p:sp>
+      <p:sp>
+        <p:nvSpPr>
+          <p:cNvPr id="60" name="Text 56"/>
+          <p:cNvSpPr txBox="1"/>
+          <p:nvPr/>
+        </p:nvSpPr>
+        <p:spPr>
+          <a:xfrm>
+            <a:off x="29718000" y="9144000"/>
+            <a:ext cx="6332220" cy="1005840"/>
+          </a:xfrm>
+          <a:prstGeom prst="rect">
+            <a:avLst/>
+          </a:prstGeom>
+          <a:noFill/>
+          <a:ln/>
+        </p:spPr>
+        <p:txBody>
+          <a:bodyPr wrap="square" lIns="0" tIns="0" rIns="0" bIns="0" rtlCol="0" anchor="ctr"/>
+          <a:lstStyle/>
+          <a:p>
+            <a:pPr indent="0" marL="0">
+              <a:buNone/>
+            </a:pPr>
+            <a:r>
+              <a:rPr lang="en-US" sz="5400" b="1" dirty="0">
+                <a:solidFill>
+                  <a:srgbClr val="B10202"/>
+                </a:solidFill>
+                <a:latin typeface="Arial" pitchFamily="34" charset="0"/>
+                <a:ea typeface="Arial" pitchFamily="34" charset="-122"/>
+                <a:cs typeface="Arial" pitchFamily="34" charset="-120"/>
+              </a:rPr>
+              <a:t>0.5 s</a:t>
+            </a:r>
+            <a:endParaRPr lang="en-US" sz="5400" dirty="0"/>
+          </a:p>
+        </p:txBody>
+      </p:sp>
+      <p:sp>
+        <p:nvSpPr>
+          <p:cNvPr id="61" name="Text 57"/>
+          <p:cNvSpPr txBox="1"/>
+          <p:nvPr/>
+        </p:nvSpPr>
+        <p:spPr>
+          <a:xfrm>
+            <a:off x="29718000" y="10149840"/>
+            <a:ext cx="6332220" cy="1188720"/>
+          </a:xfrm>
+          <a:prstGeom prst="rect">
+            <a:avLst/>
+          </a:prstGeom>
+          <a:noFill/>
+          <a:ln/>
+        </p:spPr>
+        <p:txBody>
+          <a:bodyPr wrap="square" lIns="0" tIns="0" rIns="0" bIns="0" rtlCol="0" anchor="t"/>
+          <a:lstStyle/>
+          <a:p>
+            <a:pPr indent="0" marL="0">
+              <a:lnSpc>
+                <a:spcPct val="100000"/>
+              </a:lnSpc>
+              <a:buNone/>
+            </a:pPr>
+            <a:r>
+              <a:rPr lang="en-US" sz="1800" dirty="0">
+                <a:solidFill>
+                  <a:srgbClr val="22252B"/>
+                </a:solidFill>
+                <a:latin typeface="Arial" pitchFamily="34" charset="0"/>
+                <a:ea typeface="Arial" pitchFamily="34" charset="-122"/>
+                <a:cs typeface="Arial" pitchFamily="34" charset="-120"/>
+              </a:rPr>
+              <a:t>until the editor is ready on Intel/AMD machines; about 5 s on Apple Silicon; a VM boots in minutes</a:t>
+            </a:r>
+            <a:endParaRPr lang="en-US" sz="1800" dirty="0"/>
+          </a:p>
+        </p:txBody>
+      </p:sp>
+      <p:sp>
+        <p:nvSpPr>
+          <p:cNvPr id="62" name="Shape 58"/>
+          <p:cNvSpPr/>
+          <p:nvPr/>
+        </p:nvSpPr>
+        <p:spPr>
+          <a:xfrm>
+            <a:off x="36644580" y="9006840"/>
+            <a:ext cx="6880860" cy="2377440"/>
+          </a:xfrm>
+          <a:prstGeom prst="roundRect">
+            <a:avLst>
+              <a:gd name="adj" fmla="val 5769"/>
+            </a:avLst>
+          </a:prstGeom>
+          <a:solidFill>
+            <a:srgbClr val="F5F4F0"/>
+          </a:solidFill>
+          <a:ln w="12700">
+            <a:solidFill>
+              <a:srgbClr val="F5F4F0"/>
+            </a:solidFill>
+            <a:prstDash val="solid"/>
+          </a:ln>
+        </p:spPr>
+      </p:sp>
+      <p:sp>
+        <p:nvSpPr>
+          <p:cNvPr id="63" name="Text 59"/>
+          <p:cNvSpPr txBox="1"/>
+          <p:nvPr/>
+        </p:nvSpPr>
+        <p:spPr>
+          <a:xfrm>
+            <a:off x="36918900" y="9144000"/>
+            <a:ext cx="6332220" cy="1005840"/>
+          </a:xfrm>
+          <a:prstGeom prst="rect">
+            <a:avLst/>
+          </a:prstGeom>
+          <a:noFill/>
+          <a:ln/>
+        </p:spPr>
+        <p:txBody>
+          <a:bodyPr wrap="square" lIns="0" tIns="0" rIns="0" bIns="0" rtlCol="0" anchor="ctr"/>
+          <a:lstStyle/>
+          <a:p>
+            <a:pPr indent="0" marL="0">
+              <a:buNone/>
+            </a:pPr>
+            <a:r>
+              <a:rPr lang="en-US" sz="5400" b="1" dirty="0">
+                <a:solidFill>
+                  <a:srgbClr val="B10202"/>
+                </a:solidFill>
+                <a:latin typeface="Arial" pitchFamily="34" charset="0"/>
+                <a:ea typeface="Arial" pitchFamily="34" charset="-122"/>
+                <a:cs typeface="Arial" pitchFamily="34" charset="-120"/>
+              </a:rPr>
+              <a:t>552 MB</a:t>
+            </a:r>
+            <a:endParaRPr lang="en-US" sz="5400" dirty="0"/>
+          </a:p>
+        </p:txBody>
+      </p:sp>
+      <p:sp>
+        <p:nvSpPr>
+          <p:cNvPr id="64" name="Text 60"/>
+          <p:cNvSpPr txBox="1"/>
+          <p:nvPr/>
+        </p:nvSpPr>
+        <p:spPr>
+          <a:xfrm>
+            <a:off x="36918900" y="10149840"/>
+            <a:ext cx="6332220" cy="1188720"/>
+          </a:xfrm>
+          <a:prstGeom prst="rect">
+            <a:avLst/>
+          </a:prstGeom>
+          <a:noFill/>
+          <a:ln/>
+        </p:spPr>
+        <p:txBody>
+          <a:bodyPr wrap="square" lIns="0" tIns="0" rIns="0" bIns="0" rtlCol="0" anchor="t"/>
+          <a:lstStyle/>
+          <a:p>
+            <a:pPr indent="0" marL="0">
+              <a:lnSpc>
+                <a:spcPct val="100000"/>
+              </a:lnSpc>
+              <a:buNone/>
+            </a:pPr>
+            <a:r>
+              <a:rPr lang="en-US" sz="1800" dirty="0">
+                <a:solidFill>
+                  <a:srgbClr val="22252B"/>
+                </a:solidFill>
+                <a:latin typeface="Arial" pitchFamily="34" charset="0"/>
+                <a:ea typeface="Arial" pitchFamily="34" charset="-122"/>
+                <a:cs typeface="Arial" pitchFamily="34" charset="-120"/>
+              </a:rPr>
+              <a:t>one-time download, versus the 19 GB virtual machine the course distributes today</a:t>
+            </a:r>
+            <a:endParaRPr lang="en-US" sz="1800" dirty="0"/>
+          </a:p>
+        </p:txBody>
+      </p:sp>
+      <p:sp>
+        <p:nvSpPr>
+          <p:cNvPr id="65" name="Shape 61"/>
+          <p:cNvSpPr/>
+          <p:nvPr/>
+        </p:nvSpPr>
+        <p:spPr>
+          <a:xfrm>
+            <a:off x="29443680" y="11658600"/>
+            <a:ext cx="6880860" cy="2377440"/>
+          </a:xfrm>
+          <a:prstGeom prst="roundRect">
+            <a:avLst>
+              <a:gd name="adj" fmla="val 5769"/>
+            </a:avLst>
+          </a:prstGeom>
+          <a:solidFill>
+            <a:srgbClr val="F5F4F0"/>
+          </a:solidFill>
+          <a:ln w="12700">
+            <a:solidFill>
+              <a:srgbClr val="F5F4F0"/>
+            </a:solidFill>
+            <a:prstDash val="solid"/>
+          </a:ln>
+        </p:spPr>
+      </p:sp>
+      <p:sp>
+        <p:nvSpPr>
+          <p:cNvPr id="66" name="Text 62"/>
+          <p:cNvSpPr txBox="1"/>
+          <p:nvPr/>
+        </p:nvSpPr>
+        <p:spPr>
+          <a:xfrm>
+            <a:off x="29718000" y="11795760"/>
+            <a:ext cx="6332220" cy="1005840"/>
+          </a:xfrm>
+          <a:prstGeom prst="rect">
+            <a:avLst/>
+          </a:prstGeom>
+          <a:noFill/>
+          <a:ln/>
+        </p:spPr>
+        <p:txBody>
+          <a:bodyPr wrap="square" lIns="0" tIns="0" rIns="0" bIns="0" rtlCol="0" anchor="ctr"/>
+          <a:lstStyle/>
+          <a:p>
+            <a:pPr indent="0" marL="0">
+              <a:buNone/>
+            </a:pPr>
+            <a:r>
+              <a:rPr lang="en-US" sz="5400" b="1" dirty="0">
+                <a:solidFill>
+                  <a:srgbClr val="B10202"/>
+                </a:solidFill>
+                <a:latin typeface="Arial" pitchFamily="34" charset="0"/>
+                <a:ea typeface="Arial" pitchFamily="34" charset="-122"/>
+                <a:cs typeface="Arial" pitchFamily="34" charset="-120"/>
+              </a:rPr>
+              <a:t>&lt; $10</a:t>
+            </a:r>
+            <a:endParaRPr lang="en-US" sz="5400" dirty="0"/>
+          </a:p>
+        </p:txBody>
+      </p:sp>
+      <p:sp>
+        <p:nvSpPr>
+          <p:cNvPr id="67" name="Text 63"/>
+          <p:cNvSpPr txBox="1"/>
+          <p:nvPr/>
+        </p:nvSpPr>
+        <p:spPr>
+          <a:xfrm>
+            <a:off x="29718000" y="12801600"/>
+            <a:ext cx="6332220" cy="1188720"/>
+          </a:xfrm>
+          <a:prstGeom prst="rect">
+            <a:avLst/>
+          </a:prstGeom>
+          <a:noFill/>
+          <a:ln/>
+        </p:spPr>
+        <p:txBody>
+          <a:bodyPr wrap="square" lIns="0" tIns="0" rIns="0" bIns="0" rtlCol="0" anchor="t"/>
+          <a:lstStyle/>
+          <a:p>
+            <a:pPr indent="0" marL="0">
+              <a:lnSpc>
+                <a:spcPct val="100000"/>
+              </a:lnSpc>
+              <a:buNone/>
+            </a:pPr>
+            <a:r>
+              <a:rPr lang="en-US" sz="1800" dirty="0">
+                <a:solidFill>
+                  <a:srgbClr val="22252B"/>
+                </a:solidFill>
+                <a:latin typeface="Arial" pitchFamily="34" charset="0"/>
+                <a:ea typeface="Arial" pitchFamily="34" charset="-122"/>
+                <a:cs typeface="Arial" pitchFamily="34" charset="-120"/>
+              </a:rPr>
+              <a:t>to rent every test machine, failed attempts included; students pay nothing and need no account</a:t>
+            </a:r>
+            <a:endParaRPr lang="en-US" sz="1800" dirty="0"/>
+          </a:p>
+        </p:txBody>
+      </p:sp>
+      <p:sp>
+        <p:nvSpPr>
+          <p:cNvPr id="68" name="Shape 64"/>
+          <p:cNvSpPr/>
+          <p:nvPr/>
+        </p:nvSpPr>
+        <p:spPr>
+          <a:xfrm>
+            <a:off x="36644580" y="11658600"/>
+            <a:ext cx="6880860" cy="2377440"/>
+          </a:xfrm>
+          <a:prstGeom prst="roundRect">
+            <a:avLst>
+              <a:gd name="adj" fmla="val 5769"/>
+            </a:avLst>
+          </a:prstGeom>
+          <a:solidFill>
+            <a:srgbClr val="FBEAEA"/>
+          </a:solidFill>
+          <a:ln w="12700">
+            <a:solidFill>
+              <a:srgbClr val="FBEAEA"/>
+            </a:solidFill>
+            <a:prstDash val="solid"/>
+          </a:ln>
+        </p:spPr>
+      </p:sp>
+      <p:sp>
+        <p:nvSpPr>
+          <p:cNvPr id="69" name="Text 65"/>
+          <p:cNvSpPr txBox="1"/>
+          <p:nvPr/>
+        </p:nvSpPr>
+        <p:spPr>
+          <a:xfrm>
+            <a:off x="36918900" y="11795760"/>
+            <a:ext cx="6332220" cy="1005840"/>
+          </a:xfrm>
+          <a:prstGeom prst="rect">
+            <a:avLst/>
+          </a:prstGeom>
+          <a:noFill/>
+          <a:ln/>
+        </p:spPr>
+        <p:txBody>
+          <a:bodyPr wrap="square" lIns="0" tIns="0" rIns="0" bIns="0" rtlCol="0" anchor="ctr"/>
+          <a:lstStyle/>
+          <a:p>
+            <a:pPr indent="0" marL="0">
+              <a:buNone/>
+            </a:pPr>
+            <a:r>
+              <a:rPr lang="en-US" sz="5400" b="1" dirty="0">
+                <a:solidFill>
+                  <a:srgbClr val="B10202"/>
+                </a:solidFill>
+                <a:latin typeface="Arial" pitchFamily="34" charset="0"/>
+                <a:ea typeface="Arial" pitchFamily="34" charset="-122"/>
+                <a:cs typeface="Arial" pitchFamily="34" charset="-120"/>
+              </a:rPr>
+              <a:t>1 limit</a:t>
+            </a:r>
+            <a:endParaRPr lang="en-US" sz="5400" dirty="0"/>
+          </a:p>
+        </p:txBody>
+      </p:sp>
+      <p:sp>
+        <p:nvSpPr>
+          <p:cNvPr id="70" name="Text 66"/>
+          <p:cNvSpPr txBox="1"/>
+          <p:nvPr/>
+        </p:nvSpPr>
+        <p:spPr>
+          <a:xfrm>
+            <a:off x="36918900" y="12801600"/>
+            <a:ext cx="6332220" cy="1188720"/>
+          </a:xfrm>
+          <a:prstGeom prst="rect">
+            <a:avLst/>
+          </a:prstGeom>
+          <a:noFill/>
+          <a:ln/>
+        </p:spPr>
+        <p:txBody>
+          <a:bodyPr wrap="square" lIns="0" tIns="0" rIns="0" bIns="0" rtlCol="0" anchor="t"/>
+          <a:lstStyle/>
+          <a:p>
+            <a:pPr indent="0" marL="0">
+              <a:lnSpc>
+                <a:spcPct val="100000"/>
+              </a:lnSpc>
+              <a:buNone/>
+            </a:pPr>
+            <a:r>
+              <a:rPr lang="en-US" sz="1800" dirty="0">
+                <a:solidFill>
+                  <a:srgbClr val="22252B"/>
+                </a:solidFill>
+                <a:latin typeface="Arial" pitchFamily="34" charset="0"/>
+                <a:ea typeface="Arial" pitchFamily="34" charset="-122"/>
+                <a:cs typeface="Arial" pitchFamily="34" charset="-120"/>
+              </a:rPr>
+              <a:t>the debugger goes silent on Apple Silicon and ARM, and we can say exactly why</a:t>
+            </a:r>
+            <a:endParaRPr lang="en-US" sz="1800" dirty="0"/>
+          </a:p>
+        </p:txBody>
+      </p:sp>
+      <p:graphicFrame>
+        <p:nvGraphicFramePr>
+          <p:cNvPr id="71" name="Chart 0" descr=""/>
+          <p:cNvGraphicFramePr/>
+          <p:nvPr/>
+        </p:nvGraphicFramePr>
+        <p:xfrm>
+          <a:off x="29443680" y="14401800"/>
+          <a:ext cx="14081760" cy="4206240"/>
+        </p:xfrm>
+        <a:graphic xmlns:a="http://schemas.openxmlformats.org/drawingml/2006/main">
+          <a:graphicData uri="http://schemas.openxmlformats.org/drawingml/2006/chart">
+            <c:chart xmlns:c="http://schemas.openxmlformats.org/drawingml/2006/chart" r:id="rId2"/>
+          </a:graphicData>
+        </a:graphic>
+      </p:graphicFrame>
+      <p:sp>
+        <p:nvSpPr>
+          <p:cNvPr id="72" name="Text 67"/>
+          <p:cNvSpPr txBox="1"/>
+          <p:nvPr/>
+        </p:nvSpPr>
+        <p:spPr>
+          <a:xfrm>
+            <a:off x="29443680" y="18745200"/>
+            <a:ext cx="14081760" cy="2743200"/>
+          </a:xfrm>
+          <a:prstGeom prst="rect">
+            <a:avLst/>
+          </a:prstGeom>
+          <a:noFill/>
+          <a:ln/>
+        </p:spPr>
+        <p:txBody>
+          <a:bodyPr wrap="square" lIns="0" tIns="0" rIns="0" bIns="0" rtlCol="0" anchor="t"/>
+          <a:lstStyle/>
+          <a:p>
+            <a:pPr indent="0" marL="0">
+              <a:lnSpc>
+                <a:spcPct val="104000"/>
+              </a:lnSpc>
+              <a:spcAft>
+                <a:spcPts val="600"/>
+              </a:spcAft>
               <a:buNone/>
             </a:pPr>
             <a:r>
@@ -6116,12 +4980,15 @@
                 <a:ea typeface="Arial" pitchFamily="34" charset="-122"/>
                 <a:cs typeface="Arial" pitchFamily="34" charset="-120"/>
               </a:rPr>
-              <a:t>The boundary is a translator boundary, not an OS boundary. </a:t>
+              <a:t>Why the limit exists, in one sentence. </a:t>
             </a:r>
             <a:pPr indent="0" marL="0">
               <a:lnSpc>
-                <a:spcPct val="102000"/>
+                <a:spcPct val="104000"/>
               </a:lnSpc>
+              <a:spcAft>
+                <a:spcPts val="600"/>
+              </a:spcAft>
               <a:buNone/>
             </a:pPr>
             <a:r>
@@ -6133,7 +5000,7 @@
                 <a:ea typeface="Arial" pitchFamily="34" charset="-122"/>
                 <a:cs typeface="Arial" pitchFamily="34" charset="-120"/>
               </a:rPr>
-              <a:t>The image runs wherever the layer hosting Docker’s Linux environment needs no translation or receives a Rosetta-class one. Under translation a gdb script still “succeeds” and writes its file, but with labels and no register values, so the handouts tell students to produce debugger deliverables on a native x86 machine.</a:t>
+              <a:t>The assembly image is x86-64 on purpose, because the course teaches x86-64; on ARM chips it runs through a translator, and today’s translators run the programs correctly but cannot support the debugger. Windows and Intel machines, most of the class, get everything. Under translation a debugger script still “succeeds” and writes its output file, but with none of the values, which is why the student handout tells Apple Silicon owners to produce debugger deliverables on an Intel machine.</a:t>
             </a:r>
             <a:endParaRPr lang="en-US" sz="2000" dirty="0"/>
           </a:p>
@@ -6141,7 +5008,7 @@
       </p:sp>
       <p:sp>
         <p:nvSpPr>
-          <p:cNvPr id="56" name="Shape 50"/>
+          <p:cNvPr id="73" name="Shape 68"/>
           <p:cNvSpPr/>
           <p:nvPr/>
         </p:nvSpPr>
@@ -6164,7 +5031,7 @@
       </p:sp>
       <p:sp>
         <p:nvSpPr>
-          <p:cNvPr id="57" name="Text 51"/>
+          <p:cNvPr id="74" name="Text 69"/>
           <p:cNvSpPr txBox="1"/>
           <p:nvPr/>
         </p:nvSpPr>
@@ -6195,7 +5062,7 @@
                 <a:ea typeface="Arial" pitchFamily="34" charset="-122"/>
                 <a:cs typeface="Arial" pitchFamily="34" charset="-120"/>
               </a:rPr>
-              <a:t>Next</a:t>
+              <a:t>What comes next</a:t>
             </a:r>
             <a:endParaRPr lang="en-US" sz="4000" dirty="0"/>
           </a:p>
@@ -6203,7 +5070,7 @@
       </p:sp>
       <p:sp>
         <p:nvSpPr>
-          <p:cNvPr id="58" name="Text 52"/>
+          <p:cNvPr id="75" name="Text 70"/>
           <p:cNvSpPr txBox="1"/>
           <p:nvPr/>
         </p:nvSpPr>
@@ -6224,7 +5091,7 @@
           <a:p>
             <a:pPr marL="355600" indent="-355600">
               <a:lnSpc>
-                <a:spcPct val="102000"/>
+                <a:spcPct val="104000"/>
               </a:lnSpc>
               <a:spcAft>
                 <a:spcPts val="600"/>
@@ -6241,14 +5108,14 @@
                 <a:ea typeface="Arial" pitchFamily="34" charset="-122"/>
                 <a:cs typeface="Arial" pitchFamily="34" charset="-120"/>
               </a:rPr>
-              <a:t>Classroom study in CS 218 and CS 135 (IRB): setup-success funnel, staff minutes, forum traffic, pre/mid/post anxiety and setup-difficulty items adapted from [3, 4, 6]. A pilot in a 3-student high-school class ran without metrics.</a:t>
+              <a:t>Run it in a real section of CS 218 and CS 135 and measure what only a classroom can: how many students reach a working setup without help, how many staff minutes it saves, and how students feel about it, using survey instruments adapted from [3, 4, 6]. A three-student pilot class has already run on it.</a:t>
             </a:r>
             <a:endParaRPr lang="en-US" sz="2100" dirty="0"/>
           </a:p>
           <a:p>
             <a:pPr marL="355600" indent="-355600">
               <a:lnSpc>
-                <a:spcPct val="102000"/>
+                <a:spcPct val="104000"/>
               </a:lnSpc>
               <a:spcAft>
                 <a:spcPts val="600"/>
@@ -6265,15 +5132,18 @@
                 <a:ea typeface="Arial" pitchFamily="34" charset="-122"/>
                 <a:cs typeface="Arial" pitchFamily="34" charset="-120"/>
               </a:rPr>
-              <a:t>Hybrid arm64 assembly image: editor and toolchain native on ARM, x86 cross-assembler emits real x86-64 binaries, translator runs only student programs, gdb via QEMU’s built-in stub. One variant covers ARM Linux and Windows-on-ARM.</a:t>
+              <a:t>Build a second assembly image for ARM chips that keeps the editor native and translates only the student’s program, which could bring the debugger back to Apple Silicon and Windows-on-ARM laptops.</a:t>
             </a:r>
             <a:endParaRPr lang="en-US" sz="2100" dirty="0"/>
           </a:p>
           <a:p>
             <a:pPr marL="355600" indent="-355600">
               <a:lnSpc>
-                <a:spcPct val="102000"/>
+                <a:spcPct val="104000"/>
               </a:lnSpc>
+              <a:spcAft>
+                <a:spcPts val="600"/>
+              </a:spcAft>
               <a:buSzPct val="100000"/>
               <a:buChar char="•"/>
             </a:pPr>
@@ -6286,7 +5156,7 @@
                 <a:ea typeface="Arial" pitchFamily="34" charset="-122"/>
                 <a:cs typeface="Arial" pitchFamily="34" charset="-120"/>
               </a:rPr>
-              <a:t>Close the two untested cells with physical hardware; reuse the one-script, cloud-rented matrix for other courses (e.g., CS 370).</a:t>
+              <a:t>Reuse the rent-four-computers, one-script method to evaluate environments for other courses (Operating Systems next).</a:t>
             </a:r>
             <a:endParaRPr lang="en-US" sz="2100" dirty="0"/>
           </a:p>
@@ -6294,7 +5164,7 @@
       </p:sp>
       <p:sp>
         <p:nvSpPr>
-          <p:cNvPr id="59" name="Text 53"/>
+          <p:cNvPr id="76" name="Text 71"/>
           <p:cNvSpPr txBox="1"/>
           <p:nvPr/>
         </p:nvSpPr>
@@ -6333,14 +5203,14 @@
       </p:sp>
       <p:sp>
         <p:nvSpPr>
-          <p:cNvPr id="60" name="Text 54"/>
+          <p:cNvPr id="77" name="Text 72"/>
           <p:cNvSpPr txBox="1"/>
           <p:nvPr/>
         </p:nvSpPr>
         <p:spPr>
           <a:xfrm>
             <a:off x="29443680" y="29215080"/>
-            <a:ext cx="14081760" cy="3017520"/>
+            <a:ext cx="14081760" cy="2743200"/>
           </a:xfrm>
           <a:prstGeom prst="rect">
             <a:avLst/>
@@ -6508,22 +5378,38 @@
                 <a:ea typeface="Arial" pitchFamily="34" charset="-122"/>
                 <a:cs typeface="Arial" pitchFamily="34" charset="-120"/>
               </a:rPr>
-              <a:t>[7] Laadan, Nieh, Viennot. Teaching OS Using Virtual Appliances. SIGCSE 2010.</a:t>
+              <a:t>[8] Park et al. CodeDive: A Web-Based IDE with Real-Time Code Activity Monitoring. Applied Sciences 2025.</a:t>
             </a:r>
             <a:endParaRPr lang="en-US" sz="1400" dirty="0"/>
           </a:p>
-          <a:p>
-            <a:pPr indent="0" marL="0">
-              <a:lnSpc>
-                <a:spcPct val="100000"/>
-              </a:lnSpc>
-              <a:spcAft>
-                <a:spcPts val="300"/>
-              </a:spcAft>
-              <a:buNone/>
-            </a:pPr>
-            <a:r>
-              <a:rPr lang="en-US" sz="1400" dirty="0">
+        </p:txBody>
+      </p:sp>
+      <p:sp>
+        <p:nvSpPr>
+          <p:cNvPr id="78" name="Text 73"/>
+          <p:cNvSpPr txBox="1"/>
+          <p:nvPr/>
+        </p:nvSpPr>
+        <p:spPr>
+          <a:xfrm>
+            <a:off x="29443680" y="32004000"/>
+            <a:ext cx="14081760" cy="914400"/>
+          </a:xfrm>
+          <a:prstGeom prst="rect">
+            <a:avLst/>
+          </a:prstGeom>
+          <a:noFill/>
+          <a:ln/>
+        </p:spPr>
+        <p:txBody>
+          <a:bodyPr wrap="square" lIns="0" tIns="0" rIns="0" bIns="0" rtlCol="0" anchor="t"/>
+          <a:lstStyle/>
+          <a:p>
+            <a:pPr indent="0" marL="0">
+              <a:buNone/>
+            </a:pPr>
+            <a:r>
+              <a:rPr lang="en-US" sz="1300" i="1" dirty="0">
                 <a:solidFill>
                   <a:srgbClr val="5E5B55"/>
                 </a:solidFill>
@@ -6531,46 +5417,7 @@
                 <a:ea typeface="Arial" pitchFamily="34" charset="-122"/>
                 <a:cs typeface="Arial" pitchFamily="34" charset="-120"/>
               </a:rPr>
-              <a:t>[8] Park et al. CodeDive: A Web-Based IDE with Real-Time Code Activity Monitoring. Applied Sciences 2025.</a:t>
-            </a:r>
-            <a:endParaRPr lang="en-US" sz="1400" dirty="0"/>
-          </a:p>
-        </p:txBody>
-      </p:sp>
-      <p:sp>
-        <p:nvSpPr>
-          <p:cNvPr id="61" name="Text 55"/>
-          <p:cNvSpPr txBox="1"/>
-          <p:nvPr/>
-        </p:nvSpPr>
-        <p:spPr>
-          <a:xfrm>
-            <a:off x="29443680" y="32278320"/>
-            <a:ext cx="14081760" cy="822960"/>
-          </a:xfrm>
-          <a:prstGeom prst="rect">
-            <a:avLst/>
-          </a:prstGeom>
-          <a:noFill/>
-          <a:ln/>
-        </p:spPr>
-        <p:txBody>
-          <a:bodyPr wrap="square" lIns="0" tIns="0" rIns="0" bIns="0" rtlCol="0" anchor="t"/>
-          <a:lstStyle/>
-          <a:p>
-            <a:pPr indent="0" marL="0">
-              <a:buNone/>
-            </a:pPr>
-            <a:r>
-              <a:rPr lang="en-US" sz="1300" i="1" dirty="0">
-                <a:solidFill>
-                  <a:srgbClr val="5E5B55"/>
-                </a:solidFill>
-                <a:latin typeface="Arial" pitchFamily="34" charset="0"/>
-                <a:ea typeface="Arial" pitchFamily="34" charset="-122"/>
-                <a:cs typeface="Arial" pitchFamily="34" charset="-120"/>
-              </a:rPr>
-              <a:t>Supported by the UNLV Office of Undergraduate Research Summer Undergraduate Research Fellowship. Raw record-run JSONs, transcripts, and diagnostics are archived in the repository (tests/record-results).</a:t>
+              <a:t>Supported by the UNLV Office of Undergraduate Research Summer Undergraduate Research Fellowship. Every number on this poster comes from the published test script’s output files, archived in the repository (tests/record-results). Reference numbers match the written report.</a:t>
             </a:r>
             <a:endParaRPr lang="en-US" sz="1300" dirty="0"/>
           </a:p>
